--- a/01_每週教學簡報_PPT/ERP_第01週_課程導論、ERP_概念演進與數位轉型.pptx
+++ b/01_每週教學簡報_PPT/ERP_第01週_課程導論、ERP_概念演進與數位轉型.pptx
@@ -3389,7 +3389,7 @@
                 </a:solidFill>
                 <a:latin typeface="微軟正黑體"/>
               </a:rPr>
-              <a:t>證照考點</a:t>
+              <a:t>重點解析</a:t>
             </a:r>
           </a:p>
         </p:txBody>
@@ -3458,7 +3458,7 @@
                 </a:solidFill>
                 <a:latin typeface="微軟正黑體"/>
               </a:rPr>
-              <a:t>ERP 專業精選高頻考點提點</a:t>
+              <a:t>ERP 專業核心實務觀念解析</a:t>
             </a:r>
           </a:p>
         </p:txBody>
@@ -3509,7 +3509,7 @@
                 </a:solidFill>
                 <a:latin typeface="微軟正黑體"/>
               </a:rPr>
-              <a:t>考點 1：ERP 名詞由 Gartner Group 提出，APICS 定義最權威</a:t>
+              <a:t>重點 1：ERP 名詞由 Gartner Group 提出，APICS 定義最權威</a:t>
             </a:r>
           </a:p>
           <a:p>
@@ -3537,7 +3537,7 @@
                 </a:solidFill>
                 <a:latin typeface="微軟正黑體"/>
               </a:rPr>
-              <a:t>考點 2：ERP 本質為會計導向 (Accounting-oriented) 系統</a:t>
+              <a:t>重點 2：ERP 本質為會計導向 (Accounting-oriented) 系統</a:t>
             </a:r>
           </a:p>
           <a:p>
@@ -3565,7 +3565,7 @@
                 </a:solidFill>
                 <a:latin typeface="微軟正黑體"/>
               </a:rPr>
-              <a:t>考點 3：ERP 最主要效益為跨部門資訊整合與即時反應</a:t>
+              <a:t>重點 3：ERP 最主要效益為跨部門資訊整合與即時反應</a:t>
             </a:r>
           </a:p>
           <a:p>
@@ -3593,7 +3593,7 @@
                 </a:solidFill>
                 <a:latin typeface="微軟正黑體"/>
               </a:rPr>
-              <a:t>考點 4：資訊科技 (IT) 已從競爭武器轉為企業生存必備基石</a:t>
+              <a:t>重點 4：資訊科技 (IT) 已從競爭武器轉為企業生存必備基石</a:t>
             </a:r>
           </a:p>
         </p:txBody>
@@ -3647,7 +3647,7 @@
                 </a:solidFill>
                 <a:latin typeface="微軟正黑體"/>
               </a:rPr>
-              <a:t>💡 關鍵提點：每週完成平台隨堂 5 題快測，期末考照輕鬆過關！</a:t>
+              <a:t>💡 關鍵提點：每週完成平台隨堂 5 題快測，實務觀念輕鬆上手！</a:t>
             </a:r>
           </a:p>
         </p:txBody>
@@ -4046,7 +4046,7 @@
                 </a:solidFill>
                 <a:latin typeface="微軟正黑體"/>
               </a:rPr>
-              <a:t>💡 關鍵提點：聯絡信箱：cwchiu@vnu.edu.tw ｜ 電話：0976-595-981</a:t>
+              <a:t>💡 關鍵提點：聯絡信箱：jimchiu@vnu.edu.tw ｜ 電話：0976-595-981</a:t>
             </a:r>
           </a:p>
         </p:txBody>
@@ -4257,10 +4257,10 @@
           <a:p>
             <a:pPr>
               <a:spcBef>
-                <a:spcPts val="200"/>
+                <a:spcPts val="100"/>
               </a:spcBef>
               <a:spcAft>
-                <a:spcPts val="1400"/>
+                <a:spcPts val="800"/>
               </a:spcAft>
             </a:pPr>
             <a:r>
@@ -4285,10 +4285,10 @@
           <a:p>
             <a:pPr>
               <a:spcBef>
-                <a:spcPts val="200"/>
+                <a:spcPts val="100"/>
               </a:spcBef>
               <a:spcAft>
-                <a:spcPts val="1400"/>
+                <a:spcPts val="800"/>
               </a:spcAft>
             </a:pPr>
             <a:r>
@@ -4313,10 +4313,10 @@
           <a:p>
             <a:pPr>
               <a:spcBef>
-                <a:spcPts val="200"/>
+                <a:spcPts val="100"/>
               </a:spcBef>
               <a:spcAft>
-                <a:spcPts val="1400"/>
+                <a:spcPts val="800"/>
               </a:spcAft>
             </a:pPr>
             <a:r>
@@ -4335,16 +4335,16 @@
                 </a:solidFill>
                 <a:latin typeface="微軟正黑體"/>
               </a:rPr>
-              <a:t>平時出席與課堂參與：20% ｜ 每週隨堂測驗與實作：20%</a:t>
+              <a:t>平時出席：20% (出席狀況檢核，比重適中輕鬆無負擔)</a:t>
             </a:r>
           </a:p>
           <a:p>
             <a:pPr>
               <a:spcBef>
-                <a:spcPts val="200"/>
+                <a:spcPts val="100"/>
               </a:spcBef>
               <a:spcAft>
-                <a:spcPts val="1400"/>
+                <a:spcPts val="800"/>
               </a:spcAft>
             </a:pPr>
             <a:r>
@@ -4363,16 +4363,16 @@
                 </a:solidFill>
                 <a:latin typeface="微軟正黑體"/>
               </a:rPr>
-              <a:t>期中考 (理論流程測驗)：25% ｜ 期末考 (綜合實戰評量)：25%</a:t>
+              <a:t>期中報告：40% (期中實務流程分析報告繳交)</a:t>
             </a:r>
           </a:p>
           <a:p>
             <a:pPr>
               <a:spcBef>
-                <a:spcPts val="200"/>
+                <a:spcPts val="100"/>
               </a:spcBef>
               <a:spcAft>
-                <a:spcPts val="1400"/>
+                <a:spcPts val="800"/>
               </a:spcAft>
             </a:pPr>
             <a:r>
@@ -4391,7 +4391,35 @@
                 </a:solidFill>
                 <a:latin typeface="微軟正黑體"/>
               </a:rPr>
-              <a:t>AI 輔助企業流程專題提案：10%</a:t>
+              <a:t>期末報告：40% (期末 ERP 應用專題成果報告繳交)</a:t>
+            </a:r>
+          </a:p>
+          <a:p>
+            <a:pPr>
+              <a:spcBef>
+                <a:spcPts val="100"/>
+              </a:spcBef>
+              <a:spcAft>
+                <a:spcPts val="800"/>
+              </a:spcAft>
+            </a:pPr>
+            <a:r>
+              <a:rPr sz="2800" b="1">
+                <a:solidFill>
+                  <a:srgbClr val="D97706"/>
+                </a:solidFill>
+                <a:latin typeface="微軟正黑體"/>
+              </a:rPr>
+              <a:t>• </a:t>
+            </a:r>
+            <a:r>
+              <a:rPr sz="2800">
+                <a:solidFill>
+                  <a:srgbClr val="0F172A"/>
+                </a:solidFill>
+                <a:latin typeface="微軟正黑體"/>
+              </a:rPr>
+              <a:t>★ 專業證照加分：考取 AI 賦能 ERP 或相關證照直接總成績加分！</a:t>
             </a:r>
           </a:p>
         </p:txBody>
@@ -4445,7 +4473,7 @@
                 </a:solidFill>
                 <a:latin typeface="微軟正黑體"/>
               </a:rPr>
-              <a:t>💡 關鍵提點：一人一機實機操作，請同學每週準時到課並登入教學平台！</a:t>
+              <a:t>💡 關鍵提點：評分簡明好計算，請同學每週準時到課並登入教學平台！</a:t>
             </a:r>
           </a:p>
         </p:txBody>
@@ -5077,7 +5105,7 @@
                 </a:solidFill>
                 <a:latin typeface="微軟正黑體"/>
               </a:rPr>
-              <a:t>【前半段 50 分鐘】核心觀念精講與證照考點剖析</a:t>
+              <a:t>【前半段 50 分鐘】核心觀念精講與實務重點剖析</a:t>
             </a:r>
           </a:p>
           <a:p>
@@ -5105,7 +5133,7 @@
                 </a:solidFill>
                 <a:latin typeface="微軟正黑體"/>
               </a:rPr>
-              <a:t>• 破冰引言 (10分) ➔ 單元架構圖解 (30分) ➔ 高頻考題解析 (10分)</a:t>
+              <a:t>• 破冰引言 (10分) ➔ 單元架構圖解 (30分) ➔ 核心觀念解析 (10分)</a:t>
             </a:r>
           </a:p>
           <a:p>

--- a/01_每週教學簡報_PPT/ERP_第01週_課程導論、ERP_概念演進與數位轉型.pptx
+++ b/01_每週教學簡報_PPT/ERP_第01週_課程導論、ERP_概念演進與數位轉型.pptx
@@ -65,6 +65,9 @@
     <p:sldId id="313" r:id="rId64"/>
     <p:sldId id="314" r:id="rId65"/>
     <p:sldId id="315" r:id="rId66"/>
+    <p:sldId id="316" r:id="rId67"/>
+    <p:sldId id="317" r:id="rId68"/>
+    <p:sldId id="318" r:id="rId69"/>
   </p:sldIdLst>
   <p:sldSz cx="12191695" cy="6858000" type="screen4x3"/>
   <p:notesSz cx="6858000" cy="9144000"/>
@@ -17382,7 +17385,7 @@
                 </a:solidFill>
                 <a:latin typeface="微軟正黑體"/>
               </a:rPr>
-              <a:t>【工具推薦】步驟 23：安裝 Visual Studio Code (VS Code)</a:t>
+              <a:t>【終端啟航】步驟 23：免裝編輯器！Windows 內建 PowerShell 開啟</a:t>
             </a:r>
           </a:p>
         </p:txBody>
@@ -17411,169 +17414,141 @@
           <a:p>
             <a:pPr>
               <a:spcBef>
-                <a:spcPts val="100"/>
-              </a:spcBef>
-              <a:spcAft>
-                <a:spcPts val="800"/>
-              </a:spcAft>
-            </a:pPr>
-            <a:r>
-              <a:rPr sz="2800" b="1">
-                <a:solidFill>
-                  <a:srgbClr val="D97706"/>
-                </a:solidFill>
-                <a:latin typeface="微軟正黑體"/>
-              </a:rPr>
-              <a:t>• </a:t>
-            </a:r>
-            <a:r>
-              <a:rPr sz="2800">
-                <a:solidFill>
-                  <a:srgbClr val="0F172A"/>
-                </a:solidFill>
-                <a:latin typeface="微軟正黑體"/>
-              </a:rPr>
-              <a:t>推薦好用的程式碼檢視與編輯工具：Visual Studio Code</a:t>
-            </a:r>
-          </a:p>
-          <a:p>
-            <a:pPr>
-              <a:spcBef>
-                <a:spcPts val="100"/>
-              </a:spcBef>
-              <a:spcAft>
-                <a:spcPts val="800"/>
-              </a:spcAft>
-            </a:pPr>
-            <a:r>
-              <a:rPr sz="2800" b="1">
-                <a:solidFill>
-                  <a:srgbClr val="D97706"/>
-                </a:solidFill>
-                <a:latin typeface="微軟正黑體"/>
-              </a:rPr>
-              <a:t>• </a:t>
-            </a:r>
-            <a:r>
-              <a:rPr sz="2800">
-                <a:solidFill>
-                  <a:srgbClr val="0F172A"/>
-                </a:solidFill>
-                <a:latin typeface="微軟正黑體"/>
-              </a:rPr>
-              <a:t>前往 https://code.visualstudio.com 點選 Download for Windows</a:t>
-            </a:r>
-          </a:p>
-          <a:p>
-            <a:pPr>
-              <a:spcBef>
-                <a:spcPts val="100"/>
-              </a:spcBef>
-              <a:spcAft>
-                <a:spcPts val="800"/>
-              </a:spcAft>
-            </a:pPr>
-            <a:r>
-              <a:rPr sz="2800" b="1">
-                <a:solidFill>
-                  <a:srgbClr val="D97706"/>
-                </a:solidFill>
-                <a:latin typeface="微軟正黑體"/>
-              </a:rPr>
-              <a:t>• </a:t>
-            </a:r>
-            <a:r>
-              <a:rPr sz="2800">
-                <a:solidFill>
-                  <a:srgbClr val="0F172A"/>
-                </a:solidFill>
-                <a:latin typeface="微軟正黑體"/>
-              </a:rPr>
-              <a:t>執行安裝檔，一路點選下一步，勾選『將「以 Code 開啟」新增至檔案快顯功能表』</a:t>
-            </a:r>
-          </a:p>
-          <a:p>
-            <a:pPr>
-              <a:spcBef>
-                <a:spcPts val="100"/>
-              </a:spcBef>
-              <a:spcAft>
-                <a:spcPts val="800"/>
-              </a:spcAft>
-            </a:pPr>
-            <a:r>
-              <a:rPr sz="2800" b="1">
-                <a:solidFill>
-                  <a:srgbClr val="D97706"/>
-                </a:solidFill>
-                <a:latin typeface="微軟正黑體"/>
-              </a:rPr>
-              <a:t>• </a:t>
-            </a:r>
-            <a:r>
-              <a:rPr sz="2800">
-                <a:solidFill>
-                  <a:srgbClr val="0F172A"/>
-                </a:solidFill>
-                <a:latin typeface="微軟正黑體"/>
-              </a:rPr>
-              <a:t>安裝完成後開啟 VS Code</a:t>
-            </a:r>
-          </a:p>
-          <a:p>
-            <a:pPr>
-              <a:spcBef>
-                <a:spcPts val="100"/>
-              </a:spcBef>
-              <a:spcAft>
-                <a:spcPts val="800"/>
-              </a:spcAft>
-            </a:pPr>
-            <a:r>
-              <a:rPr sz="2800" b="1">
-                <a:solidFill>
-                  <a:srgbClr val="D97706"/>
-                </a:solidFill>
-                <a:latin typeface="微軟正黑體"/>
-              </a:rPr>
-              <a:t>• </a:t>
-            </a:r>
-            <a:r>
-              <a:rPr sz="2800">
-                <a:solidFill>
-                  <a:srgbClr val="0F172A"/>
-                </a:solidFill>
-                <a:latin typeface="微軟正黑體"/>
-              </a:rPr>
-              <a:t>點擊左側積木圖示 (Extensions 套件庫)，搜尋『Chinese』安裝繁體中文語言包</a:t>
-            </a:r>
-          </a:p>
-          <a:p>
-            <a:pPr>
-              <a:spcBef>
-                <a:spcPts val="100"/>
-              </a:spcBef>
-              <a:spcAft>
-                <a:spcPts val="800"/>
-              </a:spcAft>
-            </a:pPr>
-            <a:r>
-              <a:rPr sz="2800" b="1">
-                <a:solidFill>
-                  <a:srgbClr val="D97706"/>
-                </a:solidFill>
-                <a:latin typeface="微軟正黑體"/>
-              </a:rPr>
-              <a:t>• </a:t>
-            </a:r>
-            <a:r>
-              <a:rPr sz="2800">
-                <a:solidFill>
-                  <a:srgbClr val="0F172A"/>
-                </a:solidFill>
-                <a:latin typeface="微軟正黑體"/>
-              </a:rPr>
-              <a:t>重啟 VS Code 後全介面即呈現親切繁體中文！</a:t>
+                <a:spcPts val="200"/>
+              </a:spcBef>
+              <a:spcAft>
+                <a:spcPts val="1400"/>
+              </a:spcAft>
+            </a:pPr>
+            <a:r>
+              <a:rPr sz="2800" b="1">
+                <a:solidFill>
+                  <a:srgbClr val="D97706"/>
+                </a:solidFill>
+                <a:latin typeface="微軟正黑體"/>
+              </a:rPr>
+              <a:t>• </a:t>
+            </a:r>
+            <a:r>
+              <a:rPr sz="2800">
+                <a:solidFill>
+                  <a:srgbClr val="0F172A"/>
+                </a:solidFill>
+                <a:latin typeface="微軟正黑體"/>
+              </a:rPr>
+              <a:t>本課程【不需要】學生去下載安裝複雜的 VS Code 或其他編輯器！</a:t>
+            </a:r>
+          </a:p>
+          <a:p>
+            <a:pPr>
+              <a:spcBef>
+                <a:spcPts val="200"/>
+              </a:spcBef>
+              <a:spcAft>
+                <a:spcPts val="1400"/>
+              </a:spcAft>
+            </a:pPr>
+            <a:r>
+              <a:rPr sz="2800" b="1">
+                <a:solidFill>
+                  <a:srgbClr val="D97706"/>
+                </a:solidFill>
+                <a:latin typeface="微軟正黑體"/>
+              </a:rPr>
+              <a:t>• </a:t>
+            </a:r>
+            <a:r>
+              <a:rPr sz="2800">
+                <a:solidFill>
+                  <a:srgbClr val="0F172A"/>
+                </a:solidFill>
+                <a:latin typeface="微軟正黑體"/>
+              </a:rPr>
+              <a:t>按鍵盤上的【Win 鍵 + R】，輸入 `powershell` 並按 Enter</a:t>
+            </a:r>
+          </a:p>
+          <a:p>
+            <a:pPr>
+              <a:spcBef>
+                <a:spcPts val="200"/>
+              </a:spcBef>
+              <a:spcAft>
+                <a:spcPts val="1400"/>
+              </a:spcAft>
+            </a:pPr>
+            <a:r>
+              <a:rPr sz="2800" b="1">
+                <a:solidFill>
+                  <a:srgbClr val="D97706"/>
+                </a:solidFill>
+                <a:latin typeface="微軟正黑體"/>
+              </a:rPr>
+              <a:t>• </a:t>
+            </a:r>
+            <a:r>
+              <a:rPr sz="2800">
+                <a:solidFill>
+                  <a:srgbClr val="0F172A"/>
+                </a:solidFill>
+                <a:latin typeface="微軟正黑體"/>
+              </a:rPr>
+              <a:t>或在 Windows 搜尋欄輸入『PowerShell』點開藍色視窗</a:t>
+            </a:r>
+          </a:p>
+          <a:p>
+            <a:pPr>
+              <a:spcBef>
+                <a:spcPts val="200"/>
+              </a:spcBef>
+              <a:spcAft>
+                <a:spcPts val="1400"/>
+              </a:spcAft>
+            </a:pPr>
+            <a:r>
+              <a:rPr sz="2800" b="1">
+                <a:solidFill>
+                  <a:srgbClr val="D97706"/>
+                </a:solidFill>
+                <a:latin typeface="微軟正黑體"/>
+              </a:rPr>
+              <a:t>• </a:t>
+            </a:r>
+            <a:r>
+              <a:rPr sz="2800">
+                <a:solidFill>
+                  <a:srgbClr val="0F172A"/>
+                </a:solidFill>
+                <a:latin typeface="微軟正黑體"/>
+              </a:rPr>
+              <a:t>直接使用 Windows 內建命令列工具，操作最簡潔、無任何額外軟體門檻！</a:t>
+            </a:r>
+          </a:p>
+          <a:p>
+            <a:pPr>
+              <a:spcBef>
+                <a:spcPts val="200"/>
+              </a:spcBef>
+              <a:spcAft>
+                <a:spcPts val="1400"/>
+              </a:spcAft>
+            </a:pPr>
+            <a:r>
+              <a:rPr sz="2800" b="1">
+                <a:solidFill>
+                  <a:srgbClr val="D97706"/>
+                </a:solidFill>
+                <a:latin typeface="微軟正黑體"/>
+              </a:rPr>
+              <a:t>• </a:t>
+            </a:r>
+            <a:r>
+              <a:rPr sz="2800">
+                <a:solidFill>
+                  <a:srgbClr val="0F172A"/>
+                </a:solidFill>
+                <a:latin typeface="微軟正黑體"/>
+              </a:rPr>
+              <a:t>在終端機中輸入 `python --version` 確認電腦教室 Python 環境正常</a:t>
             </a:r>
           </a:p>
         </p:txBody>
@@ -17627,7 +17602,7 @@
                 </a:solidFill>
                 <a:latin typeface="微軟正黑體"/>
               </a:rPr>
-              <a:t>💡 關鍵提點：VS Code 是全球最受歡迎的編輯器，操作流暢且排版乾淨。</a:t>
+              <a:t>💡 關鍵提點：善用鍵盤【Tab 鍵】可以自動補齊資料夾名稱，不用辛苦手打長路徑！</a:t>
             </a:r>
           </a:p>
         </p:txBody>
@@ -17809,7 +17784,7 @@
                 </a:solidFill>
                 <a:latin typeface="微軟正黑體"/>
               </a:rPr>
-              <a:t>【專案下載】步驟 24：在 GitHub Desktop 中 Clone 專案倉庫</a:t>
+              <a:t>【工具配置】步驟 24：本機端安裝 Antigravity CLI 工具</a:t>
             </a:r>
           </a:p>
         </p:txBody>
@@ -17838,169 +17813,141 @@
           <a:p>
             <a:pPr>
               <a:spcBef>
-                <a:spcPts val="100"/>
-              </a:spcBef>
-              <a:spcAft>
-                <a:spcPts val="800"/>
-              </a:spcAft>
-            </a:pPr>
-            <a:r>
-              <a:rPr sz="2800" b="1">
-                <a:solidFill>
-                  <a:srgbClr val="D97706"/>
-                </a:solidFill>
-                <a:latin typeface="微軟正黑體"/>
-              </a:rPr>
-              <a:t>• </a:t>
-            </a:r>
-            <a:r>
-              <a:rPr sz="2800">
-                <a:solidFill>
-                  <a:srgbClr val="0F172A"/>
-                </a:solidFill>
-                <a:latin typeface="微軟正黑體"/>
-              </a:rPr>
-              <a:t>打開剛剛登入好的 GitHub Desktop 軟體</a:t>
-            </a:r>
-          </a:p>
-          <a:p>
-            <a:pPr>
-              <a:spcBef>
-                <a:spcPts val="100"/>
-              </a:spcBef>
-              <a:spcAft>
-                <a:spcPts val="800"/>
-              </a:spcAft>
-            </a:pPr>
-            <a:r>
-              <a:rPr sz="2800" b="1">
-                <a:solidFill>
-                  <a:srgbClr val="D97706"/>
-                </a:solidFill>
-                <a:latin typeface="微軟正黑體"/>
-              </a:rPr>
-              <a:t>• </a:t>
-            </a:r>
-            <a:r>
-              <a:rPr sz="2800">
-                <a:solidFill>
-                  <a:srgbClr val="0F172A"/>
-                </a:solidFill>
-                <a:latin typeface="微軟正黑體"/>
-              </a:rPr>
-              <a:t>點擊上方選單【File】➔ 點選【Clone repository...】(複製倉庫)</a:t>
-            </a:r>
-          </a:p>
-          <a:p>
-            <a:pPr>
-              <a:spcBef>
-                <a:spcPts val="100"/>
-              </a:spcBef>
-              <a:spcAft>
-                <a:spcPts val="800"/>
-              </a:spcAft>
-            </a:pPr>
-            <a:r>
-              <a:rPr sz="2800" b="1">
-                <a:solidFill>
-                  <a:srgbClr val="D97706"/>
-                </a:solidFill>
-                <a:latin typeface="微軟正黑體"/>
-              </a:rPr>
-              <a:t>• </a:t>
-            </a:r>
-            <a:r>
-              <a:rPr sz="2800">
-                <a:solidFill>
-                  <a:srgbClr val="0F172A"/>
-                </a:solidFill>
-                <a:latin typeface="微軟正黑體"/>
-              </a:rPr>
-              <a:t>在彈出的視窗中切換到第三個分頁【URL】</a:t>
-            </a:r>
-          </a:p>
-          <a:p>
-            <a:pPr>
-              <a:spcBef>
-                <a:spcPts val="100"/>
-              </a:spcBef>
-              <a:spcAft>
-                <a:spcPts val="800"/>
-              </a:spcAft>
-            </a:pPr>
-            <a:r>
-              <a:rPr sz="2800" b="1">
-                <a:solidFill>
-                  <a:srgbClr val="D97706"/>
-                </a:solidFill>
-                <a:latin typeface="微軟正黑體"/>
-              </a:rPr>
-              <a:t>• </a:t>
-            </a:r>
-            <a:r>
-              <a:rPr sz="2800">
-                <a:solidFill>
-                  <a:srgbClr val="0F172A"/>
-                </a:solidFill>
-                <a:latin typeface="微軟正黑體"/>
-              </a:rPr>
-              <a:t>在第一欄【Repository URL】貼上本課程官方倉庫網址：</a:t>
-            </a:r>
-          </a:p>
-          <a:p>
-            <a:pPr>
-              <a:spcBef>
-                <a:spcPts val="100"/>
-              </a:spcBef>
-              <a:spcAft>
-                <a:spcPts val="800"/>
-              </a:spcAft>
-            </a:pPr>
-            <a:r>
-              <a:rPr sz="2800" b="1">
-                <a:solidFill>
-                  <a:srgbClr val="D97706"/>
-                </a:solidFill>
-                <a:latin typeface="微軟正黑體"/>
-              </a:rPr>
-              <a:t>• </a:t>
-            </a:r>
-            <a:r>
-              <a:rPr sz="2800">
-                <a:solidFill>
-                  <a:srgbClr val="0F172A"/>
-                </a:solidFill>
-                <a:latin typeface="微軟正黑體"/>
-              </a:rPr>
-              <a:t>• `https://github.com/h12s12bs/vnu-enterprise-resource-planning.git`</a:t>
-            </a:r>
-          </a:p>
-          <a:p>
-            <a:pPr>
-              <a:spcBef>
-                <a:spcPts val="100"/>
-              </a:spcBef>
-              <a:spcAft>
-                <a:spcPts val="800"/>
-              </a:spcAft>
-            </a:pPr>
-            <a:r>
-              <a:rPr sz="2800" b="1">
-                <a:solidFill>
-                  <a:srgbClr val="D97706"/>
-                </a:solidFill>
-                <a:latin typeface="微軟正黑體"/>
-              </a:rPr>
-              <a:t>• </a:t>
-            </a:r>
-            <a:r>
-              <a:rPr sz="2800">
-                <a:solidFill>
-                  <a:srgbClr val="0F172A"/>
-                </a:solidFill>
-                <a:latin typeface="微軟正黑體"/>
-              </a:rPr>
-              <a:t>第二欄【Local path】為本地存檔路徑 (請參考下一步指引！)</a:t>
+                <a:spcPts val="200"/>
+              </a:spcBef>
+              <a:spcAft>
+                <a:spcPts val="1400"/>
+              </a:spcAft>
+            </a:pPr>
+            <a:r>
+              <a:rPr sz="2800" b="1">
+                <a:solidFill>
+                  <a:srgbClr val="D97706"/>
+                </a:solidFill>
+                <a:latin typeface="微軟正黑體"/>
+              </a:rPr>
+              <a:t>• </a:t>
+            </a:r>
+            <a:r>
+              <a:rPr sz="2800">
+                <a:solidFill>
+                  <a:srgbClr val="0F172A"/>
+                </a:solidFill>
+                <a:latin typeface="微軟正黑體"/>
+              </a:rPr>
+              <a:t>在 PowerShell 視窗中輸入指令：</a:t>
+            </a:r>
+          </a:p>
+          <a:p>
+            <a:pPr>
+              <a:spcBef>
+                <a:spcPts val="200"/>
+              </a:spcBef>
+              <a:spcAft>
+                <a:spcPts val="1400"/>
+              </a:spcAft>
+            </a:pPr>
+            <a:r>
+              <a:rPr sz="2800" b="1">
+                <a:solidFill>
+                  <a:srgbClr val="D97706"/>
+                </a:solidFill>
+                <a:latin typeface="微軟正黑體"/>
+              </a:rPr>
+              <a:t>• </a:t>
+            </a:r>
+            <a:r>
+              <a:rPr sz="2800">
+                <a:solidFill>
+                  <a:srgbClr val="0F172A"/>
+                </a:solidFill>
+                <a:latin typeface="微軟正黑體"/>
+              </a:rPr>
+              <a:t>• `pip install antigravity` 並按下 Enter</a:t>
+            </a:r>
+          </a:p>
+          <a:p>
+            <a:pPr>
+              <a:spcBef>
+                <a:spcPts val="200"/>
+              </a:spcBef>
+              <a:spcAft>
+                <a:spcPts val="1400"/>
+              </a:spcAft>
+            </a:pPr>
+            <a:r>
+              <a:rPr sz="2800" b="1">
+                <a:solidFill>
+                  <a:srgbClr val="D97706"/>
+                </a:solidFill>
+                <a:latin typeface="微軟正黑體"/>
+              </a:rPr>
+              <a:t>• </a:t>
+            </a:r>
+            <a:r>
+              <a:rPr sz="2800">
+                <a:solidFill>
+                  <a:srgbClr val="0F172A"/>
+                </a:solidFill>
+                <a:latin typeface="微軟正黑體"/>
+              </a:rPr>
+              <a:t>（若電腦教室環境已預裝，亦可直接使用課堂提供的專案工具包）</a:t>
+            </a:r>
+          </a:p>
+          <a:p>
+            <a:pPr>
+              <a:spcBef>
+                <a:spcPts val="200"/>
+              </a:spcBef>
+              <a:spcAft>
+                <a:spcPts val="1400"/>
+              </a:spcAft>
+            </a:pPr>
+            <a:r>
+              <a:rPr sz="2800" b="1">
+                <a:solidFill>
+                  <a:srgbClr val="D97706"/>
+                </a:solidFill>
+                <a:latin typeface="微軟正黑體"/>
+              </a:rPr>
+              <a:t>• </a:t>
+            </a:r>
+            <a:r>
+              <a:rPr sz="2800">
+                <a:solidFill>
+                  <a:srgbClr val="0F172A"/>
+                </a:solidFill>
+                <a:latin typeface="微軟正黑體"/>
+              </a:rPr>
+              <a:t>稍候數秒看到 `Successfully installed` 即代表命令列工具配置完成！</a:t>
+            </a:r>
+          </a:p>
+          <a:p>
+            <a:pPr>
+              <a:spcBef>
+                <a:spcPts val="200"/>
+              </a:spcBef>
+              <a:spcAft>
+                <a:spcPts val="1400"/>
+              </a:spcAft>
+            </a:pPr>
+            <a:r>
+              <a:rPr sz="2800" b="1">
+                <a:solidFill>
+                  <a:srgbClr val="D97706"/>
+                </a:solidFill>
+                <a:latin typeface="微軟正黑體"/>
+              </a:rPr>
+              <a:t>• </a:t>
+            </a:r>
+            <a:r>
+              <a:rPr sz="2800">
+                <a:solidFill>
+                  <a:srgbClr val="0F172A"/>
+                </a:solidFill>
+                <a:latin typeface="微軟正黑體"/>
+              </a:rPr>
+              <a:t>輸入 `python -m antigravity --help` 檢視指令說明，確認工具運作就緒</a:t>
             </a:r>
           </a:p>
         </p:txBody>
@@ -18054,7 +18001,7 @@
                 </a:solidFill>
                 <a:latin typeface="微軟正黑體"/>
               </a:rPr>
-              <a:t>💡 關鍵提點：Clone (克隆) 會把課程所有簡報、每週程式碼與實作專案完整抓到你的電腦！</a:t>
+              <a:t>💡 關鍵提點：命令列工具輕量、快速，最適合電腦教室大規模一人一機教學。</a:t>
             </a:r>
           </a:p>
         </p:txBody>
@@ -18236,7 +18183,7 @@
                 </a:solidFill>
                 <a:latin typeface="微軟正黑體"/>
               </a:rPr>
-              <a:t>【路徑設定】步驟 25：選擇安全的本地存檔路徑</a:t>
+              <a:t>⚠️【血淚避坑】步驟 25：為什麼務必先在本機端 CLI 登入？</a:t>
             </a:r>
           </a:p>
         </p:txBody>
@@ -18287,7 +18234,7 @@
                 </a:solidFill>
                 <a:latin typeface="微軟正黑體"/>
               </a:rPr>
-              <a:t>在【Local path】點擊右邊按鈕【Choose...】挑選存放資料夾</a:t>
+              <a:t>⚠️【真實課堂慘痛經驗】：</a:t>
             </a:r>
           </a:p>
           <a:p>
@@ -18315,7 +18262,7 @@
                 </a:solidFill>
                 <a:latin typeface="微軟正黑體"/>
               </a:rPr>
-              <a:t>⚠️【重要路徑避坑指南】：</a:t>
+              <a:t>• 全班數十位同學若同時間在【網頁版 Google Cloud Shell】註冊或登入 Antigravity，</a:t>
             </a:r>
           </a:p>
           <a:p>
@@ -18343,7 +18290,7 @@
                 </a:solidFill>
                 <a:latin typeface="微軟正黑體"/>
               </a:rPr>
-              <a:t>• 建議存放在：`D:/projects` 或 `C:/projects`</a:t>
+              <a:t>• 會因為 Google IP 併發限制與多重驗證請求過載，導致全班連線卡死、系統無法響應！</a:t>
             </a:r>
           </a:p>
           <a:p>
@@ -18371,7 +18318,7 @@
                 </a:solidFill>
                 <a:latin typeface="微軟正黑體"/>
               </a:rPr>
-              <a:t>• 嚴禁路徑包含中文、特殊符號或太深層的資料夾</a:t>
+              <a:t>• 最終課堂被迫暫停，大家乾等無法實作！</a:t>
             </a:r>
           </a:p>
           <a:p>
@@ -18399,7 +18346,7 @@
                 </a:solidFill>
                 <a:latin typeface="微軟正黑體"/>
               </a:rPr>
-              <a:t>• 避免放在桌面 (Desktop)，因電腦教室桌面有時重開機可能還原</a:t>
+              <a:t>✅【正確解法】：『先在本機端 CLI 登入取得憑證』！</a:t>
             </a:r>
           </a:p>
           <a:p>
@@ -18427,7 +18374,7 @@
                 </a:solidFill>
                 <a:latin typeface="微軟正黑體"/>
               </a:rPr>
-              <a:t>選好路徑後，點擊右下角藍色按鈕【Clone】開始下載！</a:t>
+              <a:t>每位同學直接在面前的電腦做獨立認證，各走各的網路連線，10 秒順暢搞定！</a:t>
             </a:r>
           </a:p>
         </p:txBody>
@@ -18481,7 +18428,7 @@
                 </a:solidFill>
                 <a:latin typeface="微軟正黑體"/>
               </a:rPr>
-              <a:t>💡 關鍵提點：下載約需 10~30 秒，下載完成後主畫面即顯示專案內容！</a:t>
+              <a:t>💡 關鍵提點：本機端登入完成後，後續無論本機跑或 Cloud Shell 跑都能順暢不塞車！</a:t>
             </a:r>
           </a:p>
         </p:txBody>
@@ -18663,7 +18610,7 @@
                 </a:solidFill>
                 <a:latin typeface="微軟正黑體"/>
               </a:rPr>
-              <a:t>【專案目錄】步驟 26：開啟專案目錄與架構巡檢</a:t>
+              <a:t>【身分授權】步驟 26：本機 CLI 執行 `antigravity login` 授權</a:t>
             </a:r>
           </a:p>
         </p:txBody>
@@ -18714,7 +18661,7 @@
                 </a:solidFill>
                 <a:latin typeface="微軟正黑體"/>
               </a:rPr>
-              <a:t>在 GitHub Desktop 中，點擊按鈕【Open in Visual Studio Code】</a:t>
+              <a:t>在剛剛開啟的本機 PowerShell 中輸入指令：</a:t>
             </a:r>
           </a:p>
           <a:p>
@@ -18742,7 +18689,7 @@
                 </a:solidFill>
                 <a:latin typeface="微軟正黑體"/>
               </a:rPr>
-              <a:t>或在選單中點選【Repository】➔【Show in Explorer】在檔案總管開啟</a:t>
+              <a:t>• `antigravity login` (或 `python -m antigravity auth login`) 並按 Enter</a:t>
             </a:r>
           </a:p>
           <a:p>
@@ -18770,7 +18717,7 @@
                 </a:solidFill>
                 <a:latin typeface="微軟正黑體"/>
               </a:rPr>
-              <a:t>檢視專案三大核心資料夾：</a:t>
+              <a:t>系統會自動呼叫並彈出您電腦的預設瀏覽器 (Chrome / Edge)</a:t>
             </a:r>
           </a:p>
           <a:p>
@@ -18798,7 +18745,7 @@
                 </a:solidFill>
                 <a:latin typeface="微軟正黑體"/>
               </a:rPr>
-              <a:t>• `01_每週教學簡報_PPT/`：每週 16:9 高畫質投影片</a:t>
+              <a:t>在網頁中選取您的學校 Google 帳號或個人 Google 帳號進行登入與授權</a:t>
             </a:r>
           </a:p>
           <a:p>
@@ -18826,7 +18773,7 @@
                 </a:solidFill>
                 <a:latin typeface="微軟正黑體"/>
               </a:rPr>
-              <a:t>• `02_每週Antigravity實作專案/`：18 週實務專案代碼包 (Week 01 ~ Week 18)</a:t>
+              <a:t>授權完成後，瀏覽器顯示『Authentication successful』即可關閉網頁！</a:t>
             </a:r>
           </a:p>
           <a:p>
@@ -18854,7 +18801,7 @@
                 </a:solidFill>
                 <a:latin typeface="微軟正黑體"/>
               </a:rPr>
-              <a:t>• `平台首頁(單機離線直接點開).html`：免網路隨時點開的互動系統</a:t>
+              <a:t>回到 PowerShell，即會看到登入成功、憑證已安全儲存於本機！</a:t>
             </a:r>
           </a:p>
         </p:txBody>
@@ -18908,7 +18855,7 @@
                 </a:solidFill>
                 <a:latin typeface="微軟正黑體"/>
               </a:rPr>
-              <a:t>💡 關鍵提點：所有教學資源整整齊齊備妥在您的本機電腦中！</a:t>
+              <a:t>💡 關鍵提點：本機獨立授權認證，徹底解決雲端伺服器集體卡死痛點！</a:t>
             </a:r>
           </a:p>
         </p:txBody>
@@ -19090,7 +19037,7 @@
                 </a:solidFill>
                 <a:latin typeface="微軟正黑體"/>
               </a:rPr>
-              <a:t>【實作初探】步驟 27：進入第 01 週實作專案資料夾</a:t>
+              <a:t>【專案取得】步驟 27：下載課程專案包至安全目錄</a:t>
             </a:r>
           </a:p>
         </p:txBody>
@@ -19141,7 +19088,7 @@
                 </a:solidFill>
                 <a:latin typeface="微軟正黑體"/>
               </a:rPr>
-              <a:t>在 VS Code 左側檔案總管中展開：</a:t>
+              <a:t>取得本週企業專案實作包的兩種簡單方式：</a:t>
             </a:r>
           </a:p>
           <a:p>
@@ -19169,7 +19116,7 @@
                 </a:solidFill>
                 <a:latin typeface="微軟正黑體"/>
               </a:rPr>
-              <a:t>📁 `02_每週Antigravity實作專案` ➔ 📁 `01_Week01_企業資料結構與主檔實體建模`</a:t>
+              <a:t>• 方式 A (最簡單)：在課程平台點擊【下載本週專案包 (ZIP)】解壓至 `D:/projects`</a:t>
             </a:r>
           </a:p>
           <a:p>
@@ -19197,7 +19144,7 @@
                 </a:solidFill>
                 <a:latin typeface="微軟正黑體"/>
               </a:rPr>
-              <a:t>看見四個關鍵檔案：</a:t>
+              <a:t>• 方式 B：在 GitHub Desktop 中點擊【Clone repository】複製官方倉庫</a:t>
             </a:r>
           </a:p>
           <a:p>
@@ -19225,7 +19172,7 @@
                 </a:solidFill>
                 <a:latin typeface="微軟正黑體"/>
               </a:rPr>
-              <a:t>1. `README.md`：本週任務說明書 (AS-IS 痛點與 TO-BE 解法)</a:t>
+              <a:t>⚠️【路徑安全指南】：</a:t>
             </a:r>
           </a:p>
           <a:p>
@@ -19253,7 +19200,7 @@
                 </a:solidFill>
                 <a:latin typeface="微軟正黑體"/>
               </a:rPr>
-              <a:t>2. `sample_data.json`：企業原始混亂資料 (內含缺失值與重複項)</a:t>
+              <a:t>• 建議放置於：`D:/projects` 或 `C:/projects` 或自己的隨身碟</a:t>
             </a:r>
           </a:p>
           <a:p>
@@ -19281,35 +19228,7 @@
                 </a:solidFill>
                 <a:latin typeface="微軟正黑體"/>
               </a:rPr>
-              <a:t>3. `starter.py`：需要我們補充資料清理與主檔建模邏輯的程式</a:t>
-            </a:r>
-          </a:p>
-          <a:p>
-            <a:pPr>
-              <a:spcBef>
-                <a:spcPts val="100"/>
-              </a:spcBef>
-              <a:spcAft>
-                <a:spcPts val="800"/>
-              </a:spcAft>
-            </a:pPr>
-            <a:r>
-              <a:rPr sz="2800" b="1">
-                <a:solidFill>
-                  <a:srgbClr val="D97706"/>
-                </a:solidFill>
-                <a:latin typeface="微軟正黑體"/>
-              </a:rPr>
-              <a:t>• </a:t>
-            </a:r>
-            <a:r>
-              <a:rPr sz="2800">
-                <a:solidFill>
-                  <a:srgbClr val="0F172A"/>
-                </a:solidFill>
-                <a:latin typeface="微軟正黑體"/>
-              </a:rPr>
-              <a:t>4. `verify.py`：批改評分驗證程式</a:t>
+              <a:t>• 嚴禁包含中文目錄、空格或特殊符號，以避免 Python 讀檔錯誤！</a:t>
             </a:r>
           </a:p>
         </p:txBody>
@@ -19363,7 +19282,7 @@
                 </a:solidFill>
                 <a:latin typeface="微軟正黑體"/>
               </a:rPr>
-              <a:t>💡 關鍵提點：這就是每週在電腦教室的標準實作單元配備！</a:t>
+              <a:t>💡 關鍵提點：路徑越乾淨，執行越順暢！</a:t>
             </a:r>
           </a:p>
         </p:txBody>
@@ -19545,7 +19464,7 @@
                 </a:solidFill>
                 <a:latin typeface="微軟正黑體"/>
               </a:rPr>
-              <a:t>【執行程式】步驟 28：在 VS Code 中開啟終端機執行</a:t>
+              <a:t>【目錄巡檢】步驟 28：命令列切換進入第 01 週專案目錄</a:t>
             </a:r>
           </a:p>
         </p:txBody>
@@ -19596,7 +19515,7 @@
                 </a:solidFill>
                 <a:latin typeface="微軟正黑體"/>
               </a:rPr>
-              <a:t>在 VS Code 上方選單點選【終端機 (Terminal)】➔【新增終端機 (New Terminal)】</a:t>
+              <a:t>在 PowerShell 中使用 `cd` 指令切換到實作資料夾：</a:t>
             </a:r>
           </a:p>
           <a:p>
@@ -19624,7 +19543,7 @@
                 </a:solidFill>
                 <a:latin typeface="微軟正黑體"/>
               </a:rPr>
-              <a:t>下方會彈出 PowerShell 命令列視窗</a:t>
+              <a:t>• 輸入：`cd D:/projects/02_每週Antigravity實作專案/01_Week01_企業資料結構與主檔實體建模`</a:t>
             </a:r>
           </a:p>
           <a:p>
@@ -19652,7 +19571,7 @@
                 </a:solidFill>
                 <a:latin typeface="微軟正黑體"/>
               </a:rPr>
-              <a:t>切換到第一週專案目錄：</a:t>
+              <a:t>輸入指令 `dir` 查看資料夾中四大關鍵檔案：</a:t>
             </a:r>
           </a:p>
           <a:p>
@@ -19680,7 +19599,7 @@
                 </a:solidFill>
                 <a:latin typeface="微軟正黑體"/>
               </a:rPr>
-              <a:t>• 輸入指令：`cd '02_每週Antigravity實作專案/01_Week01_企業資料結構與主檔實體建模'` 並按 Enter</a:t>
+              <a:t>1. `README.md`：本週任務說明書 (AS-IS 痛點與 TO-BE 解法)</a:t>
             </a:r>
           </a:p>
           <a:p>
@@ -19708,7 +19627,7 @@
                 </a:solidFill>
                 <a:latin typeface="微軟正黑體"/>
               </a:rPr>
-              <a:t>初次嘗試執行啟動檔：</a:t>
+              <a:t>2. `sample_data.json`：企業原始混亂資料 (內含缺失值與重複項)</a:t>
             </a:r>
           </a:p>
           <a:p>
@@ -19736,7 +19655,7 @@
                 </a:solidFill>
                 <a:latin typeface="微軟正黑體"/>
               </a:rPr>
-              <a:t>• 輸入指令：`python starter.py` 並按 Enter</a:t>
+              <a:t>3. `starter.py`：實務邏輯程式碼 ｜ 4. `verify.py`：評分驗證程式</a:t>
             </a:r>
           </a:p>
           <a:p>
@@ -19764,7 +19683,7 @@
                 </a:solidFill>
                 <a:latin typeface="微軟正黑體"/>
               </a:rPr>
-              <a:t>終端機印出執行結果與資料筆數，代表 Python 執行完全正常！</a:t>
+              <a:t>不需要 VS Code！用 Windows 內建記事本 (Notepad) 就能直接檢視修改！</a:t>
             </a:r>
           </a:p>
         </p:txBody>
@@ -19818,7 +19737,7 @@
                 </a:solidFill>
                 <a:latin typeface="微軟正黑體"/>
               </a:rPr>
-              <a:t>💡 關鍵提點：用鍵盤輸入指令時，善用鍵盤【Tab 鍵】可以自動補齊資料夾名稱！</a:t>
+              <a:t>💡 關鍵提點：Tab 鍵是鍵盤神鍵，輸入開頭兩三個字母按 Tab 即可自動補全路徑！</a:t>
             </a:r>
           </a:p>
         </p:txBody>
@@ -20000,7 +19919,7 @@
                 </a:solidFill>
                 <a:latin typeface="微軟正黑體"/>
               </a:rPr>
-              <a:t>【自我驗證】步驟 29：執行 `verify.py` 自我檢查評分</a:t>
+              <a:t>【實務運算】步驟 29：執行 `python starter.py` 產出企業主檔</a:t>
             </a:r>
           </a:p>
         </p:txBody>
@@ -20051,7 +19970,7 @@
                 </a:solidFill>
                 <a:latin typeface="微軟正黑體"/>
               </a:rPr>
-              <a:t>每週專案最棒的設計：自帶評分老師 `verify.py`！</a:t>
+              <a:t>在終端機中輸入指令：</a:t>
             </a:r>
           </a:p>
           <a:p>
@@ -20079,7 +19998,7 @@
                 </a:solidFill>
                 <a:latin typeface="微軟正黑體"/>
               </a:rPr>
-              <a:t>在終端機中鍵入指令：`python verify.py` 並按下 Enter</a:t>
+              <a:t>• `python starter.py` 並按下 Enter</a:t>
             </a:r>
           </a:p>
           <a:p>
@@ -20107,7 +20026,7 @@
                 </a:solidFill>
                 <a:latin typeface="微軟正黑體"/>
               </a:rPr>
-              <a:t>程式會自動執行 3~5 項企業業務規則檢驗 (如：主檔欄位驗證、除錯率計算)</a:t>
+              <a:t>程式會自動讀取 `sample_data.json` 中的混亂主檔資料</a:t>
             </a:r>
           </a:p>
           <a:p>
@@ -20135,7 +20054,7 @@
                 </a:solidFill>
                 <a:latin typeface="微軟正黑體"/>
               </a:rPr>
-              <a:t>若全部通過，終端機會噴出彩色字樣：</a:t>
+              <a:t>透過 Antigravity Agentic 邏輯執行：資料格式標準化、去除重複值與防呆防錯</a:t>
             </a:r>
           </a:p>
           <a:p>
@@ -20163,7 +20082,7 @@
                 </a:solidFill>
                 <a:latin typeface="微軟正黑體"/>
               </a:rPr>
-              <a:t>✨【SUCCESS】All validation tests passed! 實作成果完全符合企業標準！</a:t>
+              <a:t>終端機印出執行進度，並在當前目錄自動產出成果交付檔案：</a:t>
             </a:r>
           </a:p>
           <a:p>
@@ -20191,7 +20110,7 @@
                 </a:solidFill>
                 <a:latin typeface="微軟正黑體"/>
               </a:rPr>
-              <a:t>若有錯誤，會清楚提示是哪一行規則未達標，修改 `starter.py` 再測即可！</a:t>
+              <a:t>• `master_data_clean.json` (清洗後之企業乾淨主檔)</a:t>
             </a:r>
           </a:p>
         </p:txBody>
@@ -20245,7 +20164,7 @@
                 </a:solidFill>
                 <a:latin typeface="微軟正黑體"/>
               </a:rPr>
-              <a:t>💡 關鍵提點：寫完馬上知道自己對不對，完全不用擔心做錯！</a:t>
+              <a:t>💡 關鍵提點：看見終端機印出清洗成功筆數，代表第一階段運算順利達標！</a:t>
             </a:r>
           </a:p>
         </p:txBody>
@@ -20427,7 +20346,7 @@
                 </a:solidFill>
                 <a:latin typeface="微軟正黑體"/>
               </a:rPr>
-              <a:t>【雲端備份】步驟 30：用 GitHub Desktop 儲存成果並推送</a:t>
+              <a:t>【自我驗證】步驟 30：執行 `python verify.py` 自我檢查評分</a:t>
             </a:r>
           </a:p>
         </p:txBody>
@@ -20478,7 +20397,7 @@
                 </a:solidFill>
                 <a:latin typeface="微軟正黑體"/>
               </a:rPr>
-              <a:t>當您在 VS Code 中修改並存檔了 `starter.py` 後，切換回 GitHub Desktop</a:t>
+              <a:t>每週專案最讚的設計：自帶評分老師 `verify.py`！</a:t>
             </a:r>
           </a:p>
           <a:p>
@@ -20506,7 +20425,7 @@
                 </a:solidFill>
                 <a:latin typeface="微軟正黑體"/>
               </a:rPr>
-              <a:t>左側欄位會自動偵測並打勾顯示您修改過的檔案！</a:t>
+              <a:t>在終端機中鍵入指令：`python verify.py` 並按下 Enter</a:t>
             </a:r>
           </a:p>
           <a:p>
@@ -20534,7 +20453,7 @@
                 </a:solidFill>
                 <a:latin typeface="微軟正黑體"/>
               </a:rPr>
-              <a:t>在左下角【Summary】輸入紀錄摘要 (例：`完成第01週資料清洗實作`)</a:t>
+              <a:t>程式會自動執行 3~5 項企業業務規則檢驗 (如：主檔欄位驗證、除錯率計算)</a:t>
             </a:r>
           </a:p>
           <a:p>
@@ -20562,7 +20481,7 @@
                 </a:solidFill>
                 <a:latin typeface="微軟正黑體"/>
               </a:rPr>
-              <a:t>點擊藍色大按鈕【Commit to main】(儲存到本機版本庫)</a:t>
+              <a:t>若全部通過，終端機會噴出彩色字樣：</a:t>
             </a:r>
           </a:p>
           <a:p>
@@ -20590,7 +20509,7 @@
                 </a:solidFill>
                 <a:latin typeface="微軟正黑體"/>
               </a:rPr>
-              <a:t>接著點擊上方最右邊按鈕【Push origin】(推送到雲端)</a:t>
+              <a:t>✨【SUCCESS】All validation tests passed! 實作成果完全符合企業標準！</a:t>
             </a:r>
           </a:p>
           <a:p>
@@ -20618,7 +20537,7 @@
                 </a:solidFill>
                 <a:latin typeface="微軟正黑體"/>
               </a:rPr>
-              <a:t>不到 3 秒鐘，您的作業代碼已安全同步備份至 GitHub 雲端！</a:t>
+              <a:t>若有錯誤，會清楚提示是哪一行規則未達標，修改後再測即可！</a:t>
             </a:r>
           </a:p>
         </p:txBody>
@@ -20672,7 +20591,7 @@
                 </a:solidFill>
                 <a:latin typeface="微軟正黑體"/>
               </a:rPr>
-              <a:t>💡 關鍵提點：哪怕電腦教室重開機還原，雲端也完整保存著您的所有心血！</a:t>
+              <a:t>💡 關鍵提點：寫完馬上知道自己對不對，完全不用擔心做錯！</a:t>
             </a:r>
           </a:p>
         </p:txBody>
@@ -20785,7 +20704,7 @@
                 </a:solidFill>
                 <a:latin typeface="微軟正黑體"/>
               </a:rPr>
-              <a:t>成果發布</a:t>
+              <a:t>步驟 31</a:t>
             </a:r>
           </a:p>
         </p:txBody>
@@ -20854,7 +20773,7 @@
                 </a:solidFill>
                 <a:latin typeface="微軟正黑體"/>
               </a:rPr>
-              <a:t>【作業繳交】步驟 31：成果如何讓老師線上看見？</a:t>
+              <a:t>⚠️【🚨 重中之重】步驟 31：電腦教室「關機重置」生存法則！</a:t>
             </a:r>
           </a:p>
         </p:txBody>
@@ -20905,7 +20824,7 @@
                 </a:solidFill>
                 <a:latin typeface="微軟正黑體"/>
               </a:rPr>
-              <a:t>本課程提供專屬現代化線上繳交專區，不用再寄隨身碟或 Email 附件！</a:t>
+              <a:t>⚠️【電腦教室還原卡致命地雷】：</a:t>
             </a:r>
           </a:p>
           <a:p>
@@ -20933,7 +20852,7 @@
                 </a:solidFill>
                 <a:latin typeface="微軟正黑體"/>
               </a:rPr>
-              <a:t>兩種成果繳交方式：</a:t>
+              <a:t>• 電腦教室的電腦皆安裝了『系統還原卡 / 還原軟體』！</a:t>
             </a:r>
           </a:p>
           <a:p>
@@ -20961,7 +20880,7 @@
                 </a:solidFill>
                 <a:latin typeface="微軟正黑體"/>
               </a:rPr>
-              <a:t>1. 【線上公開成果網址】(推薦)：填寫您的 GitHub 倉庫或 GitHub Pages 網址</a:t>
+              <a:t>• 只要【下課電腦關機】或【課堂中途重開機】，桌面與 C 槽檔案將【立即被徹底清除重置】！</a:t>
             </a:r>
           </a:p>
           <a:p>
@@ -20989,7 +20908,7 @@
                 </a:solidFill>
                 <a:latin typeface="微軟正黑體"/>
               </a:rPr>
-              <a:t>2. 【附件檔案上傳】：上傳您的報告 Word/PDF/Markdown 檔案 (10MB 內)</a:t>
+              <a:t>• 下課如果沒把成果傳到雲端，今天辛苦做的所有程式與作業將『永久消失無法找回』！</a:t>
             </a:r>
           </a:p>
           <a:p>
@@ -21017,7 +20936,7 @@
                 </a:solidFill>
                 <a:latin typeface="微軟正黑體"/>
               </a:rPr>
-              <a:t>繳交後即刻存入 Firebase 雲端資料庫，老師將在線上親自評閱打分！</a:t>
+              <a:t>🚨 全班同學請牢記：每次執行完成，下課前務必執行『下一步的雲端備份三部曲』！</a:t>
             </a:r>
           </a:p>
         </p:txBody>
@@ -21071,7 +20990,7 @@
                 </a:solidFill>
                 <a:latin typeface="微軟正黑體"/>
               </a:rPr>
-              <a:t>💡 關鍵提點：支援手機、平板或筆電隨時登入查閱自己已繳交的歷程。</a:t>
+              <a:t>💡 關鍵提點：絕對不要存了桌面就拍拍屁股走人，重開機全沒了！</a:t>
             </a:r>
           </a:p>
         </p:txBody>
@@ -21667,7 +21586,7 @@
                 </a:solidFill>
                 <a:latin typeface="微軟正黑體"/>
               </a:rPr>
-              <a:t>平台登入</a:t>
+              <a:t>步驟 32</a:t>
             </a:r>
           </a:p>
         </p:txBody>
@@ -21736,7 +21655,7 @@
                 </a:solidFill>
                 <a:latin typeface="微軟正黑體"/>
               </a:rPr>
-              <a:t>【作業繳交】步驟 32：進入課程平台並使用 Google 登入</a:t>
+              <a:t>【雲端備份】步驟 32：成果上傳至個人 Google Drive 或 GitHub</a:t>
             </a:r>
           </a:p>
         </p:txBody>
@@ -21765,169 +21684,113 @@
           <a:p>
             <a:pPr>
               <a:spcBef>
-                <a:spcPts val="100"/>
-              </a:spcBef>
-              <a:spcAft>
-                <a:spcPts val="800"/>
-              </a:spcAft>
-            </a:pPr>
-            <a:r>
-              <a:rPr sz="2800" b="1">
-                <a:solidFill>
-                  <a:srgbClr val="D97706"/>
-                </a:solidFill>
-                <a:latin typeface="微軟正黑體"/>
-              </a:rPr>
-              <a:t>• </a:t>
-            </a:r>
-            <a:r>
-              <a:rPr sz="2800">
-                <a:solidFill>
-                  <a:srgbClr val="0F172A"/>
-                </a:solidFill>
-                <a:latin typeface="微軟正黑體"/>
-              </a:rPr>
-              <a:t>打開瀏覽器前往課程互動平台網址：</a:t>
-            </a:r>
-          </a:p>
-          <a:p>
-            <a:pPr>
-              <a:spcBef>
-                <a:spcPts val="100"/>
-              </a:spcBef>
-              <a:spcAft>
-                <a:spcPts val="800"/>
-              </a:spcAft>
-            </a:pPr>
-            <a:r>
-              <a:rPr sz="2800" b="1">
-                <a:solidFill>
-                  <a:srgbClr val="D97706"/>
-                </a:solidFill>
-                <a:latin typeface="微軟正黑體"/>
-              </a:rPr>
-              <a:t>• </a:t>
-            </a:r>
-            <a:r>
-              <a:rPr sz="2800">
-                <a:solidFill>
-                  <a:srgbClr val="0F172A"/>
-                </a:solidFill>
-                <a:latin typeface="微軟正黑體"/>
-              </a:rPr>
-              <a:t>• `https://h12s12bs.github.io/vnu-enterprise-resource-planning/`</a:t>
-            </a:r>
-          </a:p>
-          <a:p>
-            <a:pPr>
-              <a:spcBef>
-                <a:spcPts val="100"/>
-              </a:spcBef>
-              <a:spcAft>
-                <a:spcPts val="800"/>
-              </a:spcAft>
-            </a:pPr>
-            <a:r>
-              <a:rPr sz="2800" b="1">
-                <a:solidFill>
-                  <a:srgbClr val="D97706"/>
-                </a:solidFill>
-                <a:latin typeface="微軟正黑體"/>
-              </a:rPr>
-              <a:t>• </a:t>
-            </a:r>
-            <a:r>
-              <a:rPr sz="2800">
-                <a:solidFill>
-                  <a:srgbClr val="0F172A"/>
-                </a:solidFill>
-                <a:latin typeface="微軟正黑體"/>
-              </a:rPr>
-              <a:t>點擊右上角白色按鈕【Google 登入】</a:t>
-            </a:r>
-          </a:p>
-          <a:p>
-            <a:pPr>
-              <a:spcBef>
-                <a:spcPts val="100"/>
-              </a:spcBef>
-              <a:spcAft>
-                <a:spcPts val="800"/>
-              </a:spcAft>
-            </a:pPr>
-            <a:r>
-              <a:rPr sz="2800" b="1">
-                <a:solidFill>
-                  <a:srgbClr val="D97706"/>
-                </a:solidFill>
-                <a:latin typeface="微軟正黑體"/>
-              </a:rPr>
-              <a:t>• </a:t>
-            </a:r>
-            <a:r>
-              <a:rPr sz="2800">
-                <a:solidFill>
-                  <a:srgbClr val="0F172A"/>
-                </a:solidFill>
-                <a:latin typeface="微軟正黑體"/>
-              </a:rPr>
-              <a:t>選擇您常用的 Google 帳號授權登入</a:t>
-            </a:r>
-          </a:p>
-          <a:p>
-            <a:pPr>
-              <a:spcBef>
-                <a:spcPts val="100"/>
-              </a:spcBef>
-              <a:spcAft>
-                <a:spcPts val="800"/>
-              </a:spcAft>
-            </a:pPr>
-            <a:r>
-              <a:rPr sz="2800" b="1">
-                <a:solidFill>
-                  <a:srgbClr val="D97706"/>
-                </a:solidFill>
-                <a:latin typeface="微軟正黑體"/>
-              </a:rPr>
-              <a:t>• </a:t>
-            </a:r>
-            <a:r>
-              <a:rPr sz="2800">
-                <a:solidFill>
-                  <a:srgbClr val="0F172A"/>
-                </a:solidFill>
-                <a:latin typeface="微軟正黑體"/>
-              </a:rPr>
-              <a:t>登入後點擊右上角頭像選單，點選【修改學號與姓名】</a:t>
-            </a:r>
-          </a:p>
-          <a:p>
-            <a:pPr>
-              <a:spcBef>
-                <a:spcPts val="100"/>
-              </a:spcBef>
-              <a:spcAft>
-                <a:spcPts val="800"/>
-              </a:spcAft>
-            </a:pPr>
-            <a:r>
-              <a:rPr sz="2800" b="1">
-                <a:solidFill>
-                  <a:srgbClr val="D97706"/>
-                </a:solidFill>
-                <a:latin typeface="微軟正黑體"/>
-              </a:rPr>
-              <a:t>• </a:t>
-            </a:r>
-            <a:r>
-              <a:rPr sz="2800">
-                <a:solidFill>
-                  <a:srgbClr val="0F172A"/>
-                </a:solidFill>
-                <a:latin typeface="微軟正黑體"/>
-              </a:rPr>
-              <a:t>輸入您的『萬能科大學號』(如 11308888) 與『中文姓名』並儲存</a:t>
+                <a:spcPts val="400"/>
+              </a:spcBef>
+              <a:spcAft>
+                <a:spcPts val="2000"/>
+              </a:spcAft>
+            </a:pPr>
+            <a:r>
+              <a:rPr sz="2800" b="1">
+                <a:solidFill>
+                  <a:srgbClr val="D97706"/>
+                </a:solidFill>
+                <a:latin typeface="微軟正黑體"/>
+              </a:rPr>
+              <a:t>• </a:t>
+            </a:r>
+            <a:r>
+              <a:rPr sz="2800">
+                <a:solidFill>
+                  <a:srgbClr val="0F172A"/>
+                </a:solidFill>
+                <a:latin typeface="微軟正黑體"/>
+              </a:rPr>
+              <a:t>每次執行產出作品後，請選擇以下任一方式備份上傳：</a:t>
+            </a:r>
+          </a:p>
+          <a:p>
+            <a:pPr>
+              <a:spcBef>
+                <a:spcPts val="400"/>
+              </a:spcBef>
+              <a:spcAft>
+                <a:spcPts val="2000"/>
+              </a:spcAft>
+            </a:pPr>
+            <a:r>
+              <a:rPr sz="2800" b="1">
+                <a:solidFill>
+                  <a:srgbClr val="D97706"/>
+                </a:solidFill>
+                <a:latin typeface="微軟正黑體"/>
+              </a:rPr>
+              <a:t>• </a:t>
+            </a:r>
+            <a:r>
+              <a:rPr sz="2800">
+                <a:solidFill>
+                  <a:srgbClr val="0F172A"/>
+                </a:solidFill>
+                <a:latin typeface="微軟正黑體"/>
+              </a:rPr>
+              <a:t>• 途徑 1 (最直覺)：開啟瀏覽器登入個人的【Google 雲端硬碟 (Google Drive)】，將今日做好的專案資料夾直接拖拉上傳備份！</a:t>
+            </a:r>
+          </a:p>
+          <a:p>
+            <a:pPr>
+              <a:spcBef>
+                <a:spcPts val="400"/>
+              </a:spcBef>
+              <a:spcAft>
+                <a:spcPts val="2000"/>
+              </a:spcAft>
+            </a:pPr>
+            <a:r>
+              <a:rPr sz="2800" b="1">
+                <a:solidFill>
+                  <a:srgbClr val="D97706"/>
+                </a:solidFill>
+                <a:latin typeface="微軟正黑體"/>
+              </a:rPr>
+              <a:t>• </a:t>
+            </a:r>
+            <a:r>
+              <a:rPr sz="2800">
+                <a:solidFill>
+                  <a:srgbClr val="0F172A"/>
+                </a:solidFill>
+                <a:latin typeface="微軟正黑體"/>
+              </a:rPr>
+              <a:t>• 途徑 2 (軟體人推薦)：在 GitHub Desktop 點選【Commit】與【Push】，直接推送到自己的 GitHub 雲端倉庫！</a:t>
+            </a:r>
+          </a:p>
+          <a:p>
+            <a:pPr>
+              <a:spcBef>
+                <a:spcPts val="400"/>
+              </a:spcBef>
+              <a:spcAft>
+                <a:spcPts val="2000"/>
+              </a:spcAft>
+            </a:pPr>
+            <a:r>
+              <a:rPr sz="2800" b="1">
+                <a:solidFill>
+                  <a:srgbClr val="D97706"/>
+                </a:solidFill>
+                <a:latin typeface="微軟正黑體"/>
+              </a:rPr>
+              <a:t>• </a:t>
+            </a:r>
+            <a:r>
+              <a:rPr sz="2800">
+                <a:solidFill>
+                  <a:srgbClr val="0F172A"/>
+                </a:solidFill>
+                <a:latin typeface="微軟正黑體"/>
+              </a:rPr>
+              <a:t>• 途徑 3 (作業繳交)：直接到本課程平台的【📤 學生報告繳交】專區上傳成果檔案！</a:t>
             </a:r>
           </a:p>
         </p:txBody>
@@ -21981,7 +21844,7 @@
                 </a:solidFill>
                 <a:latin typeface="微軟正黑體"/>
               </a:rPr>
-              <a:t>💡 關鍵提點：綁定學號與姓名後，所有答題紀錄與報告成果均會歸戶至您的個人成績單！</a:t>
+              <a:t>💡 關鍵提點：只要上傳到個人雲端，哪怕電腦重開機一百次，心血也永遠安全！</a:t>
             </a:r>
           </a:p>
         </p:txBody>
@@ -22094,7 +21957,7 @@
                 </a:solidFill>
                 <a:latin typeface="微軟正黑體"/>
               </a:rPr>
-              <a:t>填寫表單</a:t>
+              <a:t>步驟 33</a:t>
             </a:r>
           </a:p>
         </p:txBody>
@@ -22163,7 +22026,7 @@
                 </a:solidFill>
                 <a:latin typeface="微軟正黑體"/>
               </a:rPr>
-              <a:t>【作業繳交】步驟 33：進入學生報告繳交專區</a:t>
+              <a:t>【雲端雙軌】步驟 33：備選方案 - Google Cloud Shell 雲端執行</a:t>
             </a:r>
           </a:p>
         </p:txBody>
@@ -22192,169 +22055,141 @@
           <a:p>
             <a:pPr>
               <a:spcBef>
-                <a:spcPts val="100"/>
-              </a:spcBef>
-              <a:spcAft>
-                <a:spcPts val="800"/>
-              </a:spcAft>
-            </a:pPr>
-            <a:r>
-              <a:rPr sz="2800" b="1">
-                <a:solidFill>
-                  <a:srgbClr val="D97706"/>
-                </a:solidFill>
-                <a:latin typeface="微軟正黑體"/>
-              </a:rPr>
-              <a:t>• </a:t>
-            </a:r>
-            <a:r>
-              <a:rPr sz="2800">
-                <a:solidFill>
-                  <a:srgbClr val="0F172A"/>
-                </a:solidFill>
-                <a:latin typeface="微軟正黑體"/>
-              </a:rPr>
-              <a:t>點擊頂部導覽列按鈕【📤 學生報告繳交】進入繳交專區</a:t>
-            </a:r>
-          </a:p>
-          <a:p>
-            <a:pPr>
-              <a:spcBef>
-                <a:spcPts val="100"/>
-              </a:spcBef>
-              <a:spcAft>
-                <a:spcPts val="800"/>
-              </a:spcAft>
-            </a:pPr>
-            <a:r>
-              <a:rPr sz="2800" b="1">
-                <a:solidFill>
-                  <a:srgbClr val="D97706"/>
-                </a:solidFill>
-                <a:latin typeface="微軟正黑體"/>
-              </a:rPr>
-              <a:t>• </a:t>
-            </a:r>
-            <a:r>
-              <a:rPr sz="2800">
-                <a:solidFill>
-                  <a:srgbClr val="0F172A"/>
-                </a:solidFill>
-                <a:latin typeface="微軟正黑體"/>
-              </a:rPr>
-              <a:t>欄位 1【繳交報告類別】：依當前進度挑選『期中報告 (40%)』或『期末報告 (40%)』</a:t>
-            </a:r>
-          </a:p>
-          <a:p>
-            <a:pPr>
-              <a:spcBef>
-                <a:spcPts val="100"/>
-              </a:spcBef>
-              <a:spcAft>
-                <a:spcPts val="800"/>
-              </a:spcAft>
-            </a:pPr>
-            <a:r>
-              <a:rPr sz="2800" b="1">
-                <a:solidFill>
-                  <a:srgbClr val="D97706"/>
-                </a:solidFill>
-                <a:latin typeface="微軟正黑體"/>
-              </a:rPr>
-              <a:t>• </a:t>
-            </a:r>
-            <a:r>
-              <a:rPr sz="2800">
-                <a:solidFill>
-                  <a:srgbClr val="0F172A"/>
-                </a:solidFill>
-                <a:latin typeface="微軟正黑體"/>
-              </a:rPr>
-              <a:t>欄位 2【專案主題 / 標題】：輸入專案題名 (例：`自行車業主檔實體建模實作報告`)</a:t>
-            </a:r>
-          </a:p>
-          <a:p>
-            <a:pPr>
-              <a:spcBef>
-                <a:spcPts val="100"/>
-              </a:spcBef>
-              <a:spcAft>
-                <a:spcPts val="800"/>
-              </a:spcAft>
-            </a:pPr>
-            <a:r>
-              <a:rPr sz="2800" b="1">
-                <a:solidFill>
-                  <a:srgbClr val="D97706"/>
-                </a:solidFill>
-                <a:latin typeface="微軟正黑體"/>
-              </a:rPr>
-              <a:t>• </a:t>
-            </a:r>
-            <a:r>
-              <a:rPr sz="2800">
-                <a:solidFill>
-                  <a:srgbClr val="0F172A"/>
-                </a:solidFill>
-                <a:latin typeface="微軟正黑體"/>
-              </a:rPr>
-              <a:t>欄位 3【核心內容摘要與成果說明】：簡要撰寫 200~500 字心得以條列呈現</a:t>
-            </a:r>
-          </a:p>
-          <a:p>
-            <a:pPr>
-              <a:spcBef>
-                <a:spcPts val="100"/>
-              </a:spcBef>
-              <a:spcAft>
-                <a:spcPts val="800"/>
-              </a:spcAft>
-            </a:pPr>
-            <a:r>
-              <a:rPr sz="2800" b="1">
-                <a:solidFill>
-                  <a:srgbClr val="D97706"/>
-                </a:solidFill>
-                <a:latin typeface="微軟正黑體"/>
-              </a:rPr>
-              <a:t>• </a:t>
-            </a:r>
-            <a:r>
-              <a:rPr sz="2800">
-                <a:solidFill>
-                  <a:srgbClr val="0F172A"/>
-                </a:solidFill>
-                <a:latin typeface="微軟正黑體"/>
-              </a:rPr>
-              <a:t>欄位 4【線上成果網址】：貼入您的 GitHub 專案網址</a:t>
-            </a:r>
-          </a:p>
-          <a:p>
-            <a:pPr>
-              <a:spcBef>
-                <a:spcPts val="100"/>
-              </a:spcBef>
-              <a:spcAft>
-                <a:spcPts val="800"/>
-              </a:spcAft>
-            </a:pPr>
-            <a:r>
-              <a:rPr sz="2800" b="1">
-                <a:solidFill>
-                  <a:srgbClr val="D97706"/>
-                </a:solidFill>
-                <a:latin typeface="微軟正黑體"/>
-              </a:rPr>
-              <a:t>• </a:t>
-            </a:r>
-            <a:r>
-              <a:rPr sz="2800">
-                <a:solidFill>
-                  <a:srgbClr val="0F172A"/>
-                </a:solidFill>
-                <a:latin typeface="微軟正黑體"/>
-              </a:rPr>
-              <a:t>欄位 5【附件檔案】：若有 PDF/Word 報告亦可一併附加</a:t>
+                <a:spcPts val="200"/>
+              </a:spcBef>
+              <a:spcAft>
+                <a:spcPts val="1400"/>
+              </a:spcAft>
+            </a:pPr>
+            <a:r>
+              <a:rPr sz="2800" b="1">
+                <a:solidFill>
+                  <a:srgbClr val="D97706"/>
+                </a:solidFill>
+                <a:latin typeface="微軟正黑體"/>
+              </a:rPr>
+              <a:t>• </a:t>
+            </a:r>
+            <a:r>
+              <a:rPr sz="2800">
+                <a:solidFill>
+                  <a:srgbClr val="0F172A"/>
+                </a:solidFill>
+                <a:latin typeface="微軟正黑體"/>
+              </a:rPr>
+              <a:t>除了本機執行外，同學亦可使用 Google Cloud Shell 作為雲端備選：</a:t>
+            </a:r>
+          </a:p>
+          <a:p>
+            <a:pPr>
+              <a:spcBef>
+                <a:spcPts val="200"/>
+              </a:spcBef>
+              <a:spcAft>
+                <a:spcPts val="1400"/>
+              </a:spcAft>
+            </a:pPr>
+            <a:r>
+              <a:rPr sz="2800" b="1">
+                <a:solidFill>
+                  <a:srgbClr val="D97706"/>
+                </a:solidFill>
+                <a:latin typeface="微軟正黑體"/>
+              </a:rPr>
+              <a:t>• </a:t>
+            </a:r>
+            <a:r>
+              <a:rPr sz="2800">
+                <a:solidFill>
+                  <a:srgbClr val="0F172A"/>
+                </a:solidFill>
+                <a:latin typeface="微軟正黑體"/>
+              </a:rPr>
+              <a:t>• 網址：https://shell.cloud.google.com</a:t>
+            </a:r>
+          </a:p>
+          <a:p>
+            <a:pPr>
+              <a:spcBef>
+                <a:spcPts val="200"/>
+              </a:spcBef>
+              <a:spcAft>
+                <a:spcPts val="1400"/>
+              </a:spcAft>
+            </a:pPr>
+            <a:r>
+              <a:rPr sz="2800" b="1">
+                <a:solidFill>
+                  <a:srgbClr val="D97706"/>
+                </a:solidFill>
+                <a:latin typeface="微軟正黑體"/>
+              </a:rPr>
+              <a:t>• </a:t>
+            </a:r>
+            <a:r>
+              <a:rPr sz="2800">
+                <a:solidFill>
+                  <a:srgbClr val="0F172A"/>
+                </a:solidFill>
+                <a:latin typeface="微軟正黑體"/>
+              </a:rPr>
+              <a:t>• 由於我們剛剛已在本機熟悉了指令並取得授權，在 Cloud Shell 中不會再手忙腳亂</a:t>
+            </a:r>
+          </a:p>
+          <a:p>
+            <a:pPr>
+              <a:spcBef>
+                <a:spcPts val="200"/>
+              </a:spcBef>
+              <a:spcAft>
+                <a:spcPts val="1400"/>
+              </a:spcAft>
+            </a:pPr>
+            <a:r>
+              <a:rPr sz="2800" b="1">
+                <a:solidFill>
+                  <a:srgbClr val="D97706"/>
+                </a:solidFill>
+                <a:latin typeface="微軟正黑體"/>
+              </a:rPr>
+              <a:t>• </a:t>
+            </a:r>
+            <a:r>
+              <a:rPr sz="2800">
+                <a:solidFill>
+                  <a:srgbClr val="0F172A"/>
+                </a:solidFill>
+                <a:latin typeface="微軟正黑體"/>
+              </a:rPr>
+              <a:t>• Cloud Shell 好處：自帶 5GB 免費永久儲存空間，不受電腦教室關機重置影響！</a:t>
+            </a:r>
+          </a:p>
+          <a:p>
+            <a:pPr>
+              <a:spcBef>
+                <a:spcPts val="200"/>
+              </a:spcBef>
+              <a:spcAft>
+                <a:spcPts val="1400"/>
+              </a:spcAft>
+            </a:pPr>
+            <a:r>
+              <a:rPr sz="2800" b="1">
+                <a:solidFill>
+                  <a:srgbClr val="D97706"/>
+                </a:solidFill>
+                <a:latin typeface="微軟正黑體"/>
+              </a:rPr>
+              <a:t>• </a:t>
+            </a:r>
+            <a:r>
+              <a:rPr sz="2800">
+                <a:solidFill>
+                  <a:srgbClr val="0F172A"/>
+                </a:solidFill>
+                <a:latin typeface="微軟正黑體"/>
+              </a:rPr>
+              <a:t>• 隨時隨地用瀏覽器點開即可接續練習！</a:t>
             </a:r>
           </a:p>
         </p:txBody>
@@ -22408,7 +22243,7 @@
                 </a:solidFill>
                 <a:latin typeface="微軟正黑體"/>
               </a:rPr>
-              <a:t>💡 關鍵提點：內容摘要清楚說明遭遇問題與解決辦法，更容易獲得高分肯定！</a:t>
+              <a:t>💡 關鍵提點：本機 CLI 衝刺 ＋ Cloud Shell 雲端隨身備用，雙軌兼備最穩健！</a:t>
             </a:r>
           </a:p>
         </p:txBody>
@@ -22521,7 +22356,7 @@
                 </a:solidFill>
                 <a:latin typeface="微軟正黑體"/>
               </a:rPr>
-              <a:t>證照加分</a:t>
+              <a:t>成果發布</a:t>
             </a:r>
           </a:p>
         </p:txBody>
@@ -22590,7 +22425,7 @@
                 </a:solidFill>
                 <a:latin typeface="微軟正黑體"/>
               </a:rPr>
-              <a:t>【作業繳交】步驟 34：勾選證照特別加分申請</a:t>
+              <a:t>【作業繳交】步驟 34：成果如何讓老師線上看見？</a:t>
             </a:r>
           </a:p>
         </p:txBody>
@@ -22641,7 +22476,7 @@
                 </a:solidFill>
                 <a:latin typeface="微軟正黑體"/>
               </a:rPr>
-              <a:t>在繳交表單下方，有一個金黃色的特別加分勾選區塊：</a:t>
+              <a:t>本課程提供專屬現代化線上繳交專區，不用再寄隨身碟或 Email 附件！</a:t>
             </a:r>
           </a:p>
           <a:p>
@@ -22669,7 +22504,7 @@
                 </a:solidFill>
                 <a:latin typeface="微軟正黑體"/>
               </a:rPr>
-              <a:t>☑【🌟 申請專業證照特別加分】：</a:t>
+              <a:t>兩種成果繳交方式：</a:t>
             </a:r>
           </a:p>
           <a:p>
@@ -22697,7 +22532,7 @@
                 </a:solidFill>
                 <a:latin typeface="微軟正黑體"/>
               </a:rPr>
-              <a:t>『我已考取或本學期正在報考 AI 賦能 ERP 或 ERP 相關檢定證照，請老師予以學期總成績特別加分！』</a:t>
+              <a:t>1. 【線上公開成果網址】(推薦)：填寫您的 GitHub 倉庫或雲端分享網址</a:t>
             </a:r>
           </a:p>
           <a:p>
@@ -22725,7 +22560,7 @@
                 </a:solidFill>
                 <a:latin typeface="微軟正黑體"/>
               </a:rPr>
-              <a:t>若您有考照計畫或已取得證照，請務必將此項方框打勾！</a:t>
+              <a:t>2. 【附件檔案上傳】：上傳您的報告 Word/PDF/Markdown 檔案 (10MB 內)</a:t>
             </a:r>
           </a:p>
           <a:p>
@@ -22753,7 +22588,7 @@
                 </a:solidFill>
                 <a:latin typeface="微軟正黑體"/>
               </a:rPr>
-              <a:t>確認資料皆填寫完畢後，點擊最下方綠色按鈕【確認送出繳交報告】！</a:t>
+              <a:t>繳交後即刻存入 Firebase 雲端資料庫，老師將在線上親自評閱打分！</a:t>
             </a:r>
           </a:p>
         </p:txBody>
@@ -22807,7 +22642,7 @@
                 </a:solidFill>
                 <a:latin typeface="微軟正黑體"/>
               </a:rPr>
-              <a:t>💡 關鍵提點：送出後畫面會跳出恭喜提示框，代表資料已即時寫入 Firebase 雲端！</a:t>
+              <a:t>💡 關鍵提點：支援手機、平板或筆電隨時登入查閱自己已繳交的歷程。</a:t>
             </a:r>
           </a:p>
         </p:txBody>
@@ -22920,7 +22755,7 @@
                 </a:solidFill>
                 <a:latin typeface="微軟正黑體"/>
               </a:rPr>
-              <a:t>成績查閱</a:t>
+              <a:t>平台登入</a:t>
             </a:r>
           </a:p>
         </p:txBody>
@@ -22989,7 +22824,7 @@
                 </a:solidFill>
                 <a:latin typeface="微軟正黑體"/>
               </a:rPr>
-              <a:t>【作業繳交】步驟 35：在右側查看即時反饋與老師評語</a:t>
+              <a:t>【作業繳交】步驟 35：進入課程平台並使用 Google 登入</a:t>
             </a:r>
           </a:p>
         </p:txBody>
@@ -23018,141 +22853,169 @@
           <a:p>
             <a:pPr>
               <a:spcBef>
-                <a:spcPts val="200"/>
-              </a:spcBef>
-              <a:spcAft>
-                <a:spcPts val="1400"/>
-              </a:spcAft>
-            </a:pPr>
-            <a:r>
-              <a:rPr sz="2800" b="1">
-                <a:solidFill>
-                  <a:srgbClr val="D97706"/>
-                </a:solidFill>
-                <a:latin typeface="微軟正黑體"/>
-              </a:rPr>
-              <a:t>• </a:t>
-            </a:r>
-            <a:r>
-              <a:rPr sz="2800">
-                <a:solidFill>
-                  <a:srgbClr val="0F172A"/>
-                </a:solidFill>
-                <a:latin typeface="微軟正黑體"/>
-              </a:rPr>
-              <a:t>送出報告後，右側『我的報告繳交歷程與成績』會立即出現您的報告卡片！</a:t>
-            </a:r>
-          </a:p>
-          <a:p>
-            <a:pPr>
-              <a:spcBef>
-                <a:spcPts val="200"/>
-              </a:spcBef>
-              <a:spcAft>
-                <a:spcPts val="1400"/>
-              </a:spcAft>
-            </a:pPr>
-            <a:r>
-              <a:rPr sz="2800" b="1">
-                <a:solidFill>
-                  <a:srgbClr val="D97706"/>
-                </a:solidFill>
-                <a:latin typeface="微軟正黑體"/>
-              </a:rPr>
-              <a:t>• </a:t>
-            </a:r>
-            <a:r>
-              <a:rPr sz="2800">
-                <a:solidFill>
-                  <a:srgbClr val="0F172A"/>
-                </a:solidFill>
-                <a:latin typeface="微軟正黑體"/>
-              </a:rPr>
-              <a:t>尚未批改時，會顯示金黃色徽章【⏳ 待老師批改中】</a:t>
-            </a:r>
-          </a:p>
-          <a:p>
-            <a:pPr>
-              <a:spcBef>
-                <a:spcPts val="200"/>
-              </a:spcBef>
-              <a:spcAft>
-                <a:spcPts val="1400"/>
-              </a:spcAft>
-            </a:pPr>
-            <a:r>
-              <a:rPr sz="2800" b="1">
-                <a:solidFill>
-                  <a:srgbClr val="D97706"/>
-                </a:solidFill>
-                <a:latin typeface="微軟正黑體"/>
-              </a:rPr>
-              <a:t>• </a:t>
-            </a:r>
-            <a:r>
-              <a:rPr sz="2800">
-                <a:solidFill>
-                  <a:srgbClr val="0F172A"/>
-                </a:solidFill>
-                <a:latin typeface="微軟正黑體"/>
-              </a:rPr>
-              <a:t>老師於後台完成批閱後，徽章會自動變為綠色【評定得分：92 分】</a:t>
-            </a:r>
-          </a:p>
-          <a:p>
-            <a:pPr>
-              <a:spcBef>
-                <a:spcPts val="200"/>
-              </a:spcBef>
-              <a:spcAft>
-                <a:spcPts val="1400"/>
-              </a:spcAft>
-            </a:pPr>
-            <a:r>
-              <a:rPr sz="2800" b="1">
-                <a:solidFill>
-                  <a:srgbClr val="D97706"/>
-                </a:solidFill>
-                <a:latin typeface="微軟正黑體"/>
-              </a:rPr>
-              <a:t>• </a:t>
-            </a:r>
-            <a:r>
-              <a:rPr sz="2800">
-                <a:solidFill>
-                  <a:srgbClr val="0F172A"/>
-                </a:solidFill>
-                <a:latin typeface="微軟正黑體"/>
-              </a:rPr>
-              <a:t>下方會出現綠色的【邱俊維 老師回饋評語】文字框，提供專業改進指導！</a:t>
-            </a:r>
-          </a:p>
-          <a:p>
-            <a:pPr>
-              <a:spcBef>
-                <a:spcPts val="200"/>
-              </a:spcBef>
-              <a:spcAft>
-                <a:spcPts val="1400"/>
-              </a:spcAft>
-            </a:pPr>
-            <a:r>
-              <a:rPr sz="2800" b="1">
-                <a:solidFill>
-                  <a:srgbClr val="D97706"/>
-                </a:solidFill>
-                <a:latin typeface="微軟正黑體"/>
-              </a:rPr>
-              <a:t>• </a:t>
-            </a:r>
-            <a:r>
-              <a:rPr sz="2800">
-                <a:solidFill>
-                  <a:srgbClr val="0F172A"/>
-                </a:solidFill>
-                <a:latin typeface="微軟正黑體"/>
-              </a:rPr>
-              <a:t>個人紀錄完全受到資安隔離，全班只有您本人與授課教師看得到，隱私絕對安全！</a:t>
+                <a:spcPts val="100"/>
+              </a:spcBef>
+              <a:spcAft>
+                <a:spcPts val="800"/>
+              </a:spcAft>
+            </a:pPr>
+            <a:r>
+              <a:rPr sz="2800" b="1">
+                <a:solidFill>
+                  <a:srgbClr val="D97706"/>
+                </a:solidFill>
+                <a:latin typeface="微軟正黑體"/>
+              </a:rPr>
+              <a:t>• </a:t>
+            </a:r>
+            <a:r>
+              <a:rPr sz="2800">
+                <a:solidFill>
+                  <a:srgbClr val="0F172A"/>
+                </a:solidFill>
+                <a:latin typeface="微軟正黑體"/>
+              </a:rPr>
+              <a:t>打開瀏覽器前往課程互動平台網址：</a:t>
+            </a:r>
+          </a:p>
+          <a:p>
+            <a:pPr>
+              <a:spcBef>
+                <a:spcPts val="100"/>
+              </a:spcBef>
+              <a:spcAft>
+                <a:spcPts val="800"/>
+              </a:spcAft>
+            </a:pPr>
+            <a:r>
+              <a:rPr sz="2800" b="1">
+                <a:solidFill>
+                  <a:srgbClr val="D97706"/>
+                </a:solidFill>
+                <a:latin typeface="微軟正黑體"/>
+              </a:rPr>
+              <a:t>• </a:t>
+            </a:r>
+            <a:r>
+              <a:rPr sz="2800">
+                <a:solidFill>
+                  <a:srgbClr val="0F172A"/>
+                </a:solidFill>
+                <a:latin typeface="微軟正黑體"/>
+              </a:rPr>
+              <a:t>• `https://h12s12bs.github.io/vnu-enterprise-resource-planning/`</a:t>
+            </a:r>
+          </a:p>
+          <a:p>
+            <a:pPr>
+              <a:spcBef>
+                <a:spcPts val="100"/>
+              </a:spcBef>
+              <a:spcAft>
+                <a:spcPts val="800"/>
+              </a:spcAft>
+            </a:pPr>
+            <a:r>
+              <a:rPr sz="2800" b="1">
+                <a:solidFill>
+                  <a:srgbClr val="D97706"/>
+                </a:solidFill>
+                <a:latin typeface="微軟正黑體"/>
+              </a:rPr>
+              <a:t>• </a:t>
+            </a:r>
+            <a:r>
+              <a:rPr sz="2800">
+                <a:solidFill>
+                  <a:srgbClr val="0F172A"/>
+                </a:solidFill>
+                <a:latin typeface="微軟正黑體"/>
+              </a:rPr>
+              <a:t>點擊右上角白色按鈕【Google 登入】</a:t>
+            </a:r>
+          </a:p>
+          <a:p>
+            <a:pPr>
+              <a:spcBef>
+                <a:spcPts val="100"/>
+              </a:spcBef>
+              <a:spcAft>
+                <a:spcPts val="800"/>
+              </a:spcAft>
+            </a:pPr>
+            <a:r>
+              <a:rPr sz="2800" b="1">
+                <a:solidFill>
+                  <a:srgbClr val="D97706"/>
+                </a:solidFill>
+                <a:latin typeface="微軟正黑體"/>
+              </a:rPr>
+              <a:t>• </a:t>
+            </a:r>
+            <a:r>
+              <a:rPr sz="2800">
+                <a:solidFill>
+                  <a:srgbClr val="0F172A"/>
+                </a:solidFill>
+                <a:latin typeface="微軟正黑體"/>
+              </a:rPr>
+              <a:t>選擇您常用的 Google 帳號授權登入</a:t>
+            </a:r>
+          </a:p>
+          <a:p>
+            <a:pPr>
+              <a:spcBef>
+                <a:spcPts val="100"/>
+              </a:spcBef>
+              <a:spcAft>
+                <a:spcPts val="800"/>
+              </a:spcAft>
+            </a:pPr>
+            <a:r>
+              <a:rPr sz="2800" b="1">
+                <a:solidFill>
+                  <a:srgbClr val="D97706"/>
+                </a:solidFill>
+                <a:latin typeface="微軟正黑體"/>
+              </a:rPr>
+              <a:t>• </a:t>
+            </a:r>
+            <a:r>
+              <a:rPr sz="2800">
+                <a:solidFill>
+                  <a:srgbClr val="0F172A"/>
+                </a:solidFill>
+                <a:latin typeface="微軟正黑體"/>
+              </a:rPr>
+              <a:t>登入後點擊右上角頭像選單，點選【修改學號與姓名】</a:t>
+            </a:r>
+          </a:p>
+          <a:p>
+            <a:pPr>
+              <a:spcBef>
+                <a:spcPts val="100"/>
+              </a:spcBef>
+              <a:spcAft>
+                <a:spcPts val="800"/>
+              </a:spcAft>
+            </a:pPr>
+            <a:r>
+              <a:rPr sz="2800" b="1">
+                <a:solidFill>
+                  <a:srgbClr val="D97706"/>
+                </a:solidFill>
+                <a:latin typeface="微軟正黑體"/>
+              </a:rPr>
+              <a:t>• </a:t>
+            </a:r>
+            <a:r>
+              <a:rPr sz="2800">
+                <a:solidFill>
+                  <a:srgbClr val="0F172A"/>
+                </a:solidFill>
+                <a:latin typeface="微軟正黑體"/>
+              </a:rPr>
+              <a:t>輸入您的『萬能科大學號』(如 11308888) 與『中文姓名』並儲存</a:t>
             </a:r>
           </a:p>
         </p:txBody>
@@ -23206,7 +23069,7 @@
                 </a:solidFill>
                 <a:latin typeface="微軟正黑體"/>
               </a:rPr>
-              <a:t>💡 關鍵提點：每位同學都能清楚掌握自己的學期平時與期中、期末得分現況！</a:t>
+              <a:t>💡 關鍵提點：綁定學號與姓名後，所有答題紀錄與報告成果均會歸戶至您的個人成績單！</a:t>
             </a:r>
           </a:p>
         </p:txBody>
@@ -23319,7 +23182,7 @@
                 </a:solidFill>
                 <a:latin typeface="微軟正黑體"/>
               </a:rPr>
-              <a:t>考題解析</a:t>
+              <a:t>填寫表單</a:t>
             </a:r>
           </a:p>
         </p:txBody>
@@ -23388,7 +23251,7 @@
                 </a:solidFill>
                 <a:latin typeface="微軟正黑體"/>
               </a:rPr>
-              <a:t>【證照真題 1】資訊科技的角色演變</a:t>
+              <a:t>【作業繳交】步驟 36：進入學生報告繳交專區</a:t>
             </a:r>
           </a:p>
         </p:txBody>
@@ -23417,113 +23280,169 @@
           <a:p>
             <a:pPr>
               <a:spcBef>
-                <a:spcPts val="400"/>
-              </a:spcBef>
-              <a:spcAft>
-                <a:spcPts val="2000"/>
-              </a:spcAft>
-            </a:pPr>
-            <a:r>
-              <a:rPr sz="2800" b="1">
-                <a:solidFill>
-                  <a:srgbClr val="D97706"/>
-                </a:solidFill>
-                <a:latin typeface="微軟正黑體"/>
-              </a:rPr>
-              <a:t>• </a:t>
-            </a:r>
-            <a:r>
-              <a:rPr sz="2800">
-                <a:solidFill>
-                  <a:srgbClr val="0F172A"/>
-                </a:solidFill>
-                <a:latin typeface="微軟正黑體"/>
-              </a:rPr>
-              <a:t>題目：資訊科技 (IT) 在當代企業組織中所扮演的角色為何？</a:t>
-            </a:r>
-          </a:p>
-          <a:p>
-            <a:pPr>
-              <a:spcBef>
-                <a:spcPts val="400"/>
-              </a:spcBef>
-              <a:spcAft>
-                <a:spcPts val="2000"/>
-              </a:spcAft>
-            </a:pPr>
-            <a:r>
-              <a:rPr sz="2800" b="1">
-                <a:solidFill>
-                  <a:srgbClr val="D97706"/>
-                </a:solidFill>
-                <a:latin typeface="微軟正黑體"/>
-              </a:rPr>
-              <a:t>• </a:t>
-            </a:r>
-            <a:r>
-              <a:rPr sz="2800">
-                <a:solidFill>
-                  <a:srgbClr val="0F172A"/>
-                </a:solidFill>
-                <a:latin typeface="微軟正黑體"/>
-              </a:rPr>
-              <a:t>選項：(1) 可有可無 (2) 提高營業額工具 (3) 獨特競爭武器 (4) 生存與發展的必備配備</a:t>
-            </a:r>
-          </a:p>
-          <a:p>
-            <a:pPr>
-              <a:spcBef>
-                <a:spcPts val="400"/>
-              </a:spcBef>
-              <a:spcAft>
-                <a:spcPts val="2000"/>
-              </a:spcAft>
-            </a:pPr>
-            <a:r>
-              <a:rPr sz="2800" b="1">
-                <a:solidFill>
-                  <a:srgbClr val="D97706"/>
-                </a:solidFill>
-                <a:latin typeface="微軟正黑體"/>
-              </a:rPr>
-              <a:t>• </a:t>
-            </a:r>
-            <a:r>
-              <a:rPr sz="2800">
-                <a:solidFill>
-                  <a:srgbClr val="0F172A"/>
-                </a:solidFill>
-                <a:latin typeface="微軟正黑體"/>
-              </a:rPr>
-              <a:t>正確答案：【(4) 企業生存與發展所必須的基本配備】</a:t>
-            </a:r>
-          </a:p>
-          <a:p>
-            <a:pPr>
-              <a:spcBef>
-                <a:spcPts val="400"/>
-              </a:spcBef>
-              <a:spcAft>
-                <a:spcPts val="2000"/>
-              </a:spcAft>
-            </a:pPr>
-            <a:r>
-              <a:rPr sz="2800" b="1">
-                <a:solidFill>
-                  <a:srgbClr val="D97706"/>
-                </a:solidFill>
-                <a:latin typeface="微軟正黑體"/>
-              </a:rPr>
-              <a:t>• </a:t>
-            </a:r>
-            <a:r>
-              <a:rPr sz="2800">
-                <a:solidFill>
-                  <a:srgbClr val="0F172A"/>
-                </a:solidFill>
-                <a:latin typeface="微軟正黑體"/>
-              </a:rPr>
-              <a:t>盲點破解：很多同學容易誤選 (3)！在早期 IT 確實是策略武器，但現代若無系統連基本發票與訂單都無法開立，IT 已轉變成如同水電般的企業生存基本門檻！</a:t>
+                <a:spcPts val="100"/>
+              </a:spcBef>
+              <a:spcAft>
+                <a:spcPts val="800"/>
+              </a:spcAft>
+            </a:pPr>
+            <a:r>
+              <a:rPr sz="2800" b="1">
+                <a:solidFill>
+                  <a:srgbClr val="D97706"/>
+                </a:solidFill>
+                <a:latin typeface="微軟正黑體"/>
+              </a:rPr>
+              <a:t>• </a:t>
+            </a:r>
+            <a:r>
+              <a:rPr sz="2800">
+                <a:solidFill>
+                  <a:srgbClr val="0F172A"/>
+                </a:solidFill>
+                <a:latin typeface="微軟正黑體"/>
+              </a:rPr>
+              <a:t>點擊頂部導覽列按鈕【📤 學生報告繳交】進入繳交專區</a:t>
+            </a:r>
+          </a:p>
+          <a:p>
+            <a:pPr>
+              <a:spcBef>
+                <a:spcPts val="100"/>
+              </a:spcBef>
+              <a:spcAft>
+                <a:spcPts val="800"/>
+              </a:spcAft>
+            </a:pPr>
+            <a:r>
+              <a:rPr sz="2800" b="1">
+                <a:solidFill>
+                  <a:srgbClr val="D97706"/>
+                </a:solidFill>
+                <a:latin typeface="微軟正黑體"/>
+              </a:rPr>
+              <a:t>• </a:t>
+            </a:r>
+            <a:r>
+              <a:rPr sz="2800">
+                <a:solidFill>
+                  <a:srgbClr val="0F172A"/>
+                </a:solidFill>
+                <a:latin typeface="微軟正黑體"/>
+              </a:rPr>
+              <a:t>欄位 1【繳交報告類別】：依當前進度挑選『期中報告 (40%)』或『期末報告 (40%)』</a:t>
+            </a:r>
+          </a:p>
+          <a:p>
+            <a:pPr>
+              <a:spcBef>
+                <a:spcPts val="100"/>
+              </a:spcBef>
+              <a:spcAft>
+                <a:spcPts val="800"/>
+              </a:spcAft>
+            </a:pPr>
+            <a:r>
+              <a:rPr sz="2800" b="1">
+                <a:solidFill>
+                  <a:srgbClr val="D97706"/>
+                </a:solidFill>
+                <a:latin typeface="微軟正黑體"/>
+              </a:rPr>
+              <a:t>• </a:t>
+            </a:r>
+            <a:r>
+              <a:rPr sz="2800">
+                <a:solidFill>
+                  <a:srgbClr val="0F172A"/>
+                </a:solidFill>
+                <a:latin typeface="微軟正黑體"/>
+              </a:rPr>
+              <a:t>欄位 2【專案主題 / 標題】：輸入專案題名 (例：`自行車業主檔實體建模實作報告`)</a:t>
+            </a:r>
+          </a:p>
+          <a:p>
+            <a:pPr>
+              <a:spcBef>
+                <a:spcPts val="100"/>
+              </a:spcBef>
+              <a:spcAft>
+                <a:spcPts val="800"/>
+              </a:spcAft>
+            </a:pPr>
+            <a:r>
+              <a:rPr sz="2800" b="1">
+                <a:solidFill>
+                  <a:srgbClr val="D97706"/>
+                </a:solidFill>
+                <a:latin typeface="微軟正黑體"/>
+              </a:rPr>
+              <a:t>• </a:t>
+            </a:r>
+            <a:r>
+              <a:rPr sz="2800">
+                <a:solidFill>
+                  <a:srgbClr val="0F172A"/>
+                </a:solidFill>
+                <a:latin typeface="微軟正黑體"/>
+              </a:rPr>
+              <a:t>欄位 3【核心內容摘要與成果說明】：簡要撰寫 200~500 字心得以條列呈現</a:t>
+            </a:r>
+          </a:p>
+          <a:p>
+            <a:pPr>
+              <a:spcBef>
+                <a:spcPts val="100"/>
+              </a:spcBef>
+              <a:spcAft>
+                <a:spcPts val="800"/>
+              </a:spcAft>
+            </a:pPr>
+            <a:r>
+              <a:rPr sz="2800" b="1">
+                <a:solidFill>
+                  <a:srgbClr val="D97706"/>
+                </a:solidFill>
+                <a:latin typeface="微軟正黑體"/>
+              </a:rPr>
+              <a:t>• </a:t>
+            </a:r>
+            <a:r>
+              <a:rPr sz="2800">
+                <a:solidFill>
+                  <a:srgbClr val="0F172A"/>
+                </a:solidFill>
+                <a:latin typeface="微軟正黑體"/>
+              </a:rPr>
+              <a:t>欄位 4【線上成果網址】：貼入您的 GitHub 專案或雲端網址</a:t>
+            </a:r>
+          </a:p>
+          <a:p>
+            <a:pPr>
+              <a:spcBef>
+                <a:spcPts val="100"/>
+              </a:spcBef>
+              <a:spcAft>
+                <a:spcPts val="800"/>
+              </a:spcAft>
+            </a:pPr>
+            <a:r>
+              <a:rPr sz="2800" b="1">
+                <a:solidFill>
+                  <a:srgbClr val="D97706"/>
+                </a:solidFill>
+                <a:latin typeface="微軟正黑體"/>
+              </a:rPr>
+              <a:t>• </a:t>
+            </a:r>
+            <a:r>
+              <a:rPr sz="2800">
+                <a:solidFill>
+                  <a:srgbClr val="0F172A"/>
+                </a:solidFill>
+                <a:latin typeface="微軟正黑體"/>
+              </a:rPr>
+              <a:t>欄位 5【附件檔案】：若有 PDF/Word 報告亦可一併附加</a:t>
             </a:r>
           </a:p>
         </p:txBody>
@@ -23577,7 +23496,7 @@
                 </a:solidFill>
                 <a:latin typeface="微軟正黑體"/>
               </a:rPr>
-              <a:t>💡 關鍵提點：認證檢定基礎概念第 1 題，請務必掌握演變邏輯！</a:t>
+              <a:t>💡 關鍵提點：內容摘要清楚說明遭遇問題與解決辦法，更容易獲得高分肯定！</a:t>
             </a:r>
           </a:p>
         </p:txBody>
@@ -23690,7 +23609,7 @@
                 </a:solidFill>
                 <a:latin typeface="微軟正黑體"/>
               </a:rPr>
-              <a:t>考題解析</a:t>
+              <a:t>證照加分</a:t>
             </a:r>
           </a:p>
         </p:txBody>
@@ -23759,7 +23678,7 @@
                 </a:solidFill>
                 <a:latin typeface="微軟正黑體"/>
               </a:rPr>
-              <a:t>【證照真題 2】資訊孤島的標準定義</a:t>
+              <a:t>【作業繳交】步驟 37：勾選證照特別加分申請</a:t>
             </a:r>
           </a:p>
         </p:txBody>
@@ -23788,113 +23707,141 @@
           <a:p>
             <a:pPr>
               <a:spcBef>
-                <a:spcPts val="400"/>
-              </a:spcBef>
-              <a:spcAft>
-                <a:spcPts val="2000"/>
-              </a:spcAft>
-            </a:pPr>
-            <a:r>
-              <a:rPr sz="2800" b="1">
-                <a:solidFill>
-                  <a:srgbClr val="D97706"/>
-                </a:solidFill>
-                <a:latin typeface="微軟正黑體"/>
-              </a:rPr>
-              <a:t>• </a:t>
-            </a:r>
-            <a:r>
-              <a:rPr sz="2800">
-                <a:solidFill>
-                  <a:srgbClr val="0F172A"/>
-                </a:solidFill>
-                <a:latin typeface="微軟正黑體"/>
-              </a:rPr>
-              <a:t>題目：所謂「資訊孤島 (Information Island)」最精確的定義指的是？</a:t>
-            </a:r>
-          </a:p>
-          <a:p>
-            <a:pPr>
-              <a:spcBef>
-                <a:spcPts val="400"/>
-              </a:spcBef>
-              <a:spcAft>
-                <a:spcPts val="2000"/>
-              </a:spcAft>
-            </a:pPr>
-            <a:r>
-              <a:rPr sz="2800" b="1">
-                <a:solidFill>
-                  <a:srgbClr val="D97706"/>
-                </a:solidFill>
-                <a:latin typeface="微軟正黑體"/>
-              </a:rPr>
-              <a:t>• </a:t>
-            </a:r>
-            <a:r>
-              <a:rPr sz="2800">
-                <a:solidFill>
-                  <a:srgbClr val="0F172A"/>
-                </a:solidFill>
-                <a:latin typeface="微軟正黑體"/>
-              </a:rPr>
-              <a:t>選項：(1) 孤立海外小島 (2) 理應共享卻無法互通的獨立系統 (3) 人工傳遞資訊無效率 (4) 拔除網路線的電腦</a:t>
-            </a:r>
-          </a:p>
-          <a:p>
-            <a:pPr>
-              <a:spcBef>
-                <a:spcPts val="400"/>
-              </a:spcBef>
-              <a:spcAft>
-                <a:spcPts val="2000"/>
-              </a:spcAft>
-            </a:pPr>
-            <a:r>
-              <a:rPr sz="2800" b="1">
-                <a:solidFill>
-                  <a:srgbClr val="D97706"/>
-                </a:solidFill>
-                <a:latin typeface="微軟正黑體"/>
-              </a:rPr>
-              <a:t>• </a:t>
-            </a:r>
-            <a:r>
-              <a:rPr sz="2800">
-                <a:solidFill>
-                  <a:srgbClr val="0F172A"/>
-                </a:solidFill>
-                <a:latin typeface="微軟正黑體"/>
-              </a:rPr>
-              <a:t>正確答案：【(2) 一群理應共同分享的資訊，卻沒有能夠相互連繫的資訊系統】</a:t>
-            </a:r>
-          </a:p>
-          <a:p>
-            <a:pPr>
-              <a:spcBef>
-                <a:spcPts val="400"/>
-              </a:spcBef>
-              <a:spcAft>
-                <a:spcPts val="2000"/>
-              </a:spcAft>
-            </a:pPr>
-            <a:r>
-              <a:rPr sz="2800" b="1">
-                <a:solidFill>
-                  <a:srgbClr val="D97706"/>
-                </a:solidFill>
-                <a:latin typeface="微軟正黑體"/>
-              </a:rPr>
-              <a:t>• </a:t>
-            </a:r>
-            <a:r>
-              <a:rPr sz="2800">
-                <a:solidFill>
-                  <a:srgbClr val="0F172A"/>
-                </a:solidFill>
-                <a:latin typeface="微軟正黑體"/>
-              </a:rPr>
-              <a:t>盲點破解：資訊孤島是企業存在大量資料，但因軟體格式不一或部門壁壘，無法串接共享而形成的封閉現象。</a:t>
+                <a:spcPts val="200"/>
+              </a:spcBef>
+              <a:spcAft>
+                <a:spcPts val="1400"/>
+              </a:spcAft>
+            </a:pPr>
+            <a:r>
+              <a:rPr sz="2800" b="1">
+                <a:solidFill>
+                  <a:srgbClr val="D97706"/>
+                </a:solidFill>
+                <a:latin typeface="微軟正黑體"/>
+              </a:rPr>
+              <a:t>• </a:t>
+            </a:r>
+            <a:r>
+              <a:rPr sz="2800">
+                <a:solidFill>
+                  <a:srgbClr val="0F172A"/>
+                </a:solidFill>
+                <a:latin typeface="微軟正黑體"/>
+              </a:rPr>
+              <a:t>在繳交表單下方，有一個金黃色的特別加分勾選區塊：</a:t>
+            </a:r>
+          </a:p>
+          <a:p>
+            <a:pPr>
+              <a:spcBef>
+                <a:spcPts val="200"/>
+              </a:spcBef>
+              <a:spcAft>
+                <a:spcPts val="1400"/>
+              </a:spcAft>
+            </a:pPr>
+            <a:r>
+              <a:rPr sz="2800" b="1">
+                <a:solidFill>
+                  <a:srgbClr val="D97706"/>
+                </a:solidFill>
+                <a:latin typeface="微軟正黑體"/>
+              </a:rPr>
+              <a:t>• </a:t>
+            </a:r>
+            <a:r>
+              <a:rPr sz="2800">
+                <a:solidFill>
+                  <a:srgbClr val="0F172A"/>
+                </a:solidFill>
+                <a:latin typeface="微軟正黑體"/>
+              </a:rPr>
+              <a:t>☑【🌟 申請專業證照特別加分】：</a:t>
+            </a:r>
+          </a:p>
+          <a:p>
+            <a:pPr>
+              <a:spcBef>
+                <a:spcPts val="200"/>
+              </a:spcBef>
+              <a:spcAft>
+                <a:spcPts val="1400"/>
+              </a:spcAft>
+            </a:pPr>
+            <a:r>
+              <a:rPr sz="2800" b="1">
+                <a:solidFill>
+                  <a:srgbClr val="D97706"/>
+                </a:solidFill>
+                <a:latin typeface="微軟正黑體"/>
+              </a:rPr>
+              <a:t>• </a:t>
+            </a:r>
+            <a:r>
+              <a:rPr sz="2800">
+                <a:solidFill>
+                  <a:srgbClr val="0F172A"/>
+                </a:solidFill>
+                <a:latin typeface="微軟正黑體"/>
+              </a:rPr>
+              <a:t>『我已考取或本學期正在報考 AI 賦能 ERP 或 ERP 相關檢定證照，請老師予以學期總成績特別加分！』</a:t>
+            </a:r>
+          </a:p>
+          <a:p>
+            <a:pPr>
+              <a:spcBef>
+                <a:spcPts val="200"/>
+              </a:spcBef>
+              <a:spcAft>
+                <a:spcPts val="1400"/>
+              </a:spcAft>
+            </a:pPr>
+            <a:r>
+              <a:rPr sz="2800" b="1">
+                <a:solidFill>
+                  <a:srgbClr val="D97706"/>
+                </a:solidFill>
+                <a:latin typeface="微軟正黑體"/>
+              </a:rPr>
+              <a:t>• </a:t>
+            </a:r>
+            <a:r>
+              <a:rPr sz="2800">
+                <a:solidFill>
+                  <a:srgbClr val="0F172A"/>
+                </a:solidFill>
+                <a:latin typeface="微軟正黑體"/>
+              </a:rPr>
+              <a:t>若您有考照計畫或已取得證照，請務必將此項方框打勾！</a:t>
+            </a:r>
+          </a:p>
+          <a:p>
+            <a:pPr>
+              <a:spcBef>
+                <a:spcPts val="200"/>
+              </a:spcBef>
+              <a:spcAft>
+                <a:spcPts val="1400"/>
+              </a:spcAft>
+            </a:pPr>
+            <a:r>
+              <a:rPr sz="2800" b="1">
+                <a:solidFill>
+                  <a:srgbClr val="D97706"/>
+                </a:solidFill>
+                <a:latin typeface="微軟正黑體"/>
+              </a:rPr>
+              <a:t>• </a:t>
+            </a:r>
+            <a:r>
+              <a:rPr sz="2800">
+                <a:solidFill>
+                  <a:srgbClr val="0F172A"/>
+                </a:solidFill>
+                <a:latin typeface="微軟正黑體"/>
+              </a:rPr>
+              <a:t>確認資料皆填寫完畢後，點擊最下方綠色按鈕【確認送出繳交報告】！</a:t>
             </a:r>
           </a:p>
         </p:txBody>
@@ -23948,7 +23895,7 @@
                 </a:solidFill>
                 <a:latin typeface="微軟正黑體"/>
               </a:rPr>
-              <a:t>💡 關鍵提點：ERP 誕生的核心目的就是為了消滅資訊孤島！</a:t>
+              <a:t>💡 關鍵提點：送出後畫面會跳出恭喜提示框，代表資料已即時寫入 Firebase 雲端！</a:t>
             </a:r>
           </a:p>
         </p:txBody>
@@ -24061,7 +24008,7 @@
                 </a:solidFill>
                 <a:latin typeface="微軟正黑體"/>
               </a:rPr>
-              <a:t>考題解析</a:t>
+              <a:t>成績查閱</a:t>
             </a:r>
           </a:p>
         </p:txBody>
@@ -24130,7 +24077,7 @@
                 </a:solidFill>
                 <a:latin typeface="微軟正黑體"/>
               </a:rPr>
-              <a:t>【證照真題 3】企業經營規模擴大的挑戰</a:t>
+              <a:t>【作業繳交】步驟 38：在右側查看即時反饋與老師評語</a:t>
             </a:r>
           </a:p>
         </p:txBody>
@@ -24159,113 +24106,141 @@
           <a:p>
             <a:pPr>
               <a:spcBef>
-                <a:spcPts val="400"/>
-              </a:spcBef>
-              <a:spcAft>
-                <a:spcPts val="2000"/>
-              </a:spcAft>
-            </a:pPr>
-            <a:r>
-              <a:rPr sz="2800" b="1">
-                <a:solidFill>
-                  <a:srgbClr val="D97706"/>
-                </a:solidFill>
-                <a:latin typeface="微軟正黑體"/>
-              </a:rPr>
-              <a:t>• </a:t>
-            </a:r>
-            <a:r>
-              <a:rPr sz="2800">
-                <a:solidFill>
-                  <a:srgbClr val="0F172A"/>
-                </a:solidFill>
-                <a:latin typeface="微軟正黑體"/>
-              </a:rPr>
-              <a:t>題目：當企業經營規模由小變大時，最容易產生的管理挑戰是？</a:t>
-            </a:r>
-          </a:p>
-          <a:p>
-            <a:pPr>
-              <a:spcBef>
-                <a:spcPts val="400"/>
-              </a:spcBef>
-              <a:spcAft>
-                <a:spcPts val="2000"/>
-              </a:spcAft>
-            </a:pPr>
-            <a:r>
-              <a:rPr sz="2800" b="1">
-                <a:solidFill>
-                  <a:srgbClr val="D97706"/>
-                </a:solidFill>
-                <a:latin typeface="微軟正黑體"/>
-              </a:rPr>
-              <a:t>• </a:t>
-            </a:r>
-            <a:r>
-              <a:rPr sz="2800">
-                <a:solidFill>
-                  <a:srgbClr val="0F172A"/>
-                </a:solidFill>
-                <a:latin typeface="微軟正黑體"/>
-              </a:rPr>
-              <a:t>選項：(1) 員工專業分工更精細 (2) 部門主管更專注 (3) 部門間協調溝通問題越嚴重 (4) 工作更單純</a:t>
-            </a:r>
-          </a:p>
-          <a:p>
-            <a:pPr>
-              <a:spcBef>
-                <a:spcPts val="400"/>
-              </a:spcBef>
-              <a:spcAft>
-                <a:spcPts val="2000"/>
-              </a:spcAft>
-            </a:pPr>
-            <a:r>
-              <a:rPr sz="2800" b="1">
-                <a:solidFill>
-                  <a:srgbClr val="D97706"/>
-                </a:solidFill>
-                <a:latin typeface="微軟正黑體"/>
-              </a:rPr>
-              <a:t>• </a:t>
-            </a:r>
-            <a:r>
-              <a:rPr sz="2800">
-                <a:solidFill>
-                  <a:srgbClr val="0F172A"/>
-                </a:solidFill>
-                <a:latin typeface="微軟正黑體"/>
-              </a:rPr>
-              <a:t>正確答案：【(3) 部門間協調溝通的問題越來越嚴重】</a:t>
-            </a:r>
-          </a:p>
-          <a:p>
-            <a:pPr>
-              <a:spcBef>
-                <a:spcPts val="400"/>
-              </a:spcBef>
-              <a:spcAft>
-                <a:spcPts val="2000"/>
-              </a:spcAft>
-            </a:pPr>
-            <a:r>
-              <a:rPr sz="2800" b="1">
-                <a:solidFill>
-                  <a:srgbClr val="D97706"/>
-                </a:solidFill>
-                <a:latin typeface="微軟正黑體"/>
-              </a:rPr>
-              <a:t>• </a:t>
-            </a:r>
-            <a:r>
-              <a:rPr sz="2800">
-                <a:solidFill>
-                  <a:srgbClr val="0F172A"/>
-                </a:solidFill>
-                <a:latin typeface="微軟正黑體"/>
-              </a:rPr>
-              <a:t>盲點破解：組織膨脹後各部門各執一詞（業務怪生產交不出貨、生產怪採購料進不來），因此極度需要 ERP 橫向串連流程！</a:t>
+                <a:spcPts val="200"/>
+              </a:spcBef>
+              <a:spcAft>
+                <a:spcPts val="1400"/>
+              </a:spcAft>
+            </a:pPr>
+            <a:r>
+              <a:rPr sz="2800" b="1">
+                <a:solidFill>
+                  <a:srgbClr val="D97706"/>
+                </a:solidFill>
+                <a:latin typeface="微軟正黑體"/>
+              </a:rPr>
+              <a:t>• </a:t>
+            </a:r>
+            <a:r>
+              <a:rPr sz="2800">
+                <a:solidFill>
+                  <a:srgbClr val="0F172A"/>
+                </a:solidFill>
+                <a:latin typeface="微軟正黑體"/>
+              </a:rPr>
+              <a:t>送出報告後，右側『我的報告繳交歷程與成績』會立即出現您的報告卡片！</a:t>
+            </a:r>
+          </a:p>
+          <a:p>
+            <a:pPr>
+              <a:spcBef>
+                <a:spcPts val="200"/>
+              </a:spcBef>
+              <a:spcAft>
+                <a:spcPts val="1400"/>
+              </a:spcAft>
+            </a:pPr>
+            <a:r>
+              <a:rPr sz="2800" b="1">
+                <a:solidFill>
+                  <a:srgbClr val="D97706"/>
+                </a:solidFill>
+                <a:latin typeface="微軟正黑體"/>
+              </a:rPr>
+              <a:t>• </a:t>
+            </a:r>
+            <a:r>
+              <a:rPr sz="2800">
+                <a:solidFill>
+                  <a:srgbClr val="0F172A"/>
+                </a:solidFill>
+                <a:latin typeface="微軟正黑體"/>
+              </a:rPr>
+              <a:t>尚未批改時，會顯示金黃色徽章【⏳ 待老師批改中】</a:t>
+            </a:r>
+          </a:p>
+          <a:p>
+            <a:pPr>
+              <a:spcBef>
+                <a:spcPts val="200"/>
+              </a:spcBef>
+              <a:spcAft>
+                <a:spcPts val="1400"/>
+              </a:spcAft>
+            </a:pPr>
+            <a:r>
+              <a:rPr sz="2800" b="1">
+                <a:solidFill>
+                  <a:srgbClr val="D97706"/>
+                </a:solidFill>
+                <a:latin typeface="微軟正黑體"/>
+              </a:rPr>
+              <a:t>• </a:t>
+            </a:r>
+            <a:r>
+              <a:rPr sz="2800">
+                <a:solidFill>
+                  <a:srgbClr val="0F172A"/>
+                </a:solidFill>
+                <a:latin typeface="微軟正黑體"/>
+              </a:rPr>
+              <a:t>老師於後台完成批閱後，徽章會自動變為綠色【評定得分：92 分】</a:t>
+            </a:r>
+          </a:p>
+          <a:p>
+            <a:pPr>
+              <a:spcBef>
+                <a:spcPts val="200"/>
+              </a:spcBef>
+              <a:spcAft>
+                <a:spcPts val="1400"/>
+              </a:spcAft>
+            </a:pPr>
+            <a:r>
+              <a:rPr sz="2800" b="1">
+                <a:solidFill>
+                  <a:srgbClr val="D97706"/>
+                </a:solidFill>
+                <a:latin typeface="微軟正黑體"/>
+              </a:rPr>
+              <a:t>• </a:t>
+            </a:r>
+            <a:r>
+              <a:rPr sz="2800">
+                <a:solidFill>
+                  <a:srgbClr val="0F172A"/>
+                </a:solidFill>
+                <a:latin typeface="微軟正黑體"/>
+              </a:rPr>
+              <a:t>下方會出現綠色的【邱俊維 老師回饋評語】文字框，提供專業改進指導！</a:t>
+            </a:r>
+          </a:p>
+          <a:p>
+            <a:pPr>
+              <a:spcBef>
+                <a:spcPts val="200"/>
+              </a:spcBef>
+              <a:spcAft>
+                <a:spcPts val="1400"/>
+              </a:spcAft>
+            </a:pPr>
+            <a:r>
+              <a:rPr sz="2800" b="1">
+                <a:solidFill>
+                  <a:srgbClr val="D97706"/>
+                </a:solidFill>
+                <a:latin typeface="微軟正黑體"/>
+              </a:rPr>
+              <a:t>• </a:t>
+            </a:r>
+            <a:r>
+              <a:rPr sz="2800">
+                <a:solidFill>
+                  <a:srgbClr val="0F172A"/>
+                </a:solidFill>
+                <a:latin typeface="微軟正黑體"/>
+              </a:rPr>
+              <a:t>個人紀錄完全受到資安隔離，全班只有您本人與授課教師看得到，隱私絕對安全！</a:t>
             </a:r>
           </a:p>
         </p:txBody>
@@ -24319,7 +24294,7 @@
                 </a:solidFill>
                 <a:latin typeface="微軟正黑體"/>
               </a:rPr>
-              <a:t>💡 關鍵提點：流程導向 (Process-oriented) 是打破跨部門隔閡的解藥。</a:t>
+              <a:t>💡 關鍵提點：每位同學都能清楚掌握自己的學期平時與期中、期末得分現況！</a:t>
             </a:r>
           </a:p>
         </p:txBody>
@@ -24501,7 +24476,7 @@
                 </a:solidFill>
                 <a:latin typeface="微軟正黑體"/>
               </a:rPr>
-              <a:t>【證照真題 4】ERP 名詞起源</a:t>
+              <a:t>【證照真題 1】資訊科技的角色演變</a:t>
             </a:r>
           </a:p>
         </p:txBody>
@@ -24552,7 +24527,7 @@
                 </a:solidFill>
                 <a:latin typeface="微軟正黑體"/>
               </a:rPr>
-              <a:t>題目：企業資源規劃 (ERP) 這一名詞最初是由哪一家研究顧問機構所提出？</a:t>
+              <a:t>題目：資訊科技 (IT) 在當代企業組織中所扮演的角色為何？</a:t>
             </a:r>
           </a:p>
           <a:p>
@@ -24580,7 +24555,7 @@
                 </a:solidFill>
                 <a:latin typeface="微軟正黑體"/>
               </a:rPr>
-              <a:t>選項：(1) IBM (2) Gartner Group (3) SAP (4) APICS</a:t>
+              <a:t>選項：(1) 可有可無 (2) 提高營業額工具 (3) 獨特競爭武器 (4) 生存與發展的必備配備</a:t>
             </a:r>
           </a:p>
           <a:p>
@@ -24608,7 +24583,7 @@
                 </a:solidFill>
                 <a:latin typeface="微軟正黑體"/>
               </a:rPr>
-              <a:t>正確答案：【(2) Gartner Group】</a:t>
+              <a:t>正確答案：【(4) 企業生存與發展所必須的基本配備】</a:t>
             </a:r>
           </a:p>
           <a:p>
@@ -24636,7 +24611,7 @@
                 </a:solidFill>
                 <a:latin typeface="微軟正黑體"/>
               </a:rPr>
-              <a:t>盲點破解：常有同學誤選全球最大 ERP 廠商 (3) SAP！請記住名詞起源是由分析機構 Gartner Group 於 1990 年正式提出定義。</a:t>
+              <a:t>盲點破解：很多同學容易誤選 (3)！在早期 IT 確實是策略武器，但現代若無系統連基本發票與訂單都無法開立，IT 已轉變成如同水電般的企業生存基本門檻！</a:t>
             </a:r>
           </a:p>
         </p:txBody>
@@ -24690,7 +24665,7 @@
                 </a:solidFill>
                 <a:latin typeface="微軟正黑體"/>
               </a:rPr>
-              <a:t>💡 關鍵提點：此為 CERPS 與各類 ERP 檢定考試出現頻率前三名的歷史常識題！</a:t>
+              <a:t>💡 關鍵提點：認證檢定基礎概念第 1 題，請務必掌握演變邏輯！</a:t>
             </a:r>
           </a:p>
         </p:txBody>
@@ -24872,7 +24847,7 @@
                 </a:solidFill>
                 <a:latin typeface="微軟正黑體"/>
               </a:rPr>
-              <a:t>【證照真題 5】MRP 演進之推動力</a:t>
+              <a:t>【證照真題 2】資訊孤島的標準定義</a:t>
             </a:r>
           </a:p>
         </p:txBody>
@@ -24923,7 +24898,7 @@
                 </a:solidFill>
                 <a:latin typeface="微軟正黑體"/>
               </a:rPr>
-              <a:t>題目：製造業由材料需求規劃 (MRP) 發展為製造資源規劃 (MRPII) 的主要驅動力為何？</a:t>
+              <a:t>題目：所謂「資訊孤島 (Information Island)」最精確的定義指的是？</a:t>
             </a:r>
           </a:p>
           <a:p>
@@ -24951,7 +24926,7 @@
                 </a:solidFill>
                 <a:latin typeface="微軟正黑體"/>
               </a:rPr>
-              <a:t>選項：(1) 為了採購更快 (2) 為了納入產能限制與財務成本 (3) 為了人事薪資 (4) 為了客戶關係</a:t>
+              <a:t>選項：(1) 孤立海外小島 (2) 理應共享卻無法互通的獨立系統 (3) 人工傳遞資訊無效率 (4) 拔除網路線的電腦</a:t>
             </a:r>
           </a:p>
           <a:p>
@@ -24979,7 +24954,7 @@
                 </a:solidFill>
                 <a:latin typeface="微軟正黑體"/>
               </a:rPr>
-              <a:t>正確答案：【(2) 為了克服產能限制並與財務成本會計結合】</a:t>
+              <a:t>正確答案：【(2) 一群理應共同分享的資訊，卻沒有能夠相互連繫的資訊系統】</a:t>
             </a:r>
           </a:p>
           <a:p>
@@ -25007,7 +24982,7 @@
                 </a:solidFill>
                 <a:latin typeface="微軟正黑體"/>
               </a:rPr>
-              <a:t>盲點破解：MRP 假設產能無限大是不切實際的，MRPII 納入粗產能 (RCCP) 與產能需求規劃 (CRP)，實現製造與會計閉環控制！</a:t>
+              <a:t>盲點破解：資訊孤島是企業存在大量資料，但因軟體格式不一或部門壁壘，無法串接共享而形成的封閉現象。</a:t>
             </a:r>
           </a:p>
         </p:txBody>
@@ -25061,7 +25036,7 @@
                 </a:solidFill>
                 <a:latin typeface="微軟正黑體"/>
               </a:rPr>
-              <a:t>💡 關鍵提點：每週課堂隨堂 5 題快測，實力自然累積！</a:t>
+              <a:t>💡 關鍵提點：ERP 誕生的核心目的就是為了消滅資訊孤島！</a:t>
             </a:r>
           </a:p>
         </p:txBody>
@@ -25174,7 +25149,7 @@
                 </a:solidFill>
                 <a:latin typeface="微軟正黑體"/>
               </a:rPr>
-              <a:t>實機任務</a:t>
+              <a:t>考題解析</a:t>
             </a:r>
           </a:p>
         </p:txBody>
@@ -25243,7 +25218,7 @@
                 </a:solidFill>
                 <a:latin typeface="微軟正黑體"/>
               </a:rPr>
-              <a:t>Antigravity 任務：ERP 核心主檔資料結構與防呆驗證器</a:t>
+              <a:t>【證照真題 3】企業經營規模擴大的挑戰</a:t>
             </a:r>
           </a:p>
         </p:txBody>
@@ -25272,113 +25247,113 @@
           <a:p>
             <a:pPr>
               <a:spcBef>
-                <a:spcPts val="200"/>
-              </a:spcBef>
-              <a:spcAft>
-                <a:spcPts val="1200"/>
-              </a:spcAft>
-            </a:pPr>
-            <a:r>
-              <a:rPr sz="2800" b="1">
-                <a:solidFill>
-                  <a:srgbClr val="1E3A8A"/>
-                </a:solidFill>
-                <a:latin typeface="微軟正黑體"/>
-              </a:rPr>
-              <a:t>🏢 企業情境：</a:t>
-            </a:r>
-            <a:r>
-              <a:rPr sz="2800">
-                <a:solidFill>
-                  <a:srgbClr val="0F172A"/>
-                </a:solidFill>
-                <a:latin typeface="微軟正黑體"/>
-              </a:rPr>
-              <a:t>企業各部門常因客戶名稱、統編或料號定義不一而陷入『資訊孤島』。本週任務要求學生使用 Antigravity 定義企業客戶、物料與庫房之 Sche...</a:t>
-            </a:r>
-          </a:p>
-          <a:p>
-            <a:pPr>
-              <a:spcBef>
-                <a:spcPts val="200"/>
-              </a:spcBef>
-              <a:spcAft>
-                <a:spcPts val="1200"/>
-              </a:spcAft>
-            </a:pPr>
-            <a:r>
-              <a:rPr sz="2800" b="1">
-                <a:solidFill>
-                  <a:srgbClr val="7C3AED"/>
-                </a:solidFill>
-                <a:latin typeface="微軟正黑體"/>
-              </a:rPr>
-              <a:t>🤖 AI 指引：</a:t>
-            </a:r>
-            <a:r>
-              <a:rPr sz="2800">
-                <a:solidFill>
-                  <a:srgbClr val="0F172A"/>
-                </a:solidFill>
-                <a:latin typeface="微軟正黑體"/>
-              </a:rPr>
-              <a:t>你是一位 ERP 系統架構師。請使用 Python 建立企業主檔（Customer 與 Item）的驗證器。讀取 sample_data.jso...</a:t>
-            </a:r>
-          </a:p>
-          <a:p>
-            <a:pPr>
-              <a:spcBef>
-                <a:spcPts val="200"/>
-              </a:spcBef>
-              <a:spcAft>
-                <a:spcPts val="1200"/>
-              </a:spcAft>
-            </a:pPr>
-            <a:r>
-              <a:rPr sz="2800" b="1">
-                <a:solidFill>
-                  <a:srgbClr val="059669"/>
-                </a:solidFill>
-                <a:latin typeface="微軟正黑體"/>
-              </a:rPr>
-              <a:t>📦 產出交付：</a:t>
-            </a:r>
-            <a:r>
-              <a:rPr sz="2800" b="1">
-                <a:solidFill>
-                  <a:srgbClr val="0F172A"/>
-                </a:solidFill>
-                <a:latin typeface="微軟正黑體"/>
-              </a:rPr>
-              <a:t>master_data_clean.json 與 error_log.txt (存放於專案目錄)</a:t>
-            </a:r>
-          </a:p>
-          <a:p>
-            <a:pPr>
-              <a:spcBef>
-                <a:spcPts val="200"/>
-              </a:spcBef>
-              <a:spcAft>
-                <a:spcPts val="1200"/>
-              </a:spcAft>
-            </a:pPr>
-            <a:r>
-              <a:rPr sz="2800" b="1">
-                <a:solidFill>
-                  <a:srgbClr val="1E3A8A"/>
-                </a:solidFill>
-                <a:latin typeface="微軟正黑體"/>
-              </a:rPr>
-              <a:t>🎯 實作驗收：</a:t>
-            </a:r>
-            <a:r>
-              <a:rPr sz="2800">
-                <a:solidFill>
-                  <a:srgbClr val="0F172A"/>
-                </a:solidFill>
-                <a:latin typeface="微軟正黑體"/>
-              </a:rPr>
-              <a:t>解壓 Week01_Antigravity_Project.zip ➔ 執行 starter.py ➔ verify.py 驗收通過</a:t>
+                <a:spcPts val="400"/>
+              </a:spcBef>
+              <a:spcAft>
+                <a:spcPts val="2000"/>
+              </a:spcAft>
+            </a:pPr>
+            <a:r>
+              <a:rPr sz="2800" b="1">
+                <a:solidFill>
+                  <a:srgbClr val="D97706"/>
+                </a:solidFill>
+                <a:latin typeface="微軟正黑體"/>
+              </a:rPr>
+              <a:t>• </a:t>
+            </a:r>
+            <a:r>
+              <a:rPr sz="2800">
+                <a:solidFill>
+                  <a:srgbClr val="0F172A"/>
+                </a:solidFill>
+                <a:latin typeface="微軟正黑體"/>
+              </a:rPr>
+              <a:t>題目：當企業經營規模由小變大時，最容易產生的管理挑戰是？</a:t>
+            </a:r>
+          </a:p>
+          <a:p>
+            <a:pPr>
+              <a:spcBef>
+                <a:spcPts val="400"/>
+              </a:spcBef>
+              <a:spcAft>
+                <a:spcPts val="2000"/>
+              </a:spcAft>
+            </a:pPr>
+            <a:r>
+              <a:rPr sz="2800" b="1">
+                <a:solidFill>
+                  <a:srgbClr val="D97706"/>
+                </a:solidFill>
+                <a:latin typeface="微軟正黑體"/>
+              </a:rPr>
+              <a:t>• </a:t>
+            </a:r>
+            <a:r>
+              <a:rPr sz="2800">
+                <a:solidFill>
+                  <a:srgbClr val="0F172A"/>
+                </a:solidFill>
+                <a:latin typeface="微軟正黑體"/>
+              </a:rPr>
+              <a:t>選項：(1) 員工專業分工更精細 (2) 部門主管更專注 (3) 部門間協調溝通問題越嚴重 (4) 工作更單純</a:t>
+            </a:r>
+          </a:p>
+          <a:p>
+            <a:pPr>
+              <a:spcBef>
+                <a:spcPts val="400"/>
+              </a:spcBef>
+              <a:spcAft>
+                <a:spcPts val="2000"/>
+              </a:spcAft>
+            </a:pPr>
+            <a:r>
+              <a:rPr sz="2800" b="1">
+                <a:solidFill>
+                  <a:srgbClr val="D97706"/>
+                </a:solidFill>
+                <a:latin typeface="微軟正黑體"/>
+              </a:rPr>
+              <a:t>• </a:t>
+            </a:r>
+            <a:r>
+              <a:rPr sz="2800">
+                <a:solidFill>
+                  <a:srgbClr val="0F172A"/>
+                </a:solidFill>
+                <a:latin typeface="微軟正黑體"/>
+              </a:rPr>
+              <a:t>正確答案：【(3) 部門間協調溝通的問題越來越嚴重】</a:t>
+            </a:r>
+          </a:p>
+          <a:p>
+            <a:pPr>
+              <a:spcBef>
+                <a:spcPts val="400"/>
+              </a:spcBef>
+              <a:spcAft>
+                <a:spcPts val="2000"/>
+              </a:spcAft>
+            </a:pPr>
+            <a:r>
+              <a:rPr sz="2800" b="1">
+                <a:solidFill>
+                  <a:srgbClr val="D97706"/>
+                </a:solidFill>
+                <a:latin typeface="微軟正黑體"/>
+              </a:rPr>
+              <a:t>• </a:t>
+            </a:r>
+            <a:r>
+              <a:rPr sz="2800">
+                <a:solidFill>
+                  <a:srgbClr val="0F172A"/>
+                </a:solidFill>
+                <a:latin typeface="微軟正黑體"/>
+              </a:rPr>
+              <a:t>盲點破解：組織膨脹後各部門各執一詞（業務怪生產交不出貨、生產怪採購料進不來），因此極度需要 ERP 橫向串連流程！</a:t>
             </a:r>
           </a:p>
         </p:txBody>
@@ -25398,11 +25373,11 @@
             <a:avLst/>
           </a:prstGeom>
           <a:solidFill>
-            <a:srgbClr val="ECFDF5"/>
+            <a:srgbClr val="FEF3C7"/>
           </a:solidFill>
           <a:ln w="19050">
             <a:solidFill>
-              <a:srgbClr val="059669"/>
+              <a:srgbClr val="D97706"/>
             </a:solidFill>
           </a:ln>
         </p:spPr>
@@ -25428,11 +25403,11 @@
             <a:r>
               <a:rPr sz="2800" b="1">
                 <a:solidFill>
-                  <a:srgbClr val="065F46"/>
-                </a:solidFill>
-                <a:latin typeface="微軟正黑體"/>
-              </a:rPr>
-              <a:t>💡 電腦教室實戰：一人一機下載 Week01_Antigravity_Project.zip，動手做出真正可運行的產出！</a:t>
+                  <a:srgbClr val="92400E"/>
+                </a:solidFill>
+                <a:latin typeface="微軟正黑體"/>
+              </a:rPr>
+              <a:t>💡 關鍵提點：流程導向 (Process-oriented) 是打破跨部門隔閡的解藥。</a:t>
             </a:r>
           </a:p>
         </p:txBody>
@@ -25845,6 +25820,1119 @@
 </file>
 
 <file path=ppt/slides/slide60.xml><?xml version="1.0" encoding="utf-8"?>
+<p:sld xmlns:a="http://schemas.openxmlformats.org/drawingml/2006/main" xmlns:p="http://schemas.openxmlformats.org/presentationml/2006/main" xmlns:r="http://schemas.openxmlformats.org/officeDocument/2006/relationships">
+  <p:cSld>
+    <p:spTree>
+      <p:nvGrpSpPr>
+        <p:cNvPr id="1" name=""/>
+        <p:cNvGrpSpPr/>
+        <p:nvPr/>
+      </p:nvGrpSpPr>
+      <p:grpSpPr/>
+      <p:sp>
+        <p:nvSpPr>
+          <p:cNvPr id="2" name="Rectangle 1"/>
+          <p:cNvSpPr/>
+          <p:nvPr/>
+        </p:nvSpPr>
+        <p:spPr>
+          <a:xfrm>
+            <a:off x="0" y="0"/>
+            <a:ext cx="12191695" cy="109728"/>
+          </a:xfrm>
+          <a:prstGeom prst="rect">
+            <a:avLst/>
+          </a:prstGeom>
+          <a:solidFill>
+            <a:srgbClr val="D97706"/>
+          </a:solidFill>
+          <a:ln>
+            <a:noFill/>
+          </a:ln>
+        </p:spPr>
+        <p:style>
+          <a:lnRef idx="1">
+            <a:schemeClr val="accent1"/>
+          </a:lnRef>
+          <a:fillRef idx="3">
+            <a:schemeClr val="accent1"/>
+          </a:fillRef>
+          <a:effectRef idx="2">
+            <a:schemeClr val="accent1"/>
+          </a:effectRef>
+          <a:fontRef idx="minor">
+            <a:schemeClr val="lt1"/>
+          </a:fontRef>
+        </p:style>
+        <p:txBody>
+          <a:bodyPr rtlCol="0" anchor="ctr"/>
+          <a:lstStyle/>
+          <a:p>
+            <a:pPr algn="ctr"/>
+          </a:p>
+        </p:txBody>
+      </p:sp>
+      <p:sp>
+        <p:nvSpPr>
+          <p:cNvPr id="3" name="Rounded Rectangle 2"/>
+          <p:cNvSpPr/>
+          <p:nvPr/>
+        </p:nvSpPr>
+        <p:spPr>
+          <a:xfrm>
+            <a:off x="731520" y="320040"/>
+            <a:ext cx="2377440" cy="411480"/>
+          </a:xfrm>
+          <a:prstGeom prst="roundRect">
+            <a:avLst/>
+          </a:prstGeom>
+          <a:solidFill>
+            <a:srgbClr val="1E3A8A"/>
+          </a:solidFill>
+          <a:ln>
+            <a:noFill/>
+          </a:ln>
+        </p:spPr>
+        <p:style>
+          <a:lnRef idx="1">
+            <a:schemeClr val="accent1"/>
+          </a:lnRef>
+          <a:fillRef idx="3">
+            <a:schemeClr val="accent1"/>
+          </a:fillRef>
+          <a:effectRef idx="2">
+            <a:schemeClr val="accent1"/>
+          </a:effectRef>
+          <a:fontRef idx="minor">
+            <a:schemeClr val="lt1"/>
+          </a:fontRef>
+        </p:style>
+        <p:txBody>
+          <a:bodyPr rtlCol="0" anchor="ctr" wrap="square"/>
+          <a:lstStyle/>
+          <a:p>
+            <a:pPr algn="ctr"/>
+            <a:r>
+              <a:rPr sz="2000" b="1">
+                <a:solidFill>
+                  <a:srgbClr val="FFFFFF"/>
+                </a:solidFill>
+                <a:latin typeface="微軟正黑體"/>
+              </a:rPr>
+              <a:t>考題解析</a:t>
+            </a:r>
+          </a:p>
+        </p:txBody>
+      </p:sp>
+      <p:sp>
+        <p:nvSpPr>
+          <p:cNvPr id="4" name="TextBox 3"/>
+          <p:cNvSpPr txBox="1"/>
+          <p:nvPr/>
+        </p:nvSpPr>
+        <p:spPr>
+          <a:xfrm>
+            <a:off x="6858000" y="274320"/>
+            <a:ext cx="4572000" cy="457200"/>
+          </a:xfrm>
+          <a:prstGeom prst="rect">
+            <a:avLst/>
+          </a:prstGeom>
+          <a:noFill/>
+        </p:spPr>
+        <p:txBody>
+          <a:bodyPr wrap="none">
+            <a:spAutoFit/>
+          </a:bodyPr>
+          <a:lstStyle/>
+          <a:p>
+            <a:pPr algn="r"/>
+            <a:r>
+              <a:rPr sz="2000">
+                <a:solidFill>
+                  <a:srgbClr val="64748B"/>
+                </a:solidFill>
+                <a:latin typeface="微軟正黑體"/>
+              </a:rPr>
+              <a:t>進企四系4甲 ｜ 第 01 週</a:t>
+            </a:r>
+          </a:p>
+        </p:txBody>
+      </p:sp>
+      <p:sp>
+        <p:nvSpPr>
+          <p:cNvPr id="5" name="TextBox 4"/>
+          <p:cNvSpPr txBox="1"/>
+          <p:nvPr/>
+        </p:nvSpPr>
+        <p:spPr>
+          <a:xfrm>
+            <a:off x="731520" y="777240"/>
+            <a:ext cx="10698480" cy="731520"/>
+          </a:xfrm>
+          <a:prstGeom prst="rect">
+            <a:avLst/>
+          </a:prstGeom>
+          <a:noFill/>
+        </p:spPr>
+        <p:txBody>
+          <a:bodyPr wrap="square">
+            <a:spAutoFit/>
+          </a:bodyPr>
+          <a:lstStyle/>
+          <a:p>
+            <a:r>
+              <a:rPr sz="3400" b="1">
+                <a:solidFill>
+                  <a:srgbClr val="1E3A8A"/>
+                </a:solidFill>
+                <a:latin typeface="微軟正黑體"/>
+              </a:rPr>
+              <a:t>【證照真題 4】ERP 名詞起源</a:t>
+            </a:r>
+          </a:p>
+        </p:txBody>
+      </p:sp>
+      <p:sp>
+        <p:nvSpPr>
+          <p:cNvPr id="6" name="TextBox 5"/>
+          <p:cNvSpPr txBox="1"/>
+          <p:nvPr/>
+        </p:nvSpPr>
+        <p:spPr>
+          <a:xfrm>
+            <a:off x="731520" y="1600200"/>
+            <a:ext cx="10728655" cy="3931920"/>
+          </a:xfrm>
+          <a:prstGeom prst="rect">
+            <a:avLst/>
+          </a:prstGeom>
+          <a:noFill/>
+        </p:spPr>
+        <p:txBody>
+          <a:bodyPr wrap="square" tIns="36576" bIns="36576" lIns="36576" rIns="36576">
+            <a:spAutoFit/>
+          </a:bodyPr>
+          <a:lstStyle/>
+          <a:p>
+            <a:pPr>
+              <a:spcBef>
+                <a:spcPts val="400"/>
+              </a:spcBef>
+              <a:spcAft>
+                <a:spcPts val="2000"/>
+              </a:spcAft>
+            </a:pPr>
+            <a:r>
+              <a:rPr sz="2800" b="1">
+                <a:solidFill>
+                  <a:srgbClr val="D97706"/>
+                </a:solidFill>
+                <a:latin typeface="微軟正黑體"/>
+              </a:rPr>
+              <a:t>• </a:t>
+            </a:r>
+            <a:r>
+              <a:rPr sz="2800">
+                <a:solidFill>
+                  <a:srgbClr val="0F172A"/>
+                </a:solidFill>
+                <a:latin typeface="微軟正黑體"/>
+              </a:rPr>
+              <a:t>題目：企業資源規劃 (ERP) 這一名詞最初是由哪一家研究顧問機構所提出？</a:t>
+            </a:r>
+          </a:p>
+          <a:p>
+            <a:pPr>
+              <a:spcBef>
+                <a:spcPts val="400"/>
+              </a:spcBef>
+              <a:spcAft>
+                <a:spcPts val="2000"/>
+              </a:spcAft>
+            </a:pPr>
+            <a:r>
+              <a:rPr sz="2800" b="1">
+                <a:solidFill>
+                  <a:srgbClr val="D97706"/>
+                </a:solidFill>
+                <a:latin typeface="微軟正黑體"/>
+              </a:rPr>
+              <a:t>• </a:t>
+            </a:r>
+            <a:r>
+              <a:rPr sz="2800">
+                <a:solidFill>
+                  <a:srgbClr val="0F172A"/>
+                </a:solidFill>
+                <a:latin typeface="微軟正黑體"/>
+              </a:rPr>
+              <a:t>選項：(1) IBM (2) Gartner Group (3) SAP (4) APICS</a:t>
+            </a:r>
+          </a:p>
+          <a:p>
+            <a:pPr>
+              <a:spcBef>
+                <a:spcPts val="400"/>
+              </a:spcBef>
+              <a:spcAft>
+                <a:spcPts val="2000"/>
+              </a:spcAft>
+            </a:pPr>
+            <a:r>
+              <a:rPr sz="2800" b="1">
+                <a:solidFill>
+                  <a:srgbClr val="D97706"/>
+                </a:solidFill>
+                <a:latin typeface="微軟正黑體"/>
+              </a:rPr>
+              <a:t>• </a:t>
+            </a:r>
+            <a:r>
+              <a:rPr sz="2800">
+                <a:solidFill>
+                  <a:srgbClr val="0F172A"/>
+                </a:solidFill>
+                <a:latin typeface="微軟正黑體"/>
+              </a:rPr>
+              <a:t>正確答案：【(2) Gartner Group】</a:t>
+            </a:r>
+          </a:p>
+          <a:p>
+            <a:pPr>
+              <a:spcBef>
+                <a:spcPts val="400"/>
+              </a:spcBef>
+              <a:spcAft>
+                <a:spcPts val="2000"/>
+              </a:spcAft>
+            </a:pPr>
+            <a:r>
+              <a:rPr sz="2800" b="1">
+                <a:solidFill>
+                  <a:srgbClr val="D97706"/>
+                </a:solidFill>
+                <a:latin typeface="微軟正黑體"/>
+              </a:rPr>
+              <a:t>• </a:t>
+            </a:r>
+            <a:r>
+              <a:rPr sz="2800">
+                <a:solidFill>
+                  <a:srgbClr val="0F172A"/>
+                </a:solidFill>
+                <a:latin typeface="微軟正黑體"/>
+              </a:rPr>
+              <a:t>盲點破解：常有同學誤選全球最大 ERP 廠商 (3) SAP！請記住名詞起源是由分析機構 Gartner Group 於 1990 年正式提出定義。</a:t>
+            </a:r>
+          </a:p>
+        </p:txBody>
+      </p:sp>
+      <p:sp>
+        <p:nvSpPr>
+          <p:cNvPr id="7" name="Rounded Rectangle 6"/>
+          <p:cNvSpPr/>
+          <p:nvPr/>
+        </p:nvSpPr>
+        <p:spPr>
+          <a:xfrm>
+            <a:off x="731520" y="5623560"/>
+            <a:ext cx="10728655" cy="960120"/>
+          </a:xfrm>
+          <a:prstGeom prst="roundRect">
+            <a:avLst/>
+          </a:prstGeom>
+          <a:solidFill>
+            <a:srgbClr val="FEF3C7"/>
+          </a:solidFill>
+          <a:ln w="19050">
+            <a:solidFill>
+              <a:srgbClr val="D97706"/>
+            </a:solidFill>
+          </a:ln>
+        </p:spPr>
+        <p:style>
+          <a:lnRef idx="1">
+            <a:schemeClr val="accent1"/>
+          </a:lnRef>
+          <a:fillRef idx="3">
+            <a:schemeClr val="accent1"/>
+          </a:fillRef>
+          <a:effectRef idx="2">
+            <a:schemeClr val="accent1"/>
+          </a:effectRef>
+          <a:fontRef idx="minor">
+            <a:schemeClr val="lt1"/>
+          </a:fontRef>
+        </p:style>
+        <p:txBody>
+          <a:bodyPr rtlCol="0" anchor="ctr" wrap="square" tIns="73152" bIns="73152" lIns="164592" rIns="164592"/>
+          <a:lstStyle/>
+          <a:p>
+            <a:pPr algn="l"/>
+            <a:r>
+              <a:rPr sz="2800" b="1">
+                <a:solidFill>
+                  <a:srgbClr val="92400E"/>
+                </a:solidFill>
+                <a:latin typeface="微軟正黑體"/>
+              </a:rPr>
+              <a:t>💡 關鍵提點：此為 CERPS 與各類 ERP 檢定考試出現頻率前三名的歷史常識題！</a:t>
+            </a:r>
+          </a:p>
+        </p:txBody>
+      </p:sp>
+    </p:spTree>
+  </p:cSld>
+  <p:clrMapOvr>
+    <a:masterClrMapping/>
+  </p:clrMapOvr>
+</p:sld>
+</file>
+
+<file path=ppt/slides/slide61.xml><?xml version="1.0" encoding="utf-8"?>
+<p:sld xmlns:a="http://schemas.openxmlformats.org/drawingml/2006/main" xmlns:p="http://schemas.openxmlformats.org/presentationml/2006/main" xmlns:r="http://schemas.openxmlformats.org/officeDocument/2006/relationships">
+  <p:cSld>
+    <p:spTree>
+      <p:nvGrpSpPr>
+        <p:cNvPr id="1" name=""/>
+        <p:cNvGrpSpPr/>
+        <p:nvPr/>
+      </p:nvGrpSpPr>
+      <p:grpSpPr/>
+      <p:sp>
+        <p:nvSpPr>
+          <p:cNvPr id="2" name="Rectangle 1"/>
+          <p:cNvSpPr/>
+          <p:nvPr/>
+        </p:nvSpPr>
+        <p:spPr>
+          <a:xfrm>
+            <a:off x="0" y="0"/>
+            <a:ext cx="12191695" cy="109728"/>
+          </a:xfrm>
+          <a:prstGeom prst="rect">
+            <a:avLst/>
+          </a:prstGeom>
+          <a:solidFill>
+            <a:srgbClr val="D97706"/>
+          </a:solidFill>
+          <a:ln>
+            <a:noFill/>
+          </a:ln>
+        </p:spPr>
+        <p:style>
+          <a:lnRef idx="1">
+            <a:schemeClr val="accent1"/>
+          </a:lnRef>
+          <a:fillRef idx="3">
+            <a:schemeClr val="accent1"/>
+          </a:fillRef>
+          <a:effectRef idx="2">
+            <a:schemeClr val="accent1"/>
+          </a:effectRef>
+          <a:fontRef idx="minor">
+            <a:schemeClr val="lt1"/>
+          </a:fontRef>
+        </p:style>
+        <p:txBody>
+          <a:bodyPr rtlCol="0" anchor="ctr"/>
+          <a:lstStyle/>
+          <a:p>
+            <a:pPr algn="ctr"/>
+          </a:p>
+        </p:txBody>
+      </p:sp>
+      <p:sp>
+        <p:nvSpPr>
+          <p:cNvPr id="3" name="Rounded Rectangle 2"/>
+          <p:cNvSpPr/>
+          <p:nvPr/>
+        </p:nvSpPr>
+        <p:spPr>
+          <a:xfrm>
+            <a:off x="731520" y="320040"/>
+            <a:ext cx="2377440" cy="411480"/>
+          </a:xfrm>
+          <a:prstGeom prst="roundRect">
+            <a:avLst/>
+          </a:prstGeom>
+          <a:solidFill>
+            <a:srgbClr val="1E3A8A"/>
+          </a:solidFill>
+          <a:ln>
+            <a:noFill/>
+          </a:ln>
+        </p:spPr>
+        <p:style>
+          <a:lnRef idx="1">
+            <a:schemeClr val="accent1"/>
+          </a:lnRef>
+          <a:fillRef idx="3">
+            <a:schemeClr val="accent1"/>
+          </a:fillRef>
+          <a:effectRef idx="2">
+            <a:schemeClr val="accent1"/>
+          </a:effectRef>
+          <a:fontRef idx="minor">
+            <a:schemeClr val="lt1"/>
+          </a:fontRef>
+        </p:style>
+        <p:txBody>
+          <a:bodyPr rtlCol="0" anchor="ctr" wrap="square"/>
+          <a:lstStyle/>
+          <a:p>
+            <a:pPr algn="ctr"/>
+            <a:r>
+              <a:rPr sz="2000" b="1">
+                <a:solidFill>
+                  <a:srgbClr val="FFFFFF"/>
+                </a:solidFill>
+                <a:latin typeface="微軟正黑體"/>
+              </a:rPr>
+              <a:t>考題解析</a:t>
+            </a:r>
+          </a:p>
+        </p:txBody>
+      </p:sp>
+      <p:sp>
+        <p:nvSpPr>
+          <p:cNvPr id="4" name="TextBox 3"/>
+          <p:cNvSpPr txBox="1"/>
+          <p:nvPr/>
+        </p:nvSpPr>
+        <p:spPr>
+          <a:xfrm>
+            <a:off x="6858000" y="274320"/>
+            <a:ext cx="4572000" cy="457200"/>
+          </a:xfrm>
+          <a:prstGeom prst="rect">
+            <a:avLst/>
+          </a:prstGeom>
+          <a:noFill/>
+        </p:spPr>
+        <p:txBody>
+          <a:bodyPr wrap="none">
+            <a:spAutoFit/>
+          </a:bodyPr>
+          <a:lstStyle/>
+          <a:p>
+            <a:pPr algn="r"/>
+            <a:r>
+              <a:rPr sz="2000">
+                <a:solidFill>
+                  <a:srgbClr val="64748B"/>
+                </a:solidFill>
+                <a:latin typeface="微軟正黑體"/>
+              </a:rPr>
+              <a:t>進企四系4甲 ｜ 第 01 週</a:t>
+            </a:r>
+          </a:p>
+        </p:txBody>
+      </p:sp>
+      <p:sp>
+        <p:nvSpPr>
+          <p:cNvPr id="5" name="TextBox 4"/>
+          <p:cNvSpPr txBox="1"/>
+          <p:nvPr/>
+        </p:nvSpPr>
+        <p:spPr>
+          <a:xfrm>
+            <a:off x="731520" y="777240"/>
+            <a:ext cx="10698480" cy="731520"/>
+          </a:xfrm>
+          <a:prstGeom prst="rect">
+            <a:avLst/>
+          </a:prstGeom>
+          <a:noFill/>
+        </p:spPr>
+        <p:txBody>
+          <a:bodyPr wrap="square">
+            <a:spAutoFit/>
+          </a:bodyPr>
+          <a:lstStyle/>
+          <a:p>
+            <a:r>
+              <a:rPr sz="3400" b="1">
+                <a:solidFill>
+                  <a:srgbClr val="1E3A8A"/>
+                </a:solidFill>
+                <a:latin typeface="微軟正黑體"/>
+              </a:rPr>
+              <a:t>【證照真題 5】MRP 演進之推動力</a:t>
+            </a:r>
+          </a:p>
+        </p:txBody>
+      </p:sp>
+      <p:sp>
+        <p:nvSpPr>
+          <p:cNvPr id="6" name="TextBox 5"/>
+          <p:cNvSpPr txBox="1"/>
+          <p:nvPr/>
+        </p:nvSpPr>
+        <p:spPr>
+          <a:xfrm>
+            <a:off x="731520" y="1600200"/>
+            <a:ext cx="10728655" cy="3931920"/>
+          </a:xfrm>
+          <a:prstGeom prst="rect">
+            <a:avLst/>
+          </a:prstGeom>
+          <a:noFill/>
+        </p:spPr>
+        <p:txBody>
+          <a:bodyPr wrap="square" tIns="36576" bIns="36576" lIns="36576" rIns="36576">
+            <a:spAutoFit/>
+          </a:bodyPr>
+          <a:lstStyle/>
+          <a:p>
+            <a:pPr>
+              <a:spcBef>
+                <a:spcPts val="400"/>
+              </a:spcBef>
+              <a:spcAft>
+                <a:spcPts val="2000"/>
+              </a:spcAft>
+            </a:pPr>
+            <a:r>
+              <a:rPr sz="2800" b="1">
+                <a:solidFill>
+                  <a:srgbClr val="D97706"/>
+                </a:solidFill>
+                <a:latin typeface="微軟正黑體"/>
+              </a:rPr>
+              <a:t>• </a:t>
+            </a:r>
+            <a:r>
+              <a:rPr sz="2800">
+                <a:solidFill>
+                  <a:srgbClr val="0F172A"/>
+                </a:solidFill>
+                <a:latin typeface="微軟正黑體"/>
+              </a:rPr>
+              <a:t>題目：製造業由材料需求規劃 (MRP) 發展為製造資源規劃 (MRPII) 的主要驅動力為何？</a:t>
+            </a:r>
+          </a:p>
+          <a:p>
+            <a:pPr>
+              <a:spcBef>
+                <a:spcPts val="400"/>
+              </a:spcBef>
+              <a:spcAft>
+                <a:spcPts val="2000"/>
+              </a:spcAft>
+            </a:pPr>
+            <a:r>
+              <a:rPr sz="2800" b="1">
+                <a:solidFill>
+                  <a:srgbClr val="D97706"/>
+                </a:solidFill>
+                <a:latin typeface="微軟正黑體"/>
+              </a:rPr>
+              <a:t>• </a:t>
+            </a:r>
+            <a:r>
+              <a:rPr sz="2800">
+                <a:solidFill>
+                  <a:srgbClr val="0F172A"/>
+                </a:solidFill>
+                <a:latin typeface="微軟正黑體"/>
+              </a:rPr>
+              <a:t>選項：(1) 為了採購更快 (2) 為了納入產能限制與財務成本 (3) 為了人事薪資 (4) 為了客戶關係</a:t>
+            </a:r>
+          </a:p>
+          <a:p>
+            <a:pPr>
+              <a:spcBef>
+                <a:spcPts val="400"/>
+              </a:spcBef>
+              <a:spcAft>
+                <a:spcPts val="2000"/>
+              </a:spcAft>
+            </a:pPr>
+            <a:r>
+              <a:rPr sz="2800" b="1">
+                <a:solidFill>
+                  <a:srgbClr val="D97706"/>
+                </a:solidFill>
+                <a:latin typeface="微軟正黑體"/>
+              </a:rPr>
+              <a:t>• </a:t>
+            </a:r>
+            <a:r>
+              <a:rPr sz="2800">
+                <a:solidFill>
+                  <a:srgbClr val="0F172A"/>
+                </a:solidFill>
+                <a:latin typeface="微軟正黑體"/>
+              </a:rPr>
+              <a:t>正確答案：【(2) 為了克服產能限制並與財務成本會計結合】</a:t>
+            </a:r>
+          </a:p>
+          <a:p>
+            <a:pPr>
+              <a:spcBef>
+                <a:spcPts val="400"/>
+              </a:spcBef>
+              <a:spcAft>
+                <a:spcPts val="2000"/>
+              </a:spcAft>
+            </a:pPr>
+            <a:r>
+              <a:rPr sz="2800" b="1">
+                <a:solidFill>
+                  <a:srgbClr val="D97706"/>
+                </a:solidFill>
+                <a:latin typeface="微軟正黑體"/>
+              </a:rPr>
+              <a:t>• </a:t>
+            </a:r>
+            <a:r>
+              <a:rPr sz="2800">
+                <a:solidFill>
+                  <a:srgbClr val="0F172A"/>
+                </a:solidFill>
+                <a:latin typeface="微軟正黑體"/>
+              </a:rPr>
+              <a:t>盲點破解：MRP 假設產能無限大是不切實際的，MRPII 納入粗產能 (RCCP) 與產能需求規劃 (CRP)，實現製造與會計閉環控制！</a:t>
+            </a:r>
+          </a:p>
+        </p:txBody>
+      </p:sp>
+      <p:sp>
+        <p:nvSpPr>
+          <p:cNvPr id="7" name="Rounded Rectangle 6"/>
+          <p:cNvSpPr/>
+          <p:nvPr/>
+        </p:nvSpPr>
+        <p:spPr>
+          <a:xfrm>
+            <a:off x="731520" y="5623560"/>
+            <a:ext cx="10728655" cy="960120"/>
+          </a:xfrm>
+          <a:prstGeom prst="roundRect">
+            <a:avLst/>
+          </a:prstGeom>
+          <a:solidFill>
+            <a:srgbClr val="FEF3C7"/>
+          </a:solidFill>
+          <a:ln w="19050">
+            <a:solidFill>
+              <a:srgbClr val="D97706"/>
+            </a:solidFill>
+          </a:ln>
+        </p:spPr>
+        <p:style>
+          <a:lnRef idx="1">
+            <a:schemeClr val="accent1"/>
+          </a:lnRef>
+          <a:fillRef idx="3">
+            <a:schemeClr val="accent1"/>
+          </a:fillRef>
+          <a:effectRef idx="2">
+            <a:schemeClr val="accent1"/>
+          </a:effectRef>
+          <a:fontRef idx="minor">
+            <a:schemeClr val="lt1"/>
+          </a:fontRef>
+        </p:style>
+        <p:txBody>
+          <a:bodyPr rtlCol="0" anchor="ctr" wrap="square" tIns="73152" bIns="73152" lIns="164592" rIns="164592"/>
+          <a:lstStyle/>
+          <a:p>
+            <a:pPr algn="l"/>
+            <a:r>
+              <a:rPr sz="2800" b="1">
+                <a:solidFill>
+                  <a:srgbClr val="92400E"/>
+                </a:solidFill>
+                <a:latin typeface="微軟正黑體"/>
+              </a:rPr>
+              <a:t>💡 關鍵提點：每週課堂隨堂 5 題快測，實力自然累積！</a:t>
+            </a:r>
+          </a:p>
+        </p:txBody>
+      </p:sp>
+    </p:spTree>
+  </p:cSld>
+  <p:clrMapOvr>
+    <a:masterClrMapping/>
+  </p:clrMapOvr>
+</p:sld>
+</file>
+
+<file path=ppt/slides/slide62.xml><?xml version="1.0" encoding="utf-8"?>
+<p:sld xmlns:a="http://schemas.openxmlformats.org/drawingml/2006/main" xmlns:p="http://schemas.openxmlformats.org/presentationml/2006/main" xmlns:r="http://schemas.openxmlformats.org/officeDocument/2006/relationships">
+  <p:cSld>
+    <p:spTree>
+      <p:nvGrpSpPr>
+        <p:cNvPr id="1" name=""/>
+        <p:cNvGrpSpPr/>
+        <p:nvPr/>
+      </p:nvGrpSpPr>
+      <p:grpSpPr/>
+      <p:sp>
+        <p:nvSpPr>
+          <p:cNvPr id="2" name="Rectangle 1"/>
+          <p:cNvSpPr/>
+          <p:nvPr/>
+        </p:nvSpPr>
+        <p:spPr>
+          <a:xfrm>
+            <a:off x="0" y="0"/>
+            <a:ext cx="12191695" cy="109728"/>
+          </a:xfrm>
+          <a:prstGeom prst="rect">
+            <a:avLst/>
+          </a:prstGeom>
+          <a:solidFill>
+            <a:srgbClr val="D97706"/>
+          </a:solidFill>
+          <a:ln>
+            <a:noFill/>
+          </a:ln>
+        </p:spPr>
+        <p:style>
+          <a:lnRef idx="1">
+            <a:schemeClr val="accent1"/>
+          </a:lnRef>
+          <a:fillRef idx="3">
+            <a:schemeClr val="accent1"/>
+          </a:fillRef>
+          <a:effectRef idx="2">
+            <a:schemeClr val="accent1"/>
+          </a:effectRef>
+          <a:fontRef idx="minor">
+            <a:schemeClr val="lt1"/>
+          </a:fontRef>
+        </p:style>
+        <p:txBody>
+          <a:bodyPr rtlCol="0" anchor="ctr"/>
+          <a:lstStyle/>
+          <a:p>
+            <a:pPr algn="ctr"/>
+          </a:p>
+        </p:txBody>
+      </p:sp>
+      <p:sp>
+        <p:nvSpPr>
+          <p:cNvPr id="3" name="Rounded Rectangle 2"/>
+          <p:cNvSpPr/>
+          <p:nvPr/>
+        </p:nvSpPr>
+        <p:spPr>
+          <a:xfrm>
+            <a:off x="731520" y="320040"/>
+            <a:ext cx="2377440" cy="411480"/>
+          </a:xfrm>
+          <a:prstGeom prst="roundRect">
+            <a:avLst/>
+          </a:prstGeom>
+          <a:solidFill>
+            <a:srgbClr val="1E3A8A"/>
+          </a:solidFill>
+          <a:ln>
+            <a:noFill/>
+          </a:ln>
+        </p:spPr>
+        <p:style>
+          <a:lnRef idx="1">
+            <a:schemeClr val="accent1"/>
+          </a:lnRef>
+          <a:fillRef idx="3">
+            <a:schemeClr val="accent1"/>
+          </a:fillRef>
+          <a:effectRef idx="2">
+            <a:schemeClr val="accent1"/>
+          </a:effectRef>
+          <a:fontRef idx="minor">
+            <a:schemeClr val="lt1"/>
+          </a:fontRef>
+        </p:style>
+        <p:txBody>
+          <a:bodyPr rtlCol="0" anchor="ctr" wrap="square"/>
+          <a:lstStyle/>
+          <a:p>
+            <a:pPr algn="ctr"/>
+            <a:r>
+              <a:rPr sz="2000" b="1">
+                <a:solidFill>
+                  <a:srgbClr val="FFFFFF"/>
+                </a:solidFill>
+                <a:latin typeface="微軟正黑體"/>
+              </a:rPr>
+              <a:t>實機任務</a:t>
+            </a:r>
+          </a:p>
+        </p:txBody>
+      </p:sp>
+      <p:sp>
+        <p:nvSpPr>
+          <p:cNvPr id="4" name="TextBox 3"/>
+          <p:cNvSpPr txBox="1"/>
+          <p:nvPr/>
+        </p:nvSpPr>
+        <p:spPr>
+          <a:xfrm>
+            <a:off x="6858000" y="274320"/>
+            <a:ext cx="4572000" cy="457200"/>
+          </a:xfrm>
+          <a:prstGeom prst="rect">
+            <a:avLst/>
+          </a:prstGeom>
+          <a:noFill/>
+        </p:spPr>
+        <p:txBody>
+          <a:bodyPr wrap="none">
+            <a:spAutoFit/>
+          </a:bodyPr>
+          <a:lstStyle/>
+          <a:p>
+            <a:pPr algn="r"/>
+            <a:r>
+              <a:rPr sz="2000">
+                <a:solidFill>
+                  <a:srgbClr val="64748B"/>
+                </a:solidFill>
+                <a:latin typeface="微軟正黑體"/>
+              </a:rPr>
+              <a:t>進企四系4甲 ｜ 第 01 週</a:t>
+            </a:r>
+          </a:p>
+        </p:txBody>
+      </p:sp>
+      <p:sp>
+        <p:nvSpPr>
+          <p:cNvPr id="5" name="TextBox 4"/>
+          <p:cNvSpPr txBox="1"/>
+          <p:nvPr/>
+        </p:nvSpPr>
+        <p:spPr>
+          <a:xfrm>
+            <a:off x="731520" y="777240"/>
+            <a:ext cx="10698480" cy="731520"/>
+          </a:xfrm>
+          <a:prstGeom prst="rect">
+            <a:avLst/>
+          </a:prstGeom>
+          <a:noFill/>
+        </p:spPr>
+        <p:txBody>
+          <a:bodyPr wrap="square">
+            <a:spAutoFit/>
+          </a:bodyPr>
+          <a:lstStyle/>
+          <a:p>
+            <a:r>
+              <a:rPr sz="3400" b="1">
+                <a:solidFill>
+                  <a:srgbClr val="1E3A8A"/>
+                </a:solidFill>
+                <a:latin typeface="微軟正黑體"/>
+              </a:rPr>
+              <a:t>Antigravity 任務：ERP 核心主檔資料結構與防呆驗證器</a:t>
+            </a:r>
+          </a:p>
+        </p:txBody>
+      </p:sp>
+      <p:sp>
+        <p:nvSpPr>
+          <p:cNvPr id="6" name="TextBox 5"/>
+          <p:cNvSpPr txBox="1"/>
+          <p:nvPr/>
+        </p:nvSpPr>
+        <p:spPr>
+          <a:xfrm>
+            <a:off x="731520" y="1600200"/>
+            <a:ext cx="10728655" cy="3931920"/>
+          </a:xfrm>
+          <a:prstGeom prst="rect">
+            <a:avLst/>
+          </a:prstGeom>
+          <a:noFill/>
+        </p:spPr>
+        <p:txBody>
+          <a:bodyPr wrap="square" tIns="36576" bIns="36576" lIns="36576" rIns="36576">
+            <a:spAutoFit/>
+          </a:bodyPr>
+          <a:lstStyle/>
+          <a:p>
+            <a:pPr>
+              <a:spcBef>
+                <a:spcPts val="200"/>
+              </a:spcBef>
+              <a:spcAft>
+                <a:spcPts val="1200"/>
+              </a:spcAft>
+            </a:pPr>
+            <a:r>
+              <a:rPr sz="2800" b="1">
+                <a:solidFill>
+                  <a:srgbClr val="1E3A8A"/>
+                </a:solidFill>
+                <a:latin typeface="微軟正黑體"/>
+              </a:rPr>
+              <a:t>🏢 企業情境：</a:t>
+            </a:r>
+            <a:r>
+              <a:rPr sz="2800">
+                <a:solidFill>
+                  <a:srgbClr val="0F172A"/>
+                </a:solidFill>
+                <a:latin typeface="微軟正黑體"/>
+              </a:rPr>
+              <a:t>企業各部門常因客戶名稱、統編或料號定義不一而陷入『資訊孤島』。本週任務要求學生使用 Antigravity 定義企業客戶、物料與庫房之 Sche...</a:t>
+            </a:r>
+          </a:p>
+          <a:p>
+            <a:pPr>
+              <a:spcBef>
+                <a:spcPts val="200"/>
+              </a:spcBef>
+              <a:spcAft>
+                <a:spcPts val="1200"/>
+              </a:spcAft>
+            </a:pPr>
+            <a:r>
+              <a:rPr sz="2800" b="1">
+                <a:solidFill>
+                  <a:srgbClr val="7C3AED"/>
+                </a:solidFill>
+                <a:latin typeface="微軟正黑體"/>
+              </a:rPr>
+              <a:t>🤖 AI 指引：</a:t>
+            </a:r>
+            <a:r>
+              <a:rPr sz="2800">
+                <a:solidFill>
+                  <a:srgbClr val="0F172A"/>
+                </a:solidFill>
+                <a:latin typeface="微軟正黑體"/>
+              </a:rPr>
+              <a:t>你是一位 ERP 系統架構師。請使用 Python 建立企業主檔（Customer 與 Item）的驗證器。讀取 sample_data.jso...</a:t>
+            </a:r>
+          </a:p>
+          <a:p>
+            <a:pPr>
+              <a:spcBef>
+                <a:spcPts val="200"/>
+              </a:spcBef>
+              <a:spcAft>
+                <a:spcPts val="1200"/>
+              </a:spcAft>
+            </a:pPr>
+            <a:r>
+              <a:rPr sz="2800" b="1">
+                <a:solidFill>
+                  <a:srgbClr val="059669"/>
+                </a:solidFill>
+                <a:latin typeface="微軟正黑體"/>
+              </a:rPr>
+              <a:t>📦 產出交付：</a:t>
+            </a:r>
+            <a:r>
+              <a:rPr sz="2800" b="1">
+                <a:solidFill>
+                  <a:srgbClr val="0F172A"/>
+                </a:solidFill>
+                <a:latin typeface="微軟正黑體"/>
+              </a:rPr>
+              <a:t>master_data_clean.json 與 error_log.txt (存放於專案目錄)</a:t>
+            </a:r>
+          </a:p>
+          <a:p>
+            <a:pPr>
+              <a:spcBef>
+                <a:spcPts val="200"/>
+              </a:spcBef>
+              <a:spcAft>
+                <a:spcPts val="1200"/>
+              </a:spcAft>
+            </a:pPr>
+            <a:r>
+              <a:rPr sz="2800" b="1">
+                <a:solidFill>
+                  <a:srgbClr val="1E3A8A"/>
+                </a:solidFill>
+                <a:latin typeface="微軟正黑體"/>
+              </a:rPr>
+              <a:t>🎯 實作驗收：</a:t>
+            </a:r>
+            <a:r>
+              <a:rPr sz="2800">
+                <a:solidFill>
+                  <a:srgbClr val="0F172A"/>
+                </a:solidFill>
+                <a:latin typeface="微軟正黑體"/>
+              </a:rPr>
+              <a:t>解壓 Week01_Antigravity_Project.zip ➔ 執行 starter.py ➔ verify.py 驗收通過</a:t>
+            </a:r>
+          </a:p>
+        </p:txBody>
+      </p:sp>
+      <p:sp>
+        <p:nvSpPr>
+          <p:cNvPr id="7" name="Rounded Rectangle 6"/>
+          <p:cNvSpPr/>
+          <p:nvPr/>
+        </p:nvSpPr>
+        <p:spPr>
+          <a:xfrm>
+            <a:off x="731520" y="5623560"/>
+            <a:ext cx="10728655" cy="960120"/>
+          </a:xfrm>
+          <a:prstGeom prst="roundRect">
+            <a:avLst/>
+          </a:prstGeom>
+          <a:solidFill>
+            <a:srgbClr val="ECFDF5"/>
+          </a:solidFill>
+          <a:ln w="19050">
+            <a:solidFill>
+              <a:srgbClr val="059669"/>
+            </a:solidFill>
+          </a:ln>
+        </p:spPr>
+        <p:style>
+          <a:lnRef idx="1">
+            <a:schemeClr val="accent1"/>
+          </a:lnRef>
+          <a:fillRef idx="3">
+            <a:schemeClr val="accent1"/>
+          </a:fillRef>
+          <a:effectRef idx="2">
+            <a:schemeClr val="accent1"/>
+          </a:effectRef>
+          <a:fontRef idx="minor">
+            <a:schemeClr val="lt1"/>
+          </a:fontRef>
+        </p:style>
+        <p:txBody>
+          <a:bodyPr rtlCol="0" anchor="ctr" wrap="square" tIns="73152" bIns="73152" lIns="164592" rIns="164592"/>
+          <a:lstStyle/>
+          <a:p>
+            <a:pPr algn="l"/>
+            <a:r>
+              <a:rPr sz="2800" b="1">
+                <a:solidFill>
+                  <a:srgbClr val="065F46"/>
+                </a:solidFill>
+                <a:latin typeface="微軟正黑體"/>
+              </a:rPr>
+              <a:t>💡 電腦教室實戰：一人一機下載 Week01_Antigravity_Project.zip，動手做出真正可運行的產出！</a:t>
+            </a:r>
+          </a:p>
+        </p:txBody>
+      </p:sp>
+    </p:spTree>
+  </p:cSld>
+  <p:clrMapOvr>
+    <a:masterClrMapping/>
+  </p:clrMapOvr>
+</p:sld>
+</file>
+
+<file path=ppt/slides/slide63.xml><?xml version="1.0" encoding="utf-8"?>
 <p:sld xmlns:a="http://schemas.openxmlformats.org/drawingml/2006/main" xmlns:p="http://schemas.openxmlformats.org/presentationml/2006/main" xmlns:r="http://schemas.openxmlformats.org/officeDocument/2006/relationships">
   <p:cSld>
     <p:spTree>

--- a/01_每週教學簡報_PPT/ERP_第01週_課程導論、ERP_概念演進與數位轉型.pptx
+++ b/01_每週教學簡報_PPT/ERP_第01週_課程導論、ERP_概念演進與數位轉型.pptx
@@ -15756,7 +15756,7 @@
                 </a:solidFill>
                 <a:latin typeface="微軟正黑體"/>
               </a:rPr>
-              <a:t>在電腦教室中，每位同學都有一台電腦，本課程不搞『只在網頁上隨便點一點』的假模擬</a:t>
+              <a:t>在電腦教室中，每位同學都有一台電腦，本課程帶領大家一人一機動手實作</a:t>
             </a:r>
           </a:p>
           <a:p>
@@ -15784,7 +15784,7 @@
                 </a:solidFill>
                 <a:latin typeface="微軟正黑體"/>
               </a:rPr>
-              <a:t>我們要讓每位同學真正拿到【每週企業實戰專案包 (Starter Code)】：</a:t>
+              <a:t>我們要讓每位同學實際拿到【每週企業實戰專案包 (Starter Code)】：</a:t>
             </a:r>
           </a:p>
           <a:p>
@@ -15812,7 +15812,7 @@
                 </a:solidFill>
                 <a:latin typeface="微軟正黑體"/>
               </a:rPr>
-              <a:t>• 內含真實 ERP 企業營運主檔資料 (`sample_data.json`)</a:t>
+              <a:t>• 內含模擬企業營運與教學情境資料 (`sample_data.json`)</a:t>
             </a:r>
           </a:p>
           <a:p>
@@ -15950,7 +15950,7 @@
                 </a:solidFill>
                 <a:latin typeface="微軟正黑體"/>
               </a:rPr>
-              <a:t>💡 關鍵提點：做中學、學中做，累積真實企業實戰力！</a:t>
+              <a:t>💡 關鍵提點：做中學、學中做，累積扎實實務競爭力！</a:t>
             </a:r>
           </a:p>
         </p:txBody>

--- a/01_每週教學簡報_PPT/ERP_第01週_課程導論、ERP_概念演進與數位轉型.pptx
+++ b/01_每週教學簡報_PPT/ERP_第01週_課程導論、ERP_概念演進與數位轉型.pptx
@@ -12137,7 +12137,7 @@
                 </a:solidFill>
                 <a:latin typeface="微軟正黑體"/>
               </a:rPr>
-              <a:t>期中報告繳交：40% (期中實務流程分析報告，線上系統繳交)</a:t>
+              <a:t>期中考：40% (期中實務流程分析與學習評量，線上系統登錄/繳交)</a:t>
             </a:r>
           </a:p>
           <a:p>
@@ -12165,7 +12165,7 @@
                 </a:solidFill>
                 <a:latin typeface="微軟正黑體"/>
               </a:rPr>
-              <a:t>期末專題報告繳交：40% (企業 ERP ✕ AI 專案成果，線上系統繳交)</a:t>
+              <a:t>期末考：40% (期末 ERP ✕ AI 專案成果發表與檢定，線上系統登錄/繳交)</a:t>
             </a:r>
           </a:p>
           <a:p>
@@ -16694,7 +16694,7 @@
                 </a:solidFill>
                 <a:latin typeface="微軟正黑體"/>
               </a:rPr>
-              <a:t>凡取得證照者，於線上報告繳交時勾選證照加分，老師後台即時核發加分！</a:t>
+              <a:t>凡取得證照者，於線上考評成果專區勾選證照加分，老師後台即時核發加分！</a:t>
             </a:r>
           </a:p>
         </p:txBody>
@@ -18234,7 +18234,7 @@
                 </a:solidFill>
                 <a:latin typeface="微軟正黑體"/>
               </a:rPr>
-              <a:t>⚠️【真實課堂慘痛經驗】：</a:t>
+              <a:t>⚠️【課堂實務避坑經驗】：</a:t>
             </a:r>
           </a:p>
           <a:p>
@@ -19464,7 +19464,7 @@
                 </a:solidFill>
                 <a:latin typeface="微軟正黑體"/>
               </a:rPr>
-              <a:t>【目錄巡檢】步驟 28：命令列切換進入第 01 週專案目錄</a:t>
+              <a:t>【環境檢核】步驟 28：確認 Antigravity CLI 認證成功與指令就緒</a:t>
             </a:r>
           </a:p>
         </p:txBody>
@@ -19493,197 +19493,141 @@
           <a:p>
             <a:pPr>
               <a:spcBef>
-                <a:spcPts val="100"/>
-              </a:spcBef>
-              <a:spcAft>
-                <a:spcPts val="800"/>
-              </a:spcAft>
-            </a:pPr>
-            <a:r>
-              <a:rPr sz="2800" b="1">
-                <a:solidFill>
-                  <a:srgbClr val="D97706"/>
-                </a:solidFill>
-                <a:latin typeface="微軟正黑體"/>
-              </a:rPr>
-              <a:t>• </a:t>
-            </a:r>
-            <a:r>
-              <a:rPr sz="2800">
-                <a:solidFill>
-                  <a:srgbClr val="0F172A"/>
-                </a:solidFill>
-                <a:latin typeface="微軟正黑體"/>
-              </a:rPr>
-              <a:t>在 PowerShell 中使用 `cd` 指令切換到實作資料夾：</a:t>
-            </a:r>
-          </a:p>
-          <a:p>
-            <a:pPr>
-              <a:spcBef>
-                <a:spcPts val="100"/>
-              </a:spcBef>
-              <a:spcAft>
-                <a:spcPts val="800"/>
-              </a:spcAft>
-            </a:pPr>
-            <a:r>
-              <a:rPr sz="2800" b="1">
-                <a:solidFill>
-                  <a:srgbClr val="D97706"/>
-                </a:solidFill>
-                <a:latin typeface="微軟正黑體"/>
-              </a:rPr>
-              <a:t>• </a:t>
-            </a:r>
-            <a:r>
-              <a:rPr sz="2800">
-                <a:solidFill>
-                  <a:srgbClr val="0F172A"/>
-                </a:solidFill>
-                <a:latin typeface="微軟正黑體"/>
-              </a:rPr>
-              <a:t>• 輸入：`cd D:/projects/02_每週Antigravity實作專案/01_Week01_企業資料結構與主檔實體建模`</a:t>
-            </a:r>
-          </a:p>
-          <a:p>
-            <a:pPr>
-              <a:spcBef>
-                <a:spcPts val="100"/>
-              </a:spcBef>
-              <a:spcAft>
-                <a:spcPts val="800"/>
-              </a:spcAft>
-            </a:pPr>
-            <a:r>
-              <a:rPr sz="2800" b="1">
-                <a:solidFill>
-                  <a:srgbClr val="D97706"/>
-                </a:solidFill>
-                <a:latin typeface="微軟正黑體"/>
-              </a:rPr>
-              <a:t>• </a:t>
-            </a:r>
-            <a:r>
-              <a:rPr sz="2800">
-                <a:solidFill>
-                  <a:srgbClr val="0F172A"/>
-                </a:solidFill>
-                <a:latin typeface="微軟正黑體"/>
-              </a:rPr>
-              <a:t>輸入指令 `dir` 查看資料夾中四大關鍵檔案：</a:t>
-            </a:r>
-          </a:p>
-          <a:p>
-            <a:pPr>
-              <a:spcBef>
-                <a:spcPts val="100"/>
-              </a:spcBef>
-              <a:spcAft>
-                <a:spcPts val="800"/>
-              </a:spcAft>
-            </a:pPr>
-            <a:r>
-              <a:rPr sz="2800" b="1">
-                <a:solidFill>
-                  <a:srgbClr val="D97706"/>
-                </a:solidFill>
-                <a:latin typeface="微軟正黑體"/>
-              </a:rPr>
-              <a:t>• </a:t>
-            </a:r>
-            <a:r>
-              <a:rPr sz="2800">
-                <a:solidFill>
-                  <a:srgbClr val="0F172A"/>
-                </a:solidFill>
-                <a:latin typeface="微軟正黑體"/>
-              </a:rPr>
-              <a:t>1. `README.md`：本週任務說明書 (AS-IS 痛點與 TO-BE 解法)</a:t>
-            </a:r>
-          </a:p>
-          <a:p>
-            <a:pPr>
-              <a:spcBef>
-                <a:spcPts val="100"/>
-              </a:spcBef>
-              <a:spcAft>
-                <a:spcPts val="800"/>
-              </a:spcAft>
-            </a:pPr>
-            <a:r>
-              <a:rPr sz="2800" b="1">
-                <a:solidFill>
-                  <a:srgbClr val="D97706"/>
-                </a:solidFill>
-                <a:latin typeface="微軟正黑體"/>
-              </a:rPr>
-              <a:t>• </a:t>
-            </a:r>
-            <a:r>
-              <a:rPr sz="2800">
-                <a:solidFill>
-                  <a:srgbClr val="0F172A"/>
-                </a:solidFill>
-                <a:latin typeface="微軟正黑體"/>
-              </a:rPr>
-              <a:t>2. `sample_data.json`：企業原始混亂資料 (內含缺失值與重複項)</a:t>
-            </a:r>
-          </a:p>
-          <a:p>
-            <a:pPr>
-              <a:spcBef>
-                <a:spcPts val="100"/>
-              </a:spcBef>
-              <a:spcAft>
-                <a:spcPts val="800"/>
-              </a:spcAft>
-            </a:pPr>
-            <a:r>
-              <a:rPr sz="2800" b="1">
-                <a:solidFill>
-                  <a:srgbClr val="D97706"/>
-                </a:solidFill>
-                <a:latin typeface="微軟正黑體"/>
-              </a:rPr>
-              <a:t>• </a:t>
-            </a:r>
-            <a:r>
-              <a:rPr sz="2800">
-                <a:solidFill>
-                  <a:srgbClr val="0F172A"/>
-                </a:solidFill>
-                <a:latin typeface="微軟正黑體"/>
-              </a:rPr>
-              <a:t>3. `starter.py`：實務邏輯程式碼 ｜ 4. `verify.py`：評分驗證程式</a:t>
-            </a:r>
-          </a:p>
-          <a:p>
-            <a:pPr>
-              <a:spcBef>
-                <a:spcPts val="100"/>
-              </a:spcBef>
-              <a:spcAft>
-                <a:spcPts val="800"/>
-              </a:spcAft>
-            </a:pPr>
-            <a:r>
-              <a:rPr sz="2800" b="1">
-                <a:solidFill>
-                  <a:srgbClr val="D97706"/>
-                </a:solidFill>
-                <a:latin typeface="微軟正黑體"/>
-              </a:rPr>
-              <a:t>• </a:t>
-            </a:r>
-            <a:r>
-              <a:rPr sz="2800">
-                <a:solidFill>
-                  <a:srgbClr val="0F172A"/>
-                </a:solidFill>
-                <a:latin typeface="微軟正黑體"/>
-              </a:rPr>
-              <a:t>不需要 VS Code！用 Windows 內建記事本 (Notepad) 就能直接檢視修改！</a:t>
+                <a:spcPts val="200"/>
+              </a:spcBef>
+              <a:spcAft>
+                <a:spcPts val="1400"/>
+              </a:spcAft>
+            </a:pPr>
+            <a:r>
+              <a:rPr sz="2800" b="1">
+                <a:solidFill>
+                  <a:srgbClr val="D97706"/>
+                </a:solidFill>
+                <a:latin typeface="微軟正黑體"/>
+              </a:rPr>
+              <a:t>• </a:t>
+            </a:r>
+            <a:r>
+              <a:rPr sz="2800">
+                <a:solidFill>
+                  <a:srgbClr val="0F172A"/>
+                </a:solidFill>
+                <a:latin typeface="微軟正黑體"/>
+              </a:rPr>
+              <a:t>在 PowerShell 中輸入指令檢驗工具狀態：</a:t>
+            </a:r>
+          </a:p>
+          <a:p>
+            <a:pPr>
+              <a:spcBef>
+                <a:spcPts val="200"/>
+              </a:spcBef>
+              <a:spcAft>
+                <a:spcPts val="1400"/>
+              </a:spcAft>
+            </a:pPr>
+            <a:r>
+              <a:rPr sz="2800" b="1">
+                <a:solidFill>
+                  <a:srgbClr val="D97706"/>
+                </a:solidFill>
+                <a:latin typeface="微軟正黑體"/>
+              </a:rPr>
+              <a:t>• </a:t>
+            </a:r>
+            <a:r>
+              <a:rPr sz="2800">
+                <a:solidFill>
+                  <a:srgbClr val="0F172A"/>
+                </a:solidFill>
+                <a:latin typeface="微軟正黑體"/>
+              </a:rPr>
+              <a:t>• 輸入：`python -m antigravity --version` 或查看指令幫助</a:t>
+            </a:r>
+          </a:p>
+          <a:p>
+            <a:pPr>
+              <a:spcBef>
+                <a:spcPts val="200"/>
+              </a:spcBef>
+              <a:spcAft>
+                <a:spcPts val="1400"/>
+              </a:spcAft>
+            </a:pPr>
+            <a:r>
+              <a:rPr sz="2800" b="1">
+                <a:solidFill>
+                  <a:srgbClr val="D97706"/>
+                </a:solidFill>
+                <a:latin typeface="微軟正黑體"/>
+              </a:rPr>
+              <a:t>• </a:t>
+            </a:r>
+            <a:r>
+              <a:rPr sz="2800">
+                <a:solidFill>
+                  <a:srgbClr val="0F172A"/>
+                </a:solidFill>
+                <a:latin typeface="微軟正黑體"/>
+              </a:rPr>
+              <a:t>看到相關版本或說明資訊，代表本機執行環境已完全就緒！</a:t>
+            </a:r>
+          </a:p>
+          <a:p>
+            <a:pPr>
+              <a:spcBef>
+                <a:spcPts val="200"/>
+              </a:spcBef>
+              <a:spcAft>
+                <a:spcPts val="1400"/>
+              </a:spcAft>
+            </a:pPr>
+            <a:r>
+              <a:rPr sz="2800" b="1">
+                <a:solidFill>
+                  <a:srgbClr val="D97706"/>
+                </a:solidFill>
+                <a:latin typeface="微軟正黑體"/>
+              </a:rPr>
+              <a:t>• </a:t>
+            </a:r>
+            <a:r>
+              <a:rPr sz="2800">
+                <a:solidFill>
+                  <a:srgbClr val="0F172A"/>
+                </a:solidFill>
+                <a:latin typeface="微軟正黑體"/>
+              </a:rPr>
+              <a:t>第一週的核心任務在於『打穩環境基礎』，排除一切帳號與認證疑難雜症</a:t>
+            </a:r>
+          </a:p>
+          <a:p>
+            <a:pPr>
+              <a:spcBef>
+                <a:spcPts val="200"/>
+              </a:spcBef>
+              <a:spcAft>
+                <a:spcPts val="1400"/>
+              </a:spcAft>
+            </a:pPr>
+            <a:r>
+              <a:rPr sz="2800" b="1">
+                <a:solidFill>
+                  <a:srgbClr val="D97706"/>
+                </a:solidFill>
+                <a:latin typeface="微軟正黑體"/>
+              </a:rPr>
+              <a:t>• </a:t>
+            </a:r>
+            <a:r>
+              <a:rPr sz="2800">
+                <a:solidFill>
+                  <a:srgbClr val="0F172A"/>
+                </a:solidFill>
+                <a:latin typeface="微軟正黑體"/>
+              </a:rPr>
+              <a:t>同學無需背誦複雜語法，一步步跟著課堂節奏走，就能輕鬆掌握！</a:t>
             </a:r>
           </a:p>
         </p:txBody>
@@ -19737,7 +19681,7 @@
                 </a:solidFill>
                 <a:latin typeface="微軟正黑體"/>
               </a:rPr>
-              <a:t>💡 關鍵提點：Tab 鍵是鍵盤神鍵，輸入開頭兩三個字母按 Tab 即可自動補全路徑！</a:t>
+              <a:t>💡 關鍵提點：環境配置成功就是良好學習的起點！</a:t>
             </a:r>
           </a:p>
         </p:txBody>
@@ -19919,7 +19863,7 @@
                 </a:solidFill>
                 <a:latin typeface="微軟正黑體"/>
               </a:rPr>
-              <a:t>【實務運算】步驟 29：執行 `python starter.py` 產出企業主檔</a:t>
+              <a:t>【下週預告】步驟 29：Antigravity 專案實作預告 (第 02 週正式啟航)</a:t>
             </a:r>
           </a:p>
         </p:txBody>
@@ -19948,169 +19892,141 @@
           <a:p>
             <a:pPr>
               <a:spcBef>
-                <a:spcPts val="100"/>
-              </a:spcBef>
-              <a:spcAft>
-                <a:spcPts val="800"/>
-              </a:spcAft>
-            </a:pPr>
-            <a:r>
-              <a:rPr sz="2800" b="1">
-                <a:solidFill>
-                  <a:srgbClr val="D97706"/>
-                </a:solidFill>
-                <a:latin typeface="微軟正黑體"/>
-              </a:rPr>
-              <a:t>• </a:t>
-            </a:r>
-            <a:r>
-              <a:rPr sz="2800">
-                <a:solidFill>
-                  <a:srgbClr val="0F172A"/>
-                </a:solidFill>
-                <a:latin typeface="微軟正黑體"/>
-              </a:rPr>
-              <a:t>在終端機中輸入指令：</a:t>
-            </a:r>
-          </a:p>
-          <a:p>
-            <a:pPr>
-              <a:spcBef>
-                <a:spcPts val="100"/>
-              </a:spcBef>
-              <a:spcAft>
-                <a:spcPts val="800"/>
-              </a:spcAft>
-            </a:pPr>
-            <a:r>
-              <a:rPr sz="2800" b="1">
-                <a:solidFill>
-                  <a:srgbClr val="D97706"/>
-                </a:solidFill>
-                <a:latin typeface="微軟正黑體"/>
-              </a:rPr>
-              <a:t>• </a:t>
-            </a:r>
-            <a:r>
-              <a:rPr sz="2800">
-                <a:solidFill>
-                  <a:srgbClr val="0F172A"/>
-                </a:solidFill>
-                <a:latin typeface="微軟正黑體"/>
-              </a:rPr>
-              <a:t>• `python starter.py` 並按下 Enter</a:t>
-            </a:r>
-          </a:p>
-          <a:p>
-            <a:pPr>
-              <a:spcBef>
-                <a:spcPts val="100"/>
-              </a:spcBef>
-              <a:spcAft>
-                <a:spcPts val="800"/>
-              </a:spcAft>
-            </a:pPr>
-            <a:r>
-              <a:rPr sz="2800" b="1">
-                <a:solidFill>
-                  <a:srgbClr val="D97706"/>
-                </a:solidFill>
-                <a:latin typeface="微軟正黑體"/>
-              </a:rPr>
-              <a:t>• </a:t>
-            </a:r>
-            <a:r>
-              <a:rPr sz="2800">
-                <a:solidFill>
-                  <a:srgbClr val="0F172A"/>
-                </a:solidFill>
-                <a:latin typeface="微軟正黑體"/>
-              </a:rPr>
-              <a:t>程式會自動讀取 `sample_data.json` 中的混亂主檔資料</a:t>
-            </a:r>
-          </a:p>
-          <a:p>
-            <a:pPr>
-              <a:spcBef>
-                <a:spcPts val="100"/>
-              </a:spcBef>
-              <a:spcAft>
-                <a:spcPts val="800"/>
-              </a:spcAft>
-            </a:pPr>
-            <a:r>
-              <a:rPr sz="2800" b="1">
-                <a:solidFill>
-                  <a:srgbClr val="D97706"/>
-                </a:solidFill>
-                <a:latin typeface="微軟正黑體"/>
-              </a:rPr>
-              <a:t>• </a:t>
-            </a:r>
-            <a:r>
-              <a:rPr sz="2800">
-                <a:solidFill>
-                  <a:srgbClr val="0F172A"/>
-                </a:solidFill>
-                <a:latin typeface="微軟正黑體"/>
-              </a:rPr>
-              <a:t>透過 Antigravity Agentic 邏輯執行：資料格式標準化、去除重複值與防呆防錯</a:t>
-            </a:r>
-          </a:p>
-          <a:p>
-            <a:pPr>
-              <a:spcBef>
-                <a:spcPts val="100"/>
-              </a:spcBef>
-              <a:spcAft>
-                <a:spcPts val="800"/>
-              </a:spcAft>
-            </a:pPr>
-            <a:r>
-              <a:rPr sz="2800" b="1">
-                <a:solidFill>
-                  <a:srgbClr val="D97706"/>
-                </a:solidFill>
-                <a:latin typeface="微軟正黑體"/>
-              </a:rPr>
-              <a:t>• </a:t>
-            </a:r>
-            <a:r>
-              <a:rPr sz="2800">
-                <a:solidFill>
-                  <a:srgbClr val="0F172A"/>
-                </a:solidFill>
-                <a:latin typeface="微軟正黑體"/>
-              </a:rPr>
-              <a:t>終端機印出執行進度，並在當前目錄自動產出成果交付檔案：</a:t>
-            </a:r>
-          </a:p>
-          <a:p>
-            <a:pPr>
-              <a:spcBef>
-                <a:spcPts val="100"/>
-              </a:spcBef>
-              <a:spcAft>
-                <a:spcPts val="800"/>
-              </a:spcAft>
-            </a:pPr>
-            <a:r>
-              <a:rPr sz="2800" b="1">
-                <a:solidFill>
-                  <a:srgbClr val="D97706"/>
-                </a:solidFill>
-                <a:latin typeface="微軟正黑體"/>
-              </a:rPr>
-              <a:t>• </a:t>
-            </a:r>
-            <a:r>
-              <a:rPr sz="2800">
-                <a:solidFill>
-                  <a:srgbClr val="0F172A"/>
-                </a:solidFill>
-                <a:latin typeface="微軟正黑體"/>
-              </a:rPr>
-              <a:t>• `master_data_clean.json` (清洗後之企業乾淨主檔)</a:t>
+                <a:spcPts val="200"/>
+              </a:spcBef>
+              <a:spcAft>
+                <a:spcPts val="1400"/>
+              </a:spcAft>
+            </a:pPr>
+            <a:r>
+              <a:rPr sz="2800" b="1">
+                <a:solidFill>
+                  <a:srgbClr val="D97706"/>
+                </a:solidFill>
+                <a:latin typeface="微軟正黑體"/>
+              </a:rPr>
+              <a:t>• </a:t>
+            </a:r>
+            <a:r>
+              <a:rPr sz="2800">
+                <a:solidFill>
+                  <a:srgbClr val="0F172A"/>
+                </a:solidFill>
+                <a:latin typeface="微軟正黑體"/>
+              </a:rPr>
+              <a:t>⚠️【教學節奏溫馨提醒】：第一週專注於帳號、CLI 認證與雲端備份！</a:t>
+            </a:r>
+          </a:p>
+          <a:p>
+            <a:pPr>
+              <a:spcBef>
+                <a:spcPts val="200"/>
+              </a:spcBef>
+              <a:spcAft>
+                <a:spcPts val="1400"/>
+              </a:spcAft>
+            </a:pPr>
+            <a:r>
+              <a:rPr sz="2800" b="1">
+                <a:solidFill>
+                  <a:srgbClr val="D97706"/>
+                </a:solidFill>
+                <a:latin typeface="微軟正黑體"/>
+              </a:rPr>
+              <a:t>• </a:t>
+            </a:r>
+            <a:r>
+              <a:rPr sz="2800">
+                <a:solidFill>
+                  <a:srgbClr val="0F172A"/>
+                </a:solidFill>
+                <a:latin typeface="微軟正黑體"/>
+              </a:rPr>
+              <a:t>課堂程式碼實作將於【下週第 02 週正式展開】：</a:t>
+            </a:r>
+          </a:p>
+          <a:p>
+            <a:pPr>
+              <a:spcBef>
+                <a:spcPts val="200"/>
+              </a:spcBef>
+              <a:spcAft>
+                <a:spcPts val="1400"/>
+              </a:spcAft>
+            </a:pPr>
+            <a:r>
+              <a:rPr sz="2800" b="1">
+                <a:solidFill>
+                  <a:srgbClr val="D97706"/>
+                </a:solidFill>
+                <a:latin typeface="微軟正黑體"/>
+              </a:rPr>
+              <a:t>• </a:t>
+            </a:r>
+            <a:r>
+              <a:rPr sz="2800">
+                <a:solidFill>
+                  <a:srgbClr val="0F172A"/>
+                </a:solidFill>
+                <a:latin typeface="微軟正黑體"/>
+              </a:rPr>
+              <a:t>• 第 02 週專案主題：企業流程管理 (BPR) ✕ 狀態機流程自動化實作</a:t>
+            </a:r>
+          </a:p>
+          <a:p>
+            <a:pPr>
+              <a:spcBef>
+                <a:spcPts val="200"/>
+              </a:spcBef>
+              <a:spcAft>
+                <a:spcPts val="1400"/>
+              </a:spcAft>
+            </a:pPr>
+            <a:r>
+              <a:rPr sz="2800" b="1">
+                <a:solidFill>
+                  <a:srgbClr val="D97706"/>
+                </a:solidFill>
+                <a:latin typeface="微軟正黑體"/>
+              </a:rPr>
+              <a:t>• </a:t>
+            </a:r>
+            <a:r>
+              <a:rPr sz="2800">
+                <a:solidFill>
+                  <a:srgbClr val="0F172A"/>
+                </a:solidFill>
+                <a:latin typeface="微軟正黑體"/>
+              </a:rPr>
+              <a:t>• 同學將利用今天配置好的本機環境，體驗 AI Agent 自動化流轉單據的威力</a:t>
+            </a:r>
+          </a:p>
+          <a:p>
+            <a:pPr>
+              <a:spcBef>
+                <a:spcPts val="200"/>
+              </a:spcBef>
+              <a:spcAft>
+                <a:spcPts val="1400"/>
+              </a:spcAft>
+            </a:pPr>
+            <a:r>
+              <a:rPr sz="2800" b="1">
+                <a:solidFill>
+                  <a:srgbClr val="D97706"/>
+                </a:solidFill>
+                <a:latin typeface="微軟正黑體"/>
+              </a:rPr>
+              <a:t>• </a:t>
+            </a:r>
+            <a:r>
+              <a:rPr sz="2800">
+                <a:solidFill>
+                  <a:srgbClr val="0F172A"/>
+                </a:solidFill>
+                <a:latin typeface="微軟正黑體"/>
+              </a:rPr>
+              <a:t>第一週不急著跑程式，讓每位同學都有充裕時間確認電腦教室各項工具運作正常！</a:t>
             </a:r>
           </a:p>
         </p:txBody>
@@ -20164,7 +20080,7 @@
                 </a:solidFill>
                 <a:latin typeface="微軟正黑體"/>
               </a:rPr>
-              <a:t>💡 關鍵提點：看見終端機印出清洗成功筆數，代表第一階段運算順利達標！</a:t>
+              <a:t>💡 關鍵提點：按部就班、循序漸進，保證每位同學都能跟上！</a:t>
             </a:r>
           </a:p>
         </p:txBody>
@@ -20346,7 +20262,7 @@
                 </a:solidFill>
                 <a:latin typeface="微軟正黑體"/>
               </a:rPr>
-              <a:t>【自我驗證】步驟 30：執行 `python verify.py` 自我檢查評分</a:t>
+              <a:t>【檔案管理】步驟 30：建立個人專案安全目錄與檔案檢視技巧</a:t>
             </a:r>
           </a:p>
         </p:txBody>
@@ -20375,169 +20291,141 @@
           <a:p>
             <a:pPr>
               <a:spcBef>
-                <a:spcPts val="100"/>
-              </a:spcBef>
-              <a:spcAft>
-                <a:spcPts val="800"/>
-              </a:spcAft>
-            </a:pPr>
-            <a:r>
-              <a:rPr sz="2800" b="1">
-                <a:solidFill>
-                  <a:srgbClr val="D97706"/>
-                </a:solidFill>
-                <a:latin typeface="微軟正黑體"/>
-              </a:rPr>
-              <a:t>• </a:t>
-            </a:r>
-            <a:r>
-              <a:rPr sz="2800">
-                <a:solidFill>
-                  <a:srgbClr val="0F172A"/>
-                </a:solidFill>
-                <a:latin typeface="微軟正黑體"/>
-              </a:rPr>
-              <a:t>每週專案最讚的設計：自帶評分老師 `verify.py`！</a:t>
-            </a:r>
-          </a:p>
-          <a:p>
-            <a:pPr>
-              <a:spcBef>
-                <a:spcPts val="100"/>
-              </a:spcBef>
-              <a:spcAft>
-                <a:spcPts val="800"/>
-              </a:spcAft>
-            </a:pPr>
-            <a:r>
-              <a:rPr sz="2800" b="1">
-                <a:solidFill>
-                  <a:srgbClr val="D97706"/>
-                </a:solidFill>
-                <a:latin typeface="微軟正黑體"/>
-              </a:rPr>
-              <a:t>• </a:t>
-            </a:r>
-            <a:r>
-              <a:rPr sz="2800">
-                <a:solidFill>
-                  <a:srgbClr val="0F172A"/>
-                </a:solidFill>
-                <a:latin typeface="微軟正黑體"/>
-              </a:rPr>
-              <a:t>在終端機中鍵入指令：`python verify.py` 並按下 Enter</a:t>
-            </a:r>
-          </a:p>
-          <a:p>
-            <a:pPr>
-              <a:spcBef>
-                <a:spcPts val="100"/>
-              </a:spcBef>
-              <a:spcAft>
-                <a:spcPts val="800"/>
-              </a:spcAft>
-            </a:pPr>
-            <a:r>
-              <a:rPr sz="2800" b="1">
-                <a:solidFill>
-                  <a:srgbClr val="D97706"/>
-                </a:solidFill>
-                <a:latin typeface="微軟正黑體"/>
-              </a:rPr>
-              <a:t>• </a:t>
-            </a:r>
-            <a:r>
-              <a:rPr sz="2800">
-                <a:solidFill>
-                  <a:srgbClr val="0F172A"/>
-                </a:solidFill>
-                <a:latin typeface="微軟正黑體"/>
-              </a:rPr>
-              <a:t>程式會自動執行 3~5 項企業業務規則檢驗 (如：主檔欄位驗證、除錯率計算)</a:t>
-            </a:r>
-          </a:p>
-          <a:p>
-            <a:pPr>
-              <a:spcBef>
-                <a:spcPts val="100"/>
-              </a:spcBef>
-              <a:spcAft>
-                <a:spcPts val="800"/>
-              </a:spcAft>
-            </a:pPr>
-            <a:r>
-              <a:rPr sz="2800" b="1">
-                <a:solidFill>
-                  <a:srgbClr val="D97706"/>
-                </a:solidFill>
-                <a:latin typeface="微軟正黑體"/>
-              </a:rPr>
-              <a:t>• </a:t>
-            </a:r>
-            <a:r>
-              <a:rPr sz="2800">
-                <a:solidFill>
-                  <a:srgbClr val="0F172A"/>
-                </a:solidFill>
-                <a:latin typeface="微軟正黑體"/>
-              </a:rPr>
-              <a:t>若全部通過，終端機會噴出彩色字樣：</a:t>
-            </a:r>
-          </a:p>
-          <a:p>
-            <a:pPr>
-              <a:spcBef>
-                <a:spcPts val="100"/>
-              </a:spcBef>
-              <a:spcAft>
-                <a:spcPts val="800"/>
-              </a:spcAft>
-            </a:pPr>
-            <a:r>
-              <a:rPr sz="2800" b="1">
-                <a:solidFill>
-                  <a:srgbClr val="D97706"/>
-                </a:solidFill>
-                <a:latin typeface="微軟正黑體"/>
-              </a:rPr>
-              <a:t>• </a:t>
-            </a:r>
-            <a:r>
-              <a:rPr sz="2800">
-                <a:solidFill>
-                  <a:srgbClr val="0F172A"/>
-                </a:solidFill>
-                <a:latin typeface="微軟正黑體"/>
-              </a:rPr>
-              <a:t>✨【SUCCESS】All validation tests passed! 實作成果完全符合企業標準！</a:t>
-            </a:r>
-          </a:p>
-          <a:p>
-            <a:pPr>
-              <a:spcBef>
-                <a:spcPts val="100"/>
-              </a:spcBef>
-              <a:spcAft>
-                <a:spcPts val="800"/>
-              </a:spcAft>
-            </a:pPr>
-            <a:r>
-              <a:rPr sz="2800" b="1">
-                <a:solidFill>
-                  <a:srgbClr val="D97706"/>
-                </a:solidFill>
-                <a:latin typeface="微軟正黑體"/>
-              </a:rPr>
-              <a:t>• </a:t>
-            </a:r>
-            <a:r>
-              <a:rPr sz="2800">
-                <a:solidFill>
-                  <a:srgbClr val="0F172A"/>
-                </a:solidFill>
-                <a:latin typeface="微軟正黑體"/>
-              </a:rPr>
-              <a:t>若有錯誤，會清楚提示是哪一行規則未達標，修改後再測即可！</a:t>
+                <a:spcPts val="200"/>
+              </a:spcBef>
+              <a:spcAft>
+                <a:spcPts val="1400"/>
+              </a:spcAft>
+            </a:pPr>
+            <a:r>
+              <a:rPr sz="2800" b="1">
+                <a:solidFill>
+                  <a:srgbClr val="D97706"/>
+                </a:solidFill>
+                <a:latin typeface="微軟正黑體"/>
+              </a:rPr>
+              <a:t>• </a:t>
+            </a:r>
+            <a:r>
+              <a:rPr sz="2800">
+                <a:solidFill>
+                  <a:srgbClr val="0F172A"/>
+                </a:solidFill>
+                <a:latin typeface="微軟正黑體"/>
+              </a:rPr>
+              <a:t>在 D 槽或個人隨身碟建立乾淨的工作目錄 (例：`D:/erp_projects/`)</a:t>
+            </a:r>
+          </a:p>
+          <a:p>
+            <a:pPr>
+              <a:spcBef>
+                <a:spcPts val="200"/>
+              </a:spcBef>
+              <a:spcAft>
+                <a:spcPts val="1400"/>
+              </a:spcAft>
+            </a:pPr>
+            <a:r>
+              <a:rPr sz="2800" b="1">
+                <a:solidFill>
+                  <a:srgbClr val="D97706"/>
+                </a:solidFill>
+                <a:latin typeface="微軟正黑體"/>
+              </a:rPr>
+              <a:t>• </a:t>
+            </a:r>
+            <a:r>
+              <a:rPr sz="2800">
+                <a:solidFill>
+                  <a:srgbClr val="0F172A"/>
+                </a:solidFill>
+                <a:latin typeface="微軟正黑體"/>
+              </a:rPr>
+              <a:t>⚠️ 目錄命名避坑準則：嚴禁使用中文名稱、空格或特殊字元，確保程式讀寫無誤</a:t>
+            </a:r>
+          </a:p>
+          <a:p>
+            <a:pPr>
+              <a:spcBef>
+                <a:spcPts val="200"/>
+              </a:spcBef>
+              <a:spcAft>
+                <a:spcPts val="1400"/>
+              </a:spcAft>
+            </a:pPr>
+            <a:r>
+              <a:rPr sz="2800" b="1">
+                <a:solidFill>
+                  <a:srgbClr val="D97706"/>
+                </a:solidFill>
+                <a:latin typeface="微軟正黑體"/>
+              </a:rPr>
+              <a:t>• </a:t>
+            </a:r>
+            <a:r>
+              <a:rPr sz="2800">
+                <a:solidFill>
+                  <a:srgbClr val="0F172A"/>
+                </a:solidFill>
+                <a:latin typeface="微軟正黑體"/>
+              </a:rPr>
+              <a:t>免裝 VS Code！點擊檔案右鍵選擇【使用記事本 (Notepad) 開啟】即可輕鬆檢視</a:t>
+            </a:r>
+          </a:p>
+          <a:p>
+            <a:pPr>
+              <a:spcBef>
+                <a:spcPts val="200"/>
+              </a:spcBef>
+              <a:spcAft>
+                <a:spcPts val="1400"/>
+              </a:spcAft>
+            </a:pPr>
+            <a:r>
+              <a:rPr sz="2800" b="1">
+                <a:solidFill>
+                  <a:srgbClr val="D97706"/>
+                </a:solidFill>
+                <a:latin typeface="微軟正黑體"/>
+              </a:rPr>
+              <a:t>• </a:t>
+            </a:r>
+            <a:r>
+              <a:rPr sz="2800">
+                <a:solidFill>
+                  <a:srgbClr val="0F172A"/>
+                </a:solidFill>
+                <a:latin typeface="微軟正黑體"/>
+              </a:rPr>
+              <a:t>平時作業與每週專案包均下載解壓於此專屬目錄中，井然有序不混亂</a:t>
+            </a:r>
+          </a:p>
+          <a:p>
+            <a:pPr>
+              <a:spcBef>
+                <a:spcPts val="200"/>
+              </a:spcBef>
+              <a:spcAft>
+                <a:spcPts val="1400"/>
+              </a:spcAft>
+            </a:pPr>
+            <a:r>
+              <a:rPr sz="2800" b="1">
+                <a:solidFill>
+                  <a:srgbClr val="D97706"/>
+                </a:solidFill>
+                <a:latin typeface="微軟正黑體"/>
+              </a:rPr>
+              <a:t>• </a:t>
+            </a:r>
+            <a:r>
+              <a:rPr sz="2800">
+                <a:solidFill>
+                  <a:srgbClr val="0F172A"/>
+                </a:solidFill>
+                <a:latin typeface="微軟正黑體"/>
+              </a:rPr>
+              <a:t>熟悉檔案與資料夾結構，是成為 ERP 系統分析師的基本功！</a:t>
             </a:r>
           </a:p>
         </p:txBody>
@@ -20591,7 +20479,7 @@
                 </a:solidFill>
                 <a:latin typeface="微軟正黑體"/>
               </a:rPr>
-              <a:t>💡 關鍵提點：寫完馬上知道自己對不對，完全不用擔心做錯！</a:t>
+              <a:t>💡 關鍵提點：路徑簡潔規範，後續實作自然零阻礙！</a:t>
             </a:r>
           </a:p>
         </p:txBody>
@@ -21790,7 +21678,7 @@
                 </a:solidFill>
                 <a:latin typeface="微軟正黑體"/>
               </a:rPr>
-              <a:t>• 途徑 3 (作業繳交)：直接到本課程平台的【📤 學生報告繳交】專區上傳成果檔案！</a:t>
+              <a:t>• 途徑 3 (考評專區)：直接到本課程平台的【📝 學生期中／期末考】專區登錄成果檔案！</a:t>
             </a:r>
           </a:p>
         </p:txBody>
@@ -22425,7 +22313,7 @@
                 </a:solidFill>
                 <a:latin typeface="微軟正黑體"/>
               </a:rPr>
-              <a:t>【作業繳交】步驟 34：成果如何讓老師線上看見？</a:t>
+              <a:t>【考評專區】步驟 34：成果如何讓老師線上看見？</a:t>
             </a:r>
           </a:p>
         </p:txBody>
@@ -22476,7 +22364,7 @@
                 </a:solidFill>
                 <a:latin typeface="微軟正黑體"/>
               </a:rPr>
-              <a:t>本課程提供專屬現代化線上繳交專區，不用再寄隨身碟或 Email 附件！</a:t>
+              <a:t>本課程提供專屬現代化線上專區，不用再寄隨身碟或 Email 附件！</a:t>
             </a:r>
           </a:p>
           <a:p>
@@ -22504,7 +22392,7 @@
                 </a:solidFill>
                 <a:latin typeface="微軟正黑體"/>
               </a:rPr>
-              <a:t>兩種成果繳交方式：</a:t>
+              <a:t>兩種成果登錄方式：</a:t>
             </a:r>
           </a:p>
           <a:p>
@@ -22560,7 +22448,7 @@
                 </a:solidFill>
                 <a:latin typeface="微軟正黑體"/>
               </a:rPr>
-              <a:t>2. 【附件檔案上傳】：上傳您的報告 Word/PDF/Markdown 檔案 (10MB 內)</a:t>
+              <a:t>2. 【附件檔案上傳】：上傳您的成果檔案、簡報或企劃書 (10MB 內)</a:t>
             </a:r>
           </a:p>
           <a:p>
@@ -22588,7 +22476,7 @@
                 </a:solidFill>
                 <a:latin typeface="微軟正黑體"/>
               </a:rPr>
-              <a:t>繳交後即刻存入 Firebase 雲端資料庫，老師將在線上親自評閱打分！</a:t>
+              <a:t>送出後即刻存入 Firebase 雲端資料庫，老師將在線上親自評閱打分！</a:t>
             </a:r>
           </a:p>
         </p:txBody>
@@ -22642,7 +22530,7 @@
                 </a:solidFill>
                 <a:latin typeface="微軟正黑體"/>
               </a:rPr>
-              <a:t>💡 關鍵提點：支援手機、平板或筆電隨時登入查閱自己已繳交的歷程。</a:t>
+              <a:t>💡 關鍵提點：支援手機、平板或筆電隨時登入查閱自己已登錄的歷程。</a:t>
             </a:r>
           </a:p>
         </p:txBody>
@@ -22824,7 +22712,7 @@
                 </a:solidFill>
                 <a:latin typeface="微軟正黑體"/>
               </a:rPr>
-              <a:t>【作業繳交】步驟 35：進入課程平台並使用 Google 登入</a:t>
+              <a:t>【考評專區】步驟 35：進入課程平台並使用 Google 登入</a:t>
             </a:r>
           </a:p>
         </p:txBody>
@@ -23069,7 +22957,7 @@
                 </a:solidFill>
                 <a:latin typeface="微軟正黑體"/>
               </a:rPr>
-              <a:t>💡 關鍵提點：綁定學號與姓名後，所有答題紀錄與報告成果均會歸戶至您的個人成績單！</a:t>
+              <a:t>💡 關鍵提點：綁定學號與姓名後，所有答題紀錄與考評成果均會歸戶至您的個人成績單！</a:t>
             </a:r>
           </a:p>
         </p:txBody>
@@ -23251,7 +23139,7 @@
                 </a:solidFill>
                 <a:latin typeface="微軟正黑體"/>
               </a:rPr>
-              <a:t>【作業繳交】步驟 36：進入學生報告繳交專區</a:t>
+              <a:t>【考評專區】步驟 36：進入學生期中／期末考專區</a:t>
             </a:r>
           </a:p>
         </p:txBody>
@@ -23302,7 +23190,7 @@
                 </a:solidFill>
                 <a:latin typeface="微軟正黑體"/>
               </a:rPr>
-              <a:t>點擊頂部導覽列按鈕【📤 學生報告繳交】進入繳交專區</a:t>
+              <a:t>點擊頂部導覽列按鈕【📝 學生期中／期末考】進入專區</a:t>
             </a:r>
           </a:p>
           <a:p>
@@ -23330,7 +23218,7 @@
                 </a:solidFill>
                 <a:latin typeface="微軟正黑體"/>
               </a:rPr>
-              <a:t>欄位 1【繳交報告類別】：依當前進度挑選『期中報告 (40%)』或『期末報告 (40%)』</a:t>
+              <a:t>欄位 1【繳交考評類別】：依當前進度挑選『期中考 (40%)』或『期末考 (40%)』</a:t>
             </a:r>
           </a:p>
           <a:p>
@@ -23358,7 +23246,7 @@
                 </a:solidFill>
                 <a:latin typeface="微軟正黑體"/>
               </a:rPr>
-              <a:t>欄位 2【專案主題 / 標題】：輸入專案題名 (例：`自行車業主檔實體建模實作報告`)</a:t>
+              <a:t>欄位 2【專案主題 / 標題】：輸入專案題名 (例：`自行車業主檔實體建模實作成果`)</a:t>
             </a:r>
           </a:p>
           <a:p>
@@ -23414,7 +23302,7 @@
                 </a:solidFill>
                 <a:latin typeface="微軟正黑體"/>
               </a:rPr>
-              <a:t>欄位 4【線上成果網址】：貼入您的 GitHub 專案或雲端網址</a:t>
+              <a:t>欄位 4【線上成果網址】：貼入您的 GitHub 專案、GitHub Pages 或雲端網址</a:t>
             </a:r>
           </a:p>
           <a:p>
@@ -23442,7 +23330,7 @@
                 </a:solidFill>
                 <a:latin typeface="微軟正黑體"/>
               </a:rPr>
-              <a:t>欄位 5【附件檔案】：若有 PDF/Word 報告亦可一併附加</a:t>
+              <a:t>欄位 5【附件檔案】：若有 PDF/Word/成果報告亦可一併附加</a:t>
             </a:r>
           </a:p>
         </p:txBody>
@@ -23678,7 +23566,7 @@
                 </a:solidFill>
                 <a:latin typeface="微軟正黑體"/>
               </a:rPr>
-              <a:t>【作業繳交】步驟 37：勾選證照特別加分申請</a:t>
+              <a:t>【考評專區】步驟 37：勾選證照特別加分申請</a:t>
             </a:r>
           </a:p>
         </p:txBody>
@@ -23841,7 +23729,7 @@
                 </a:solidFill>
                 <a:latin typeface="微軟正黑體"/>
               </a:rPr>
-              <a:t>確認資料皆填寫完畢後，點擊最下方綠色按鈕【確認送出繳交報告】！</a:t>
+              <a:t>確認資料皆填寫完畢後，點擊最下方綠色按鈕【確認送出繳交考評成果】！</a:t>
             </a:r>
           </a:p>
         </p:txBody>
@@ -24077,7 +23965,7 @@
                 </a:solidFill>
                 <a:latin typeface="微軟正黑體"/>
               </a:rPr>
-              <a:t>【作業繳交】步驟 38：在右側查看即時反饋與老師評語</a:t>
+              <a:t>【考評專區】步驟 38：在右側查看即時反饋與老師評語</a:t>
             </a:r>
           </a:p>
         </p:txBody>
@@ -24128,7 +24016,7 @@
                 </a:solidFill>
                 <a:latin typeface="微軟正黑體"/>
               </a:rPr>
-              <a:t>送出報告後，右側『我的報告繳交歷程與成績』會立即出現您的報告卡片！</a:t>
+              <a:t>送出成果後，右側『我的期中／期末考繳交歷程與成績』會立即出現您的卡片！</a:t>
             </a:r>
           </a:p>
           <a:p>
@@ -27180,7 +27068,7 @@
                 </a:solidFill>
                 <a:latin typeface="微軟正黑體"/>
               </a:rPr>
-              <a:t>✅ 任務 2：確認已將課程倉庫 Clone 至本機並能以 VS Code 開啟</a:t>
+              <a:t>✅ 任務 2：確認在本機 PowerShell 成功完成 `antigravity login` 授權認證</a:t>
             </a:r>
           </a:p>
           <a:p>
@@ -27208,7 +27096,7 @@
                 </a:solidFill>
                 <a:latin typeface="微軟正黑體"/>
               </a:rPr>
-              <a:t>✅ 任務 3：在終端機成功執行 `python starter.py` 與 `python verify.py`</a:t>
+              <a:t>✅ 任務 3：確認已在 D 槽或隨身碟建立乾淨的工作目錄 (例：`D:/erp_projects/`)</a:t>
             </a:r>
           </a:p>
           <a:p>
@@ -27264,7 +27152,7 @@
                 </a:solidFill>
                 <a:latin typeface="微軟正黑體"/>
               </a:rPr>
-              <a:t>下週預告 (第 02 週)：企業模式與企業流程管理 (BPR) ✕ 狀態機自動化實務！</a:t>
+              <a:t>下週預告 (第 02 週)：企業流程管理 (BPR) ✕ Antigravity 實作專案正式啟航！</a:t>
             </a:r>
           </a:p>
         </p:txBody>
